--- a/docs/manage-dotood-sistem-surgalt.pptx
+++ b/docs/manage-dotood-sistem-surgalt.pptx
@@ -3143,7 +3143,7 @@
         <p:spPr>
           <a:xfrm>
             <a:off x="0" y="0"/>
-            <a:ext cx="12191695" cy="1417320"/>
+            <a:ext cx="12191695" cy="1353312"/>
           </a:xfrm>
           <a:prstGeom prst="rect">
             <a:avLst/>
@@ -3185,7 +3185,7 @@
         </p:nvSpPr>
         <p:spPr>
           <a:xfrm>
-            <a:off x="0" y="1417320"/>
+            <a:off x="0" y="1353312"/>
             <a:ext cx="12191695" cy="73152"/>
           </a:xfrm>
           <a:prstGeom prst="rect">
@@ -3236,8 +3236,8 @@
         </p:blipFill>
         <p:spPr>
           <a:xfrm>
-            <a:off x="365760" y="256032"/>
-            <a:ext cx="868680" cy="868680"/>
+            <a:off x="365760" y="237744"/>
+            <a:ext cx="841248" cy="841248"/>
           </a:xfrm>
           <a:prstGeom prst="rect">
             <a:avLst/>
@@ -3252,8 +3252,8 @@
         </p:nvSpPr>
         <p:spPr>
           <a:xfrm>
-            <a:off x="1371600" y="201168"/>
-            <a:ext cx="10424160" cy="502920"/>
+            <a:off x="1371600" y="164592"/>
+            <a:ext cx="10424160" cy="457200"/>
           </a:xfrm>
           <a:prstGeom prst="rect">
             <a:avLst/>
@@ -3275,7 +3275,7 @@
                 <a:latin typeface="Calibri"/>
                 <a:ea typeface="Calibri"/>
               </a:rPr>
-              <a:t>Дорноговь аймгийн ЗДТГ — Дотоод нэгдсэн систем (manage)</a:t>
+              <a:t>Дорноговь аймгийн ЗДТГ — Дотоод нэгдсэн систем</a:t>
             </a:r>
           </a:p>
         </p:txBody>
@@ -3288,8 +3288,8 @@
         </p:nvSpPr>
         <p:spPr>
           <a:xfrm>
-            <a:off x="1371600" y="713232"/>
-            <a:ext cx="10424160" cy="365760"/>
+            <a:off x="1371600" y="640080"/>
+            <a:ext cx="10424160" cy="292608"/>
           </a:xfrm>
           <a:prstGeom prst="rect">
             <a:avLst/>
@@ -3324,8 +3324,8 @@
         </p:nvSpPr>
         <p:spPr>
           <a:xfrm>
-            <a:off x="1371600" y="1024128"/>
-            <a:ext cx="10424160" cy="292608"/>
+            <a:off x="1371600" y="950976"/>
+            <a:ext cx="10424160" cy="274320"/>
           </a:xfrm>
           <a:prstGeom prst="rect">
             <a:avLst/>
@@ -3347,7 +3347,7 @@
                 <a:latin typeface="Calibri"/>
                 <a:ea typeface="Calibri"/>
               </a:rPr>
-              <a:t>Албан хаагчдад зориулсан сургалт  ·  нэвтрэх боломжууд</a:t>
+              <a:t>Сургалт  ·  нэвтрэх боломжууд  ·  бодит нэвтрэх хуудас</a:t>
             </a:r>
           </a:p>
         </p:txBody>
@@ -3360,8 +3360,8 @@
         </p:nvSpPr>
         <p:spPr>
           <a:xfrm>
-            <a:off x="320040" y="1664208"/>
-            <a:ext cx="5989320" cy="4736592"/>
+            <a:off x="292608" y="1591056"/>
+            <a:ext cx="4160520" cy="4828032"/>
           </a:xfrm>
           <a:prstGeom prst="roundRect">
             <a:avLst>
@@ -3407,8 +3407,8 @@
         </p:nvSpPr>
         <p:spPr>
           <a:xfrm>
-            <a:off x="502920" y="1783080"/>
-            <a:ext cx="5623560" cy="329184"/>
+            <a:off x="438912" y="1664208"/>
+            <a:ext cx="3886200" cy="256032"/>
           </a:xfrm>
           <a:prstGeom prst="rect">
             <a:avLst/>
@@ -3423,63 +3423,42 @@
           <a:p>
             <a:pPr algn="l"/>
             <a:r>
-              <a:rPr sz="1600" b="1">
+              <a:rPr sz="1200" b="1">
                 <a:solidFill>
                   <a:srgbClr val="0F2F63"/>
                 </a:solidFill>
                 <a:latin typeface="Calibri"/>
                 <a:ea typeface="Calibri"/>
               </a:rPr>
-              <a:t>Нэвтрэх боломжууд</a:t>
-            </a:r>
-          </a:p>
-        </p:txBody>
-      </p:sp>
-      <p:sp>
-        <p:nvSpPr>
-          <p:cNvPr id="11" name="Rounded Rectangle 10"/>
-          <p:cNvSpPr/>
-          <p:nvPr/>
-        </p:nvSpPr>
-        <p:spPr>
-          <a:xfrm>
-            <a:off x="502920" y="2176272"/>
-            <a:ext cx="164592" cy="164592"/>
-          </a:xfrm>
-          <a:prstGeom prst="roundRect">
-            <a:avLst>
-              <a:gd name="adj" fmla="val 50000"/>
-            </a:avLst>
-          </a:prstGeom>
-          <a:solidFill>
-            <a:srgbClr val="EA580C"/>
-          </a:solidFill>
-          <a:ln>
-            <a:noFill/>
-          </a:ln>
-        </p:spPr>
-        <p:style>
-          <a:lnRef idx="1">
-            <a:schemeClr val="accent1"/>
-          </a:lnRef>
-          <a:fillRef idx="3">
-            <a:schemeClr val="accent1"/>
-          </a:fillRef>
-          <a:effectRef idx="2">
-            <a:schemeClr val="accent1"/>
-          </a:effectRef>
-          <a:fontRef idx="minor">
-            <a:schemeClr val="lt1"/>
-          </a:fontRef>
-        </p:style>
-        <p:txBody>
-          <a:bodyPr rtlCol="0" anchor="ctr"/>
-          <a:lstStyle/>
-          <a:p>
-            <a:pPr algn="ctr"/>
-          </a:p>
-        </p:txBody>
-      </p:sp>
+              <a:t>Харагдах байдал — нэвтрэх</a:t>
+            </a:r>
+          </a:p>
+        </p:txBody>
+      </p:sp>
+      <p:pic>
+        <p:nvPicPr>
+          <p:cNvPr id="11" name="Picture 10" descr="login.png"/>
+          <p:cNvPicPr>
+            <a:picLocks noChangeAspect="1"/>
+          </p:cNvPicPr>
+          <p:nvPr/>
+        </p:nvPicPr>
+        <p:blipFill>
+          <a:blip r:embed="rId3"/>
+          <a:stretch>
+            <a:fillRect/>
+          </a:stretch>
+        </p:blipFill>
+        <p:spPr>
+          <a:xfrm>
+            <a:off x="1078653" y="1938528"/>
+            <a:ext cx="2597573" cy="4315968"/>
+          </a:xfrm>
+          <a:prstGeom prst="rect">
+            <a:avLst/>
+          </a:prstGeom>
+        </p:spPr>
+      </p:pic>
       <p:sp>
         <p:nvSpPr>
           <p:cNvPr id="12" name="TextBox 11"/>
@@ -3488,8 +3467,8 @@
         </p:nvSpPr>
         <p:spPr>
           <a:xfrm>
-            <a:off x="777240" y="2139696"/>
-            <a:ext cx="5349240" cy="256032"/>
+            <a:off x="4663440" y="1591056"/>
+            <a:ext cx="7178040" cy="310896"/>
           </a:xfrm>
           <a:prstGeom prst="rect">
             <a:avLst/>
@@ -3504,571 +3483,32 @@
           <a:p>
             <a:pPr algn="l"/>
             <a:r>
-              <a:rPr sz="1300" b="1">
+              <a:rPr sz="1600" b="1">
                 <a:solidFill>
                   <a:srgbClr val="0F2F63"/>
                 </a:solidFill>
                 <a:latin typeface="Calibri"/>
                 <a:ea typeface="Calibri"/>
               </a:rPr>
-              <a:t>Үндсэн</a:t>
-            </a:r>
-          </a:p>
-        </p:txBody>
-      </p:sp>
-      <p:sp>
-        <p:nvSpPr>
-          <p:cNvPr id="13" name="TextBox 12"/>
-          <p:cNvSpPr txBox="1"/>
-          <p:nvPr/>
-        </p:nvSpPr>
-        <p:spPr>
-          <a:xfrm>
-            <a:off x="777240" y="2377440"/>
-            <a:ext cx="5349240" cy="347472"/>
-          </a:xfrm>
-          <a:prstGeom prst="rect">
-            <a:avLst/>
-          </a:prstGeom>
-          <a:noFill/>
-        </p:spPr>
-        <p:txBody>
-          <a:bodyPr wrap="square">
-            <a:spAutoFit/>
-          </a:bodyPr>
-          <a:lstStyle/>
-          <a:p>
-            <a:pPr algn="l"/>
-            <a:r>
-              <a:rPr sz="1200" b="0">
-                <a:solidFill>
-                  <a:srgbClr val="475569"/>
-                </a:solidFill>
-                <a:latin typeface="Calibri"/>
-                <a:ea typeface="Calibri"/>
-              </a:rPr>
-              <a:t>Утасны дугаар (8 орон) + нууц үг. Нэвтрэх товч.</a:t>
-            </a:r>
-          </a:p>
-        </p:txBody>
-      </p:sp>
-      <p:sp>
-        <p:nvSpPr>
-          <p:cNvPr id="14" name="Rounded Rectangle 13"/>
+              <a:t>Нэвтрэх боломжууд — 3 арга</a:t>
+            </a:r>
+          </a:p>
+        </p:txBody>
+      </p:sp>
+      <p:sp>
+        <p:nvSpPr>
+          <p:cNvPr id="13" name="Rounded Rectangle 12"/>
           <p:cNvSpPr/>
           <p:nvPr/>
         </p:nvSpPr>
         <p:spPr>
           <a:xfrm>
-            <a:off x="502920" y="2761488"/>
-            <a:ext cx="164592" cy="164592"/>
+            <a:off x="4663440" y="1956816"/>
+            <a:ext cx="7178040" cy="841248"/>
           </a:xfrm>
           <a:prstGeom prst="roundRect">
             <a:avLst>
-              <a:gd name="adj" fmla="val 50000"/>
-            </a:avLst>
-          </a:prstGeom>
-          <a:solidFill>
-            <a:srgbClr val="EA580C"/>
-          </a:solidFill>
-          <a:ln>
-            <a:noFill/>
-          </a:ln>
-        </p:spPr>
-        <p:style>
-          <a:lnRef idx="1">
-            <a:schemeClr val="accent1"/>
-          </a:lnRef>
-          <a:fillRef idx="3">
-            <a:schemeClr val="accent1"/>
-          </a:fillRef>
-          <a:effectRef idx="2">
-            <a:schemeClr val="accent1"/>
-          </a:effectRef>
-          <a:fontRef idx="minor">
-            <a:schemeClr val="lt1"/>
-          </a:fontRef>
-        </p:style>
-        <p:txBody>
-          <a:bodyPr rtlCol="0" anchor="ctr"/>
-          <a:lstStyle/>
-          <a:p>
-            <a:pPr algn="ctr"/>
-          </a:p>
-        </p:txBody>
-      </p:sp>
-      <p:sp>
-        <p:nvSpPr>
-          <p:cNvPr id="15" name="TextBox 14"/>
-          <p:cNvSpPr txBox="1"/>
-          <p:nvPr/>
-        </p:nvSpPr>
-        <p:spPr>
-          <a:xfrm>
-            <a:off x="777240" y="2724912"/>
-            <a:ext cx="5349240" cy="256032"/>
-          </a:xfrm>
-          <a:prstGeom prst="rect">
-            <a:avLst/>
-          </a:prstGeom>
-          <a:noFill/>
-        </p:spPr>
-        <p:txBody>
-          <a:bodyPr wrap="square">
-            <a:spAutoFit/>
-          </a:bodyPr>
-          <a:lstStyle/>
-          <a:p>
-            <a:pPr algn="l"/>
-            <a:r>
-              <a:rPr sz="1300" b="1">
-                <a:solidFill>
-                  <a:srgbClr val="0F2F63"/>
-                </a:solidFill>
-                <a:latin typeface="Calibri"/>
-                <a:ea typeface="Calibri"/>
-              </a:rPr>
-              <a:t>QR кодоор</a:t>
-            </a:r>
-          </a:p>
-        </p:txBody>
-      </p:sp>
-      <p:sp>
-        <p:nvSpPr>
-          <p:cNvPr id="16" name="TextBox 15"/>
-          <p:cNvSpPr txBox="1"/>
-          <p:nvPr/>
-        </p:nvSpPr>
-        <p:spPr>
-          <a:xfrm>
-            <a:off x="777240" y="2962656"/>
-            <a:ext cx="5349240" cy="347472"/>
-          </a:xfrm>
-          <a:prstGeom prst="rect">
-            <a:avLst/>
-          </a:prstGeom>
-          <a:noFill/>
-        </p:spPr>
-        <p:txBody>
-          <a:bodyPr wrap="square">
-            <a:spAutoFit/>
-          </a:bodyPr>
-          <a:lstStyle/>
-          <a:p>
-            <a:pPr algn="l"/>
-            <a:r>
-              <a:rPr sz="1200" b="0">
-                <a:solidFill>
-                  <a:srgbClr val="475569"/>
-                </a:solidFill>
-                <a:latin typeface="Calibri"/>
-                <a:ea typeface="Calibri"/>
-              </a:rPr>
-              <a:t>Компьютер дээр QR гарна. Утаснаасаа уншуулаад зөвшөөрнө.</a:t>
-            </a:r>
-          </a:p>
-        </p:txBody>
-      </p:sp>
-      <p:sp>
-        <p:nvSpPr>
-          <p:cNvPr id="17" name="Rounded Rectangle 16"/>
-          <p:cNvSpPr/>
-          <p:nvPr/>
-        </p:nvSpPr>
-        <p:spPr>
-          <a:xfrm>
-            <a:off x="502920" y="3346704"/>
-            <a:ext cx="164592" cy="164592"/>
-          </a:xfrm>
-          <a:prstGeom prst="roundRect">
-            <a:avLst>
-              <a:gd name="adj" fmla="val 50000"/>
-            </a:avLst>
-          </a:prstGeom>
-          <a:solidFill>
-            <a:srgbClr val="EA580C"/>
-          </a:solidFill>
-          <a:ln>
-            <a:noFill/>
-          </a:ln>
-        </p:spPr>
-        <p:style>
-          <a:lnRef idx="1">
-            <a:schemeClr val="accent1"/>
-          </a:lnRef>
-          <a:fillRef idx="3">
-            <a:schemeClr val="accent1"/>
-          </a:fillRef>
-          <a:effectRef idx="2">
-            <a:schemeClr val="accent1"/>
-          </a:effectRef>
-          <a:fontRef idx="minor">
-            <a:schemeClr val="lt1"/>
-          </a:fontRef>
-        </p:style>
-        <p:txBody>
-          <a:bodyPr rtlCol="0" anchor="ctr"/>
-          <a:lstStyle/>
-          <a:p>
-            <a:pPr algn="ctr"/>
-          </a:p>
-        </p:txBody>
-      </p:sp>
-      <p:sp>
-        <p:nvSpPr>
-          <p:cNvPr id="18" name="TextBox 17"/>
-          <p:cNvSpPr txBox="1"/>
-          <p:nvPr/>
-        </p:nvSpPr>
-        <p:spPr>
-          <a:xfrm>
-            <a:off x="777240" y="3310128"/>
-            <a:ext cx="5349240" cy="256032"/>
-          </a:xfrm>
-          <a:prstGeom prst="rect">
-            <a:avLst/>
-          </a:prstGeom>
-          <a:noFill/>
-        </p:spPr>
-        <p:txBody>
-          <a:bodyPr wrap="square">
-            <a:spAutoFit/>
-          </a:bodyPr>
-          <a:lstStyle/>
-          <a:p>
-            <a:pPr algn="l"/>
-            <a:r>
-              <a:rPr sz="1300" b="1">
-                <a:solidFill>
-                  <a:srgbClr val="0F2F63"/>
-                </a:solidFill>
-                <a:latin typeface="Calibri"/>
-                <a:ea typeface="Calibri"/>
-              </a:rPr>
-              <a:t>И-мэйл + нууц үг</a:t>
-            </a:r>
-          </a:p>
-        </p:txBody>
-      </p:sp>
-      <p:sp>
-        <p:nvSpPr>
-          <p:cNvPr id="19" name="TextBox 18"/>
-          <p:cNvSpPr txBox="1"/>
-          <p:nvPr/>
-        </p:nvSpPr>
-        <p:spPr>
-          <a:xfrm>
-            <a:off x="777240" y="3547872"/>
-            <a:ext cx="5349240" cy="347472"/>
-          </a:xfrm>
-          <a:prstGeom prst="rect">
-            <a:avLst/>
-          </a:prstGeom>
-          <a:noFill/>
-        </p:spPr>
-        <p:txBody>
-          <a:bodyPr wrap="square">
-            <a:spAutoFit/>
-          </a:bodyPr>
-          <a:lstStyle/>
-          <a:p>
-            <a:pPr algn="l"/>
-            <a:r>
-              <a:rPr sz="1200" b="0">
-                <a:solidFill>
-                  <a:srgbClr val="475569"/>
-                </a:solidFill>
-                <a:latin typeface="Calibri"/>
-                <a:ea typeface="Calibri"/>
-              </a:rPr>
-              <a:t>«И-мэйлээр нэвтрэх» — нөөц арга.</a:t>
-            </a:r>
-          </a:p>
-        </p:txBody>
-      </p:sp>
-      <p:sp>
-        <p:nvSpPr>
-          <p:cNvPr id="20" name="Rounded Rectangle 19"/>
-          <p:cNvSpPr/>
-          <p:nvPr/>
-        </p:nvSpPr>
-        <p:spPr>
-          <a:xfrm>
-            <a:off x="502920" y="3931920"/>
-            <a:ext cx="164592" cy="164592"/>
-          </a:xfrm>
-          <a:prstGeom prst="roundRect">
-            <a:avLst>
-              <a:gd name="adj" fmla="val 50000"/>
-            </a:avLst>
-          </a:prstGeom>
-          <a:solidFill>
-            <a:srgbClr val="EA580C"/>
-          </a:solidFill>
-          <a:ln>
-            <a:noFill/>
-          </a:ln>
-        </p:spPr>
-        <p:style>
-          <a:lnRef idx="1">
-            <a:schemeClr val="accent1"/>
-          </a:lnRef>
-          <a:fillRef idx="3">
-            <a:schemeClr val="accent1"/>
-          </a:fillRef>
-          <a:effectRef idx="2">
-            <a:schemeClr val="accent1"/>
-          </a:effectRef>
-          <a:fontRef idx="minor">
-            <a:schemeClr val="lt1"/>
-          </a:fontRef>
-        </p:style>
-        <p:txBody>
-          <a:bodyPr rtlCol="0" anchor="ctr"/>
-          <a:lstStyle/>
-          <a:p>
-            <a:pPr algn="ctr"/>
-          </a:p>
-        </p:txBody>
-      </p:sp>
-      <p:sp>
-        <p:nvSpPr>
-          <p:cNvPr id="21" name="TextBox 20"/>
-          <p:cNvSpPr txBox="1"/>
-          <p:nvPr/>
-        </p:nvSpPr>
-        <p:spPr>
-          <a:xfrm>
-            <a:off x="777240" y="3895344"/>
-            <a:ext cx="5349240" cy="256032"/>
-          </a:xfrm>
-          <a:prstGeom prst="rect">
-            <a:avLst/>
-          </a:prstGeom>
-          <a:noFill/>
-        </p:spPr>
-        <p:txBody>
-          <a:bodyPr wrap="square">
-            <a:spAutoFit/>
-          </a:bodyPr>
-          <a:lstStyle/>
-          <a:p>
-            <a:pPr algn="l"/>
-            <a:r>
-              <a:rPr sz="1300" b="1">
-                <a:solidFill>
-                  <a:srgbClr val="0F2F63"/>
-                </a:solidFill>
-                <a:latin typeface="Calibri"/>
-                <a:ea typeface="Calibri"/>
-              </a:rPr>
-              <a:t>Намайг сана</a:t>
-            </a:r>
-          </a:p>
-        </p:txBody>
-      </p:sp>
-      <p:sp>
-        <p:nvSpPr>
-          <p:cNvPr id="22" name="TextBox 21"/>
-          <p:cNvSpPr txBox="1"/>
-          <p:nvPr/>
-        </p:nvSpPr>
-        <p:spPr>
-          <a:xfrm>
-            <a:off x="777240" y="4133088"/>
-            <a:ext cx="5349240" cy="347472"/>
-          </a:xfrm>
-          <a:prstGeom prst="rect">
-            <a:avLst/>
-          </a:prstGeom>
-          <a:noFill/>
-        </p:spPr>
-        <p:txBody>
-          <a:bodyPr wrap="square">
-            <a:spAutoFit/>
-          </a:bodyPr>
-          <a:lstStyle/>
-          <a:p>
-            <a:pPr algn="l"/>
-            <a:r>
-              <a:rPr sz="1200" b="0">
-                <a:solidFill>
-                  <a:srgbClr val="475569"/>
-                </a:solidFill>
-                <a:latin typeface="Calibri"/>
-                <a:ea typeface="Calibri"/>
-              </a:rPr>
-              <a:t>Дараагийн удаа энэ төхөөрөмж дээр нэрийг санана.</a:t>
-            </a:r>
-          </a:p>
-        </p:txBody>
-      </p:sp>
-      <p:sp>
-        <p:nvSpPr>
-          <p:cNvPr id="23" name="Rectangle 22"/>
-          <p:cNvSpPr/>
-          <p:nvPr/>
-        </p:nvSpPr>
-        <p:spPr>
-          <a:xfrm>
-            <a:off x="502920" y="4572000"/>
-            <a:ext cx="5623560" cy="13716"/>
-          </a:xfrm>
-          <a:prstGeom prst="rect">
-            <a:avLst/>
-          </a:prstGeom>
-          <a:solidFill>
-            <a:srgbClr val="E2E8F0"/>
-          </a:solidFill>
-          <a:ln>
-            <a:noFill/>
-          </a:ln>
-        </p:spPr>
-        <p:style>
-          <a:lnRef idx="1">
-            <a:schemeClr val="accent1"/>
-          </a:lnRef>
-          <a:fillRef idx="3">
-            <a:schemeClr val="accent1"/>
-          </a:fillRef>
-          <a:effectRef idx="2">
-            <a:schemeClr val="accent1"/>
-          </a:effectRef>
-          <a:fontRef idx="minor">
-            <a:schemeClr val="lt1"/>
-          </a:fontRef>
-        </p:style>
-        <p:txBody>
-          <a:bodyPr rtlCol="0" anchor="ctr"/>
-          <a:lstStyle/>
-          <a:p>
-            <a:pPr algn="ctr"/>
-          </a:p>
-        </p:txBody>
-      </p:sp>
-      <p:sp>
-        <p:nvSpPr>
-          <p:cNvPr id="24" name="TextBox 23"/>
-          <p:cNvSpPr txBox="1"/>
-          <p:nvPr/>
-        </p:nvSpPr>
-        <p:spPr>
-          <a:xfrm>
-            <a:off x="502920" y="4645152"/>
-            <a:ext cx="5623560" cy="256032"/>
-          </a:xfrm>
-          <a:prstGeom prst="rect">
-            <a:avLst/>
-          </a:prstGeom>
-          <a:noFill/>
-        </p:spPr>
-        <p:txBody>
-          <a:bodyPr wrap="square">
-            <a:spAutoFit/>
-          </a:bodyPr>
-          <a:lstStyle/>
-          <a:p>
-            <a:pPr algn="l"/>
-            <a:r>
-              <a:rPr sz="1300" b="1">
-                <a:solidFill>
-                  <a:srgbClr val="0F2F63"/>
-                </a:solidFill>
-                <a:latin typeface="Calibri"/>
-                <a:ea typeface="Calibri"/>
-              </a:rPr>
-              <a:t>Нууц үгийн дүрэм (нийтийн)</a:t>
-            </a:r>
-          </a:p>
-        </p:txBody>
-      </p:sp>
-      <p:sp>
-        <p:nvSpPr>
-          <p:cNvPr id="25" name="TextBox 24"/>
-          <p:cNvSpPr txBox="1"/>
-          <p:nvPr/>
-        </p:nvSpPr>
-        <p:spPr>
-          <a:xfrm>
-            <a:off x="502920" y="4901184"/>
-            <a:ext cx="5623560" cy="640080"/>
-          </a:xfrm>
-          <a:prstGeom prst="rect">
-            <a:avLst/>
-          </a:prstGeom>
-          <a:noFill/>
-        </p:spPr>
-        <p:txBody>
-          <a:bodyPr wrap="square">
-            <a:spAutoFit/>
-          </a:bodyPr>
-          <a:lstStyle/>
-          <a:p>
-            <a:pPr algn="l"/>
-            <a:r>
-              <a:rPr sz="1200" b="0">
-                <a:solidFill>
-                  <a:srgbClr val="0F172A"/>
-                </a:solidFill>
-                <a:latin typeface="Calibri"/>
-                <a:ea typeface="Calibri"/>
-              </a:rPr>
-              <a:t>Утасны сүүлийн 4 орон + нэрийн латин бичлэг.
-А.Номин / 99178904  →  8904Nomin     ·     А.Бадрал / 94588599  →  8599Badral</a:t>
-            </a:r>
-          </a:p>
-        </p:txBody>
-      </p:sp>
-      <p:sp>
-        <p:nvSpPr>
-          <p:cNvPr id="26" name="TextBox 25"/>
-          <p:cNvSpPr txBox="1"/>
-          <p:nvPr/>
-        </p:nvSpPr>
-        <p:spPr>
-          <a:xfrm>
-            <a:off x="502920" y="5559552"/>
-            <a:ext cx="5623560" cy="658368"/>
-          </a:xfrm>
-          <a:prstGeom prst="rect">
-            <a:avLst/>
-          </a:prstGeom>
-          <a:noFill/>
-        </p:spPr>
-        <p:txBody>
-          <a:bodyPr wrap="square">
-            <a:spAutoFit/>
-          </a:bodyPr>
-          <a:lstStyle/>
-          <a:p>
-            <a:pPr algn="l"/>
-            <a:r>
-              <a:rPr sz="1200" b="0">
-                <a:solidFill>
-                  <a:srgbClr val="64748B"/>
-                </a:solidFill>
-                <a:latin typeface="Calibri"/>
-                <a:ea typeface="Calibri"/>
-              </a:rPr>
-              <a:t>Хэлтсийн и-мэйл: nomin@dornogovi.gov.mn хэлбэртэй. Гэхдээ нэвтрэх нэр нь үндсэндээ утас (и-мэйлээр ч нэвтэрч болно).</a:t>
-            </a:r>
-          </a:p>
-        </p:txBody>
-      </p:sp>
-      <p:sp>
-        <p:nvSpPr>
-          <p:cNvPr id="27" name="Rounded Rectangle 26"/>
-          <p:cNvSpPr/>
-          <p:nvPr/>
-        </p:nvSpPr>
-        <p:spPr>
-          <a:xfrm>
-            <a:off x="6492240" y="1664208"/>
-            <a:ext cx="5349240" cy="4736592"/>
-          </a:xfrm>
-          <a:prstGeom prst="roundRect">
-            <a:avLst>
-              <a:gd name="adj" fmla="val 4000"/>
+              <a:gd name="adj" fmla="val 8000"/>
             </a:avLst>
           </a:prstGeom>
           <a:solidFill>
@@ -4104,122 +3544,19 @@
       </p:sp>
       <p:sp>
         <p:nvSpPr>
-          <p:cNvPr id="28" name="TextBox 27"/>
-          <p:cNvSpPr txBox="1"/>
-          <p:nvPr/>
-        </p:nvSpPr>
-        <p:spPr>
-          <a:xfrm>
-            <a:off x="6656832" y="1755648"/>
-            <a:ext cx="5029200" cy="256032"/>
-          </a:xfrm>
-          <a:prstGeom prst="rect">
-            <a:avLst/>
-          </a:prstGeom>
-          <a:noFill/>
-        </p:spPr>
-        <p:txBody>
-          <a:bodyPr wrap="square">
-            <a:spAutoFit/>
-          </a:bodyPr>
-          <a:lstStyle/>
-          <a:p>
-            <a:pPr algn="l"/>
-            <a:r>
-              <a:rPr sz="1200" b="1">
-                <a:solidFill>
-                  <a:srgbClr val="0F2F63"/>
-                </a:solidFill>
-                <a:latin typeface="Calibri"/>
-                <a:ea typeface="Calibri"/>
-              </a:rPr>
-              <a:t>Бодит нэвтрэх хуудас</a:t>
-            </a:r>
-          </a:p>
-        </p:txBody>
-      </p:sp>
-      <p:sp>
-        <p:nvSpPr>
-          <p:cNvPr id="29" name="Rounded Rectangle 28"/>
+          <p:cNvPr id="14" name="Rounded Rectangle 13"/>
           <p:cNvSpPr/>
           <p:nvPr/>
         </p:nvSpPr>
         <p:spPr>
           <a:xfrm>
-            <a:off x="7767828" y="1920240"/>
-            <a:ext cx="2798064" cy="4462272"/>
+            <a:off x="4828032" y="2157984"/>
+            <a:ext cx="438912" cy="438912"/>
           </a:xfrm>
           <a:prstGeom prst="roundRect">
             <a:avLst>
-              <a:gd name="adj" fmla="val 6000"/>
+              <a:gd name="adj" fmla="val 20000"/>
             </a:avLst>
-          </a:prstGeom>
-          <a:solidFill>
-            <a:srgbClr val="E2E8F0"/>
-          </a:solidFill>
-          <a:ln>
-            <a:noFill/>
-          </a:ln>
-        </p:spPr>
-        <p:style>
-          <a:lnRef idx="1">
-            <a:schemeClr val="accent1"/>
-          </a:lnRef>
-          <a:fillRef idx="3">
-            <a:schemeClr val="accent1"/>
-          </a:fillRef>
-          <a:effectRef idx="2">
-            <a:schemeClr val="accent1"/>
-          </a:effectRef>
-          <a:fontRef idx="minor">
-            <a:schemeClr val="lt1"/>
-          </a:fontRef>
-        </p:style>
-        <p:txBody>
-          <a:bodyPr rtlCol="0" anchor="ctr"/>
-          <a:lstStyle/>
-          <a:p>
-            <a:pPr algn="ctr"/>
-          </a:p>
-        </p:txBody>
-      </p:sp>
-      <p:pic>
-        <p:nvPicPr>
-          <p:cNvPr id="30" name="Picture 29" descr="login.png"/>
-          <p:cNvPicPr>
-            <a:picLocks noChangeAspect="1"/>
-          </p:cNvPicPr>
-          <p:nvPr/>
-        </p:nvPicPr>
-        <p:blipFill>
-          <a:blip r:embed="rId3"/>
-          <a:stretch>
-            <a:fillRect/>
-          </a:stretch>
-        </p:blipFill>
-        <p:spPr>
-          <a:xfrm>
-            <a:off x="7868073" y="1993392"/>
-            <a:ext cx="2597573" cy="4315968"/>
-          </a:xfrm>
-          <a:prstGeom prst="rect">
-            <a:avLst/>
-          </a:prstGeom>
-        </p:spPr>
-      </p:pic>
-      <p:sp>
-        <p:nvSpPr>
-          <p:cNvPr id="31" name="Rectangle 30"/>
-          <p:cNvSpPr/>
-          <p:nvPr/>
-        </p:nvSpPr>
-        <p:spPr>
-          <a:xfrm>
-            <a:off x="0" y="6601968"/>
-            <a:ext cx="12191695" cy="256032"/>
-          </a:xfrm>
-          <a:prstGeom prst="rect">
-            <a:avLst/>
           </a:prstGeom>
           <a:solidFill>
             <a:srgbClr val="0F2F63"/>
@@ -4252,14 +3589,14 @@
       </p:sp>
       <p:sp>
         <p:nvSpPr>
-          <p:cNvPr id="32" name="TextBox 31"/>
+          <p:cNvPr id="15" name="TextBox 14"/>
           <p:cNvSpPr txBox="1"/>
           <p:nvPr/>
         </p:nvSpPr>
         <p:spPr>
           <a:xfrm>
-            <a:off x="320040" y="6601968"/>
-            <a:ext cx="9601200" cy="256032"/>
+            <a:off x="4828032" y="2212848"/>
+            <a:ext cx="438912" cy="347472"/>
           </a:xfrm>
           <a:prstGeom prst="rect">
             <a:avLst/>
@@ -4272,8 +3609,762 @@
           </a:bodyPr>
           <a:lstStyle/>
           <a:p>
+            <a:pPr algn="ctr"/>
+            <a:r>
+              <a:rPr sz="1600" b="1">
+                <a:solidFill>
+                  <a:srgbClr val="FFFFFF"/>
+                </a:solidFill>
+                <a:latin typeface="Calibri"/>
+                <a:ea typeface="Calibri"/>
+              </a:rPr>
+              <a:t>1</a:t>
+            </a:r>
+          </a:p>
+        </p:txBody>
+      </p:sp>
+      <p:sp>
+        <p:nvSpPr>
+          <p:cNvPr id="16" name="TextBox 15"/>
+          <p:cNvSpPr txBox="1"/>
+          <p:nvPr/>
+        </p:nvSpPr>
+        <p:spPr>
+          <a:xfrm>
+            <a:off x="5440680" y="2084832"/>
+            <a:ext cx="6217920" cy="292608"/>
+          </a:xfrm>
+          <a:prstGeom prst="rect">
+            <a:avLst/>
+          </a:prstGeom>
+          <a:noFill/>
+        </p:spPr>
+        <p:txBody>
+          <a:bodyPr wrap="square">
+            <a:spAutoFit/>
+          </a:bodyPr>
+          <a:lstStyle/>
+          <a:p>
             <a:pPr algn="l"/>
             <a:r>
+              <a:rPr sz="1500" b="1">
+                <a:solidFill>
+                  <a:srgbClr val="0F2F63"/>
+                </a:solidFill>
+                <a:latin typeface="Calibri"/>
+                <a:ea typeface="Calibri"/>
+              </a:rPr>
+              <a:t>Утас + нууц үг</a:t>
+            </a:r>
+          </a:p>
+        </p:txBody>
+      </p:sp>
+      <p:sp>
+        <p:nvSpPr>
+          <p:cNvPr id="17" name="TextBox 16"/>
+          <p:cNvSpPr txBox="1"/>
+          <p:nvPr/>
+        </p:nvSpPr>
+        <p:spPr>
+          <a:xfrm>
+            <a:off x="5440680" y="2395728"/>
+            <a:ext cx="6217920" cy="329184"/>
+          </a:xfrm>
+          <a:prstGeom prst="rect">
+            <a:avLst/>
+          </a:prstGeom>
+          <a:noFill/>
+        </p:spPr>
+        <p:txBody>
+          <a:bodyPr wrap="square">
+            <a:spAutoFit/>
+          </a:bodyPr>
+          <a:lstStyle/>
+          <a:p>
+            <a:pPr algn="l"/>
+            <a:r>
+              <a:rPr sz="1300" b="0">
+                <a:solidFill>
+                  <a:srgbClr val="475569"/>
+                </a:solidFill>
+                <a:latin typeface="Calibri"/>
+                <a:ea typeface="Calibri"/>
+              </a:rPr>
+              <a:t>Үндсэн арга. 8 оронтой дугаар, нууц үг, «Нэвтрэх».</a:t>
+            </a:r>
+          </a:p>
+        </p:txBody>
+      </p:sp>
+      <p:sp>
+        <p:nvSpPr>
+          <p:cNvPr id="18" name="Rounded Rectangle 17"/>
+          <p:cNvSpPr/>
+          <p:nvPr/>
+        </p:nvSpPr>
+        <p:spPr>
+          <a:xfrm>
+            <a:off x="4663440" y="2889504"/>
+            <a:ext cx="7178040" cy="841248"/>
+          </a:xfrm>
+          <a:prstGeom prst="roundRect">
+            <a:avLst>
+              <a:gd name="adj" fmla="val 8000"/>
+            </a:avLst>
+          </a:prstGeom>
+          <a:solidFill>
+            <a:srgbClr val="FFFFFF"/>
+          </a:solidFill>
+          <a:ln w="11430">
+            <a:solidFill>
+              <a:srgbClr val="E2E8F0"/>
+            </a:solidFill>
+          </a:ln>
+        </p:spPr>
+        <p:style>
+          <a:lnRef idx="1">
+            <a:schemeClr val="accent1"/>
+          </a:lnRef>
+          <a:fillRef idx="3">
+            <a:schemeClr val="accent1"/>
+          </a:fillRef>
+          <a:effectRef idx="2">
+            <a:schemeClr val="accent1"/>
+          </a:effectRef>
+          <a:fontRef idx="minor">
+            <a:schemeClr val="lt1"/>
+          </a:fontRef>
+        </p:style>
+        <p:txBody>
+          <a:bodyPr rtlCol="0" anchor="ctr"/>
+          <a:lstStyle/>
+          <a:p>
+            <a:pPr algn="ctr"/>
+          </a:p>
+        </p:txBody>
+      </p:sp>
+      <p:sp>
+        <p:nvSpPr>
+          <p:cNvPr id="19" name="Rounded Rectangle 18"/>
+          <p:cNvSpPr/>
+          <p:nvPr/>
+        </p:nvSpPr>
+        <p:spPr>
+          <a:xfrm>
+            <a:off x="4828032" y="3090672"/>
+            <a:ext cx="438912" cy="438912"/>
+          </a:xfrm>
+          <a:prstGeom prst="roundRect">
+            <a:avLst>
+              <a:gd name="adj" fmla="val 20000"/>
+            </a:avLst>
+          </a:prstGeom>
+          <a:solidFill>
+            <a:srgbClr val="0F2F63"/>
+          </a:solidFill>
+          <a:ln>
+            <a:noFill/>
+          </a:ln>
+        </p:spPr>
+        <p:style>
+          <a:lnRef idx="1">
+            <a:schemeClr val="accent1"/>
+          </a:lnRef>
+          <a:fillRef idx="3">
+            <a:schemeClr val="accent1"/>
+          </a:fillRef>
+          <a:effectRef idx="2">
+            <a:schemeClr val="accent1"/>
+          </a:effectRef>
+          <a:fontRef idx="minor">
+            <a:schemeClr val="lt1"/>
+          </a:fontRef>
+        </p:style>
+        <p:txBody>
+          <a:bodyPr rtlCol="0" anchor="ctr"/>
+          <a:lstStyle/>
+          <a:p>
+            <a:pPr algn="ctr"/>
+          </a:p>
+        </p:txBody>
+      </p:sp>
+      <p:sp>
+        <p:nvSpPr>
+          <p:cNvPr id="20" name="TextBox 19"/>
+          <p:cNvSpPr txBox="1"/>
+          <p:nvPr/>
+        </p:nvSpPr>
+        <p:spPr>
+          <a:xfrm>
+            <a:off x="4828032" y="3145536"/>
+            <a:ext cx="438912" cy="347472"/>
+          </a:xfrm>
+          <a:prstGeom prst="rect">
+            <a:avLst/>
+          </a:prstGeom>
+          <a:noFill/>
+        </p:spPr>
+        <p:txBody>
+          <a:bodyPr wrap="square">
+            <a:spAutoFit/>
+          </a:bodyPr>
+          <a:lstStyle/>
+          <a:p>
+            <a:pPr algn="ctr"/>
+            <a:r>
+              <a:rPr sz="1600" b="1">
+                <a:solidFill>
+                  <a:srgbClr val="FFFFFF"/>
+                </a:solidFill>
+                <a:latin typeface="Calibri"/>
+                <a:ea typeface="Calibri"/>
+              </a:rPr>
+              <a:t>2</a:t>
+            </a:r>
+          </a:p>
+        </p:txBody>
+      </p:sp>
+      <p:sp>
+        <p:nvSpPr>
+          <p:cNvPr id="21" name="TextBox 20"/>
+          <p:cNvSpPr txBox="1"/>
+          <p:nvPr/>
+        </p:nvSpPr>
+        <p:spPr>
+          <a:xfrm>
+            <a:off x="5440680" y="3017520"/>
+            <a:ext cx="6217920" cy="292608"/>
+          </a:xfrm>
+          <a:prstGeom prst="rect">
+            <a:avLst/>
+          </a:prstGeom>
+          <a:noFill/>
+        </p:spPr>
+        <p:txBody>
+          <a:bodyPr wrap="square">
+            <a:spAutoFit/>
+          </a:bodyPr>
+          <a:lstStyle/>
+          <a:p>
+            <a:pPr algn="l"/>
+            <a:r>
+              <a:rPr sz="1500" b="1">
+                <a:solidFill>
+                  <a:srgbClr val="0F2F63"/>
+                </a:solidFill>
+                <a:latin typeface="Calibri"/>
+                <a:ea typeface="Calibri"/>
+              </a:rPr>
+              <a:t>QR кодоор нэвтрэх</a:t>
+            </a:r>
+          </a:p>
+        </p:txBody>
+      </p:sp>
+      <p:sp>
+        <p:nvSpPr>
+          <p:cNvPr id="22" name="TextBox 21"/>
+          <p:cNvSpPr txBox="1"/>
+          <p:nvPr/>
+        </p:nvSpPr>
+        <p:spPr>
+          <a:xfrm>
+            <a:off x="5440680" y="3328416"/>
+            <a:ext cx="6217920" cy="329184"/>
+          </a:xfrm>
+          <a:prstGeom prst="rect">
+            <a:avLst/>
+          </a:prstGeom>
+          <a:noFill/>
+        </p:spPr>
+        <p:txBody>
+          <a:bodyPr wrap="square">
+            <a:spAutoFit/>
+          </a:bodyPr>
+          <a:lstStyle/>
+          <a:p>
+            <a:pPr algn="l"/>
+            <a:r>
+              <a:rPr sz="1300" b="0">
+                <a:solidFill>
+                  <a:srgbClr val="475569"/>
+                </a:solidFill>
+                <a:latin typeface="Calibri"/>
+                <a:ea typeface="Calibri"/>
+              </a:rPr>
+              <a:t>Компьютер дээр код гарна. Утаснаасаа уншуулаад зөвшөөрнө.</a:t>
+            </a:r>
+          </a:p>
+        </p:txBody>
+      </p:sp>
+      <p:sp>
+        <p:nvSpPr>
+          <p:cNvPr id="23" name="Rounded Rectangle 22"/>
+          <p:cNvSpPr/>
+          <p:nvPr/>
+        </p:nvSpPr>
+        <p:spPr>
+          <a:xfrm>
+            <a:off x="4663440" y="3822192"/>
+            <a:ext cx="7178040" cy="841248"/>
+          </a:xfrm>
+          <a:prstGeom prst="roundRect">
+            <a:avLst>
+              <a:gd name="adj" fmla="val 8000"/>
+            </a:avLst>
+          </a:prstGeom>
+          <a:solidFill>
+            <a:srgbClr val="FFFFFF"/>
+          </a:solidFill>
+          <a:ln w="11430">
+            <a:solidFill>
+              <a:srgbClr val="E2E8F0"/>
+            </a:solidFill>
+          </a:ln>
+        </p:spPr>
+        <p:style>
+          <a:lnRef idx="1">
+            <a:schemeClr val="accent1"/>
+          </a:lnRef>
+          <a:fillRef idx="3">
+            <a:schemeClr val="accent1"/>
+          </a:fillRef>
+          <a:effectRef idx="2">
+            <a:schemeClr val="accent1"/>
+          </a:effectRef>
+          <a:fontRef idx="minor">
+            <a:schemeClr val="lt1"/>
+          </a:fontRef>
+        </p:style>
+        <p:txBody>
+          <a:bodyPr rtlCol="0" anchor="ctr"/>
+          <a:lstStyle/>
+          <a:p>
+            <a:pPr algn="ctr"/>
+          </a:p>
+        </p:txBody>
+      </p:sp>
+      <p:sp>
+        <p:nvSpPr>
+          <p:cNvPr id="24" name="Rounded Rectangle 23"/>
+          <p:cNvSpPr/>
+          <p:nvPr/>
+        </p:nvSpPr>
+        <p:spPr>
+          <a:xfrm>
+            <a:off x="4828032" y="4023360"/>
+            <a:ext cx="438912" cy="438912"/>
+          </a:xfrm>
+          <a:prstGeom prst="roundRect">
+            <a:avLst>
+              <a:gd name="adj" fmla="val 20000"/>
+            </a:avLst>
+          </a:prstGeom>
+          <a:solidFill>
+            <a:srgbClr val="0F2F63"/>
+          </a:solidFill>
+          <a:ln>
+            <a:noFill/>
+          </a:ln>
+        </p:spPr>
+        <p:style>
+          <a:lnRef idx="1">
+            <a:schemeClr val="accent1"/>
+          </a:lnRef>
+          <a:fillRef idx="3">
+            <a:schemeClr val="accent1"/>
+          </a:fillRef>
+          <a:effectRef idx="2">
+            <a:schemeClr val="accent1"/>
+          </a:effectRef>
+          <a:fontRef idx="minor">
+            <a:schemeClr val="lt1"/>
+          </a:fontRef>
+        </p:style>
+        <p:txBody>
+          <a:bodyPr rtlCol="0" anchor="ctr"/>
+          <a:lstStyle/>
+          <a:p>
+            <a:pPr algn="ctr"/>
+          </a:p>
+        </p:txBody>
+      </p:sp>
+      <p:sp>
+        <p:nvSpPr>
+          <p:cNvPr id="25" name="TextBox 24"/>
+          <p:cNvSpPr txBox="1"/>
+          <p:nvPr/>
+        </p:nvSpPr>
+        <p:spPr>
+          <a:xfrm>
+            <a:off x="4828032" y="4078224"/>
+            <a:ext cx="438912" cy="347472"/>
+          </a:xfrm>
+          <a:prstGeom prst="rect">
+            <a:avLst/>
+          </a:prstGeom>
+          <a:noFill/>
+        </p:spPr>
+        <p:txBody>
+          <a:bodyPr wrap="square">
+            <a:spAutoFit/>
+          </a:bodyPr>
+          <a:lstStyle/>
+          <a:p>
+            <a:pPr algn="ctr"/>
+            <a:r>
+              <a:rPr sz="1600" b="1">
+                <a:solidFill>
+                  <a:srgbClr val="FFFFFF"/>
+                </a:solidFill>
+                <a:latin typeface="Calibri"/>
+                <a:ea typeface="Calibri"/>
+              </a:rPr>
+              <a:t>3</a:t>
+            </a:r>
+          </a:p>
+        </p:txBody>
+      </p:sp>
+      <p:sp>
+        <p:nvSpPr>
+          <p:cNvPr id="26" name="TextBox 25"/>
+          <p:cNvSpPr txBox="1"/>
+          <p:nvPr/>
+        </p:nvSpPr>
+        <p:spPr>
+          <a:xfrm>
+            <a:off x="5440680" y="3950208"/>
+            <a:ext cx="6217920" cy="292608"/>
+          </a:xfrm>
+          <a:prstGeom prst="rect">
+            <a:avLst/>
+          </a:prstGeom>
+          <a:noFill/>
+        </p:spPr>
+        <p:txBody>
+          <a:bodyPr wrap="square">
+            <a:spAutoFit/>
+          </a:bodyPr>
+          <a:lstStyle/>
+          <a:p>
+            <a:pPr algn="l"/>
+            <a:r>
+              <a:rPr sz="1500" b="1">
+                <a:solidFill>
+                  <a:srgbClr val="0F2F63"/>
+                </a:solidFill>
+                <a:latin typeface="Calibri"/>
+                <a:ea typeface="Calibri"/>
+              </a:rPr>
+              <a:t>И-мэйлээр нэвтрэх</a:t>
+            </a:r>
+          </a:p>
+        </p:txBody>
+      </p:sp>
+      <p:sp>
+        <p:nvSpPr>
+          <p:cNvPr id="27" name="TextBox 26"/>
+          <p:cNvSpPr txBox="1"/>
+          <p:nvPr/>
+        </p:nvSpPr>
+        <p:spPr>
+          <a:xfrm>
+            <a:off x="5440680" y="4261104"/>
+            <a:ext cx="6217920" cy="329184"/>
+          </a:xfrm>
+          <a:prstGeom prst="rect">
+            <a:avLst/>
+          </a:prstGeom>
+          <a:noFill/>
+        </p:spPr>
+        <p:txBody>
+          <a:bodyPr wrap="square">
+            <a:spAutoFit/>
+          </a:bodyPr>
+          <a:lstStyle/>
+          <a:p>
+            <a:pPr algn="l"/>
+            <a:r>
+              <a:rPr sz="1300" b="0">
+                <a:solidFill>
+                  <a:srgbClr val="475569"/>
+                </a:solidFill>
+                <a:latin typeface="Calibri"/>
+                <a:ea typeface="Calibri"/>
+              </a:rPr>
+              <a:t>Нөөц арга. «И-мэйлээр нэвтрэх» дарж хаяг + нууц үг оруулна.</a:t>
+            </a:r>
+          </a:p>
+        </p:txBody>
+      </p:sp>
+      <p:sp>
+        <p:nvSpPr>
+          <p:cNvPr id="28" name="Rounded Rectangle 27"/>
+          <p:cNvSpPr/>
+          <p:nvPr/>
+        </p:nvSpPr>
+        <p:spPr>
+          <a:xfrm>
+            <a:off x="4663440" y="4791456"/>
+            <a:ext cx="7178040" cy="749808"/>
+          </a:xfrm>
+          <a:prstGeom prst="roundRect">
+            <a:avLst>
+              <a:gd name="adj" fmla="val 6000"/>
+            </a:avLst>
+          </a:prstGeom>
+          <a:solidFill>
+            <a:srgbClr val="FFF7ED"/>
+          </a:solidFill>
+          <a:ln w="11430">
+            <a:solidFill>
+              <a:srgbClr val="FDBA74"/>
+            </a:solidFill>
+          </a:ln>
+        </p:spPr>
+        <p:style>
+          <a:lnRef idx="1">
+            <a:schemeClr val="accent1"/>
+          </a:lnRef>
+          <a:fillRef idx="3">
+            <a:schemeClr val="accent1"/>
+          </a:fillRef>
+          <a:effectRef idx="2">
+            <a:schemeClr val="accent1"/>
+          </a:effectRef>
+          <a:fontRef idx="minor">
+            <a:schemeClr val="lt1"/>
+          </a:fontRef>
+        </p:style>
+        <p:txBody>
+          <a:bodyPr rtlCol="0" anchor="ctr"/>
+          <a:lstStyle/>
+          <a:p>
+            <a:pPr algn="ctr"/>
+          </a:p>
+        </p:txBody>
+      </p:sp>
+      <p:sp>
+        <p:nvSpPr>
+          <p:cNvPr id="29" name="TextBox 28"/>
+          <p:cNvSpPr txBox="1"/>
+          <p:nvPr/>
+        </p:nvSpPr>
+        <p:spPr>
+          <a:xfrm>
+            <a:off x="4828032" y="4864608"/>
+            <a:ext cx="6858000" cy="256032"/>
+          </a:xfrm>
+          <a:prstGeom prst="rect">
+            <a:avLst/>
+          </a:prstGeom>
+          <a:noFill/>
+        </p:spPr>
+        <p:txBody>
+          <a:bodyPr wrap="square">
+            <a:spAutoFit/>
+          </a:bodyPr>
+          <a:lstStyle/>
+          <a:p>
+            <a:pPr algn="l"/>
+            <a:r>
+              <a:rPr sz="1300" b="1">
+                <a:solidFill>
+                  <a:srgbClr val="EA580C"/>
+                </a:solidFill>
+                <a:latin typeface="Calibri"/>
+                <a:ea typeface="Calibri"/>
+              </a:rPr>
+              <a:t>Нууц үг</a:t>
+            </a:r>
+          </a:p>
+        </p:txBody>
+      </p:sp>
+      <p:sp>
+        <p:nvSpPr>
+          <p:cNvPr id="30" name="TextBox 29"/>
+          <p:cNvSpPr txBox="1"/>
+          <p:nvPr/>
+        </p:nvSpPr>
+        <p:spPr>
+          <a:xfrm>
+            <a:off x="4828032" y="5120640"/>
+            <a:ext cx="6858000" cy="347472"/>
+          </a:xfrm>
+          <a:prstGeom prst="rect">
+            <a:avLst/>
+          </a:prstGeom>
+          <a:noFill/>
+        </p:spPr>
+        <p:txBody>
+          <a:bodyPr wrap="square">
+            <a:spAutoFit/>
+          </a:bodyPr>
+          <a:lstStyle/>
+          <a:p>
+            <a:pPr algn="l"/>
+            <a:r>
+              <a:rPr sz="1300" b="0">
+                <a:solidFill>
+                  <a:srgbClr val="0F172A"/>
+                </a:solidFill>
+                <a:latin typeface="Calibri"/>
+                <a:ea typeface="Calibri"/>
+              </a:rPr>
+              <a:t>Утасны сүүлийн 4 орон + нэрийн латин бичлэг.   Жишээ: А.Номин / 99178904  →  8904Nomin</a:t>
+            </a:r>
+          </a:p>
+        </p:txBody>
+      </p:sp>
+      <p:sp>
+        <p:nvSpPr>
+          <p:cNvPr id="31" name="Rounded Rectangle 30"/>
+          <p:cNvSpPr/>
+          <p:nvPr/>
+        </p:nvSpPr>
+        <p:spPr>
+          <a:xfrm>
+            <a:off x="4663440" y="5632704"/>
+            <a:ext cx="7178040" cy="749808"/>
+          </a:xfrm>
+          <a:prstGeom prst="roundRect">
+            <a:avLst>
+              <a:gd name="adj" fmla="val 6000"/>
+            </a:avLst>
+          </a:prstGeom>
+          <a:solidFill>
+            <a:srgbClr val="FFFFFF"/>
+          </a:solidFill>
+          <a:ln w="11430">
+            <a:solidFill>
+              <a:srgbClr val="E2E8F0"/>
+            </a:solidFill>
+          </a:ln>
+        </p:spPr>
+        <p:style>
+          <a:lnRef idx="1">
+            <a:schemeClr val="accent1"/>
+          </a:lnRef>
+          <a:fillRef idx="3">
+            <a:schemeClr val="accent1"/>
+          </a:fillRef>
+          <a:effectRef idx="2">
+            <a:schemeClr val="accent1"/>
+          </a:effectRef>
+          <a:fontRef idx="minor">
+            <a:schemeClr val="lt1"/>
+          </a:fontRef>
+        </p:style>
+        <p:txBody>
+          <a:bodyPr rtlCol="0" anchor="ctr"/>
+          <a:lstStyle/>
+          <a:p>
+            <a:pPr algn="ctr"/>
+          </a:p>
+        </p:txBody>
+      </p:sp>
+      <p:sp>
+        <p:nvSpPr>
+          <p:cNvPr id="32" name="TextBox 31"/>
+          <p:cNvSpPr txBox="1"/>
+          <p:nvPr/>
+        </p:nvSpPr>
+        <p:spPr>
+          <a:xfrm>
+            <a:off x="4828032" y="5742432"/>
+            <a:ext cx="6858000" cy="530352"/>
+          </a:xfrm>
+          <a:prstGeom prst="rect">
+            <a:avLst/>
+          </a:prstGeom>
+          <a:noFill/>
+        </p:spPr>
+        <p:txBody>
+          <a:bodyPr wrap="square">
+            <a:spAutoFit/>
+          </a:bodyPr>
+          <a:lstStyle/>
+          <a:p>
+            <a:pPr algn="l"/>
+            <a:r>
+              <a:rPr sz="1300" b="0">
+                <a:solidFill>
+                  <a:srgbClr val="475569"/>
+                </a:solidFill>
+                <a:latin typeface="Calibri"/>
+                <a:ea typeface="Calibri"/>
+              </a:rPr>
+              <a:t>«Намайг сана» — энэ төхөөрөмж дээр дараагийн удаа нэрийг санана.
+И-мэйл: nomin@dornogovi.gov.mn хэлбэртэй. Нэвтрэх нэр нь үндсэндээ утас.</a:t>
+            </a:r>
+          </a:p>
+        </p:txBody>
+      </p:sp>
+      <p:sp>
+        <p:nvSpPr>
+          <p:cNvPr id="33" name="Rectangle 32"/>
+          <p:cNvSpPr/>
+          <p:nvPr/>
+        </p:nvSpPr>
+        <p:spPr>
+          <a:xfrm>
+            <a:off x="0" y="6601968"/>
+            <a:ext cx="12191695" cy="256032"/>
+          </a:xfrm>
+          <a:prstGeom prst="rect">
+            <a:avLst/>
+          </a:prstGeom>
+          <a:solidFill>
+            <a:srgbClr val="0F2F63"/>
+          </a:solidFill>
+          <a:ln>
+            <a:noFill/>
+          </a:ln>
+        </p:spPr>
+        <p:style>
+          <a:lnRef idx="1">
+            <a:schemeClr val="accent1"/>
+          </a:lnRef>
+          <a:fillRef idx="3">
+            <a:schemeClr val="accent1"/>
+          </a:fillRef>
+          <a:effectRef idx="2">
+            <a:schemeClr val="accent1"/>
+          </a:effectRef>
+          <a:fontRef idx="minor">
+            <a:schemeClr val="lt1"/>
+          </a:fontRef>
+        </p:style>
+        <p:txBody>
+          <a:bodyPr rtlCol="0" anchor="ctr"/>
+          <a:lstStyle/>
+          <a:p>
+            <a:pPr algn="ctr"/>
+          </a:p>
+        </p:txBody>
+      </p:sp>
+      <p:sp>
+        <p:nvSpPr>
+          <p:cNvPr id="34" name="TextBox 33"/>
+          <p:cNvSpPr txBox="1"/>
+          <p:nvPr/>
+        </p:nvSpPr>
+        <p:spPr>
+          <a:xfrm>
+            <a:off x="320040" y="6601968"/>
+            <a:ext cx="9601200" cy="256032"/>
+          </a:xfrm>
+          <a:prstGeom prst="rect">
+            <a:avLst/>
+          </a:prstGeom>
+          <a:noFill/>
+        </p:spPr>
+        <p:txBody>
+          <a:bodyPr wrap="square">
+            <a:spAutoFit/>
+          </a:bodyPr>
+          <a:lstStyle/>
+          <a:p>
+            <a:pPr algn="l"/>
+            <a:r>
               <a:rPr sz="1100" b="0">
                 <a:solidFill>
                   <a:srgbClr val="FFFFFF"/>
@@ -4288,7 +4379,7 @@
       </p:sp>
       <p:sp>
         <p:nvSpPr>
-          <p:cNvPr id="33" name="TextBox 32"/>
+          <p:cNvPr id="35" name="TextBox 34"/>
           <p:cNvSpPr txBox="1"/>
           <p:nvPr/>
         </p:nvSpPr>
@@ -4536,7 +4627,7 @@
                 <a:latin typeface="Calibri"/>
                 <a:ea typeface="Calibri"/>
               </a:rPr>
-              <a:t>Зүүн цэс · толгой · ажлын хэсэг  ·  компьютер / утас</a:t>
+              <a:t>Зүүн цэс · толгой · ажлын хэсэг   ·   компьютер / утас</a:t>
             </a:r>
           </a:p>
         </p:txBody>
@@ -4549,12 +4640,12 @@
         </p:nvSpPr>
         <p:spPr>
           <a:xfrm>
-            <a:off x="320040" y="1170432"/>
-            <a:ext cx="8183879" cy="5230368"/>
+            <a:off x="292608" y="1152144"/>
+            <a:ext cx="8275320" cy="5266944"/>
           </a:xfrm>
           <a:prstGeom prst="roundRect">
             <a:avLst>
-              <a:gd name="adj" fmla="val 3000"/>
+              <a:gd name="adj" fmla="val 2500"/>
             </a:avLst>
           </a:prstGeom>
           <a:solidFill>
@@ -4594,8 +4685,8 @@
         </p:nvSpPr>
         <p:spPr>
           <a:xfrm>
-            <a:off x="374904" y="1225296"/>
-            <a:ext cx="2331720" cy="5120640"/>
+            <a:off x="338328" y="1197864"/>
+            <a:ext cx="2395728" cy="5175504"/>
           </a:xfrm>
           <a:prstGeom prst="rect">
             <a:avLst/>
@@ -4637,8 +4728,8 @@
         </p:nvSpPr>
         <p:spPr>
           <a:xfrm>
-            <a:off x="2706624" y="1225296"/>
-            <a:ext cx="13716" cy="5120640"/>
+            <a:off x="2734056" y="1197864"/>
+            <a:ext cx="10972" cy="5175504"/>
           </a:xfrm>
           <a:prstGeom prst="rect">
             <a:avLst/>
@@ -4688,8 +4779,8 @@
         </p:blipFill>
         <p:spPr>
           <a:xfrm>
-            <a:off x="484632" y="1335024"/>
-            <a:ext cx="347472" cy="347472"/>
+            <a:off x="429768" y="1289304"/>
+            <a:ext cx="329184" cy="329184"/>
           </a:xfrm>
           <a:prstGeom prst="rect">
             <a:avLst/>
@@ -4704,8 +4795,8 @@
         </p:nvSpPr>
         <p:spPr>
           <a:xfrm>
-            <a:off x="877824" y="1316736"/>
-            <a:ext cx="1737360" cy="201168"/>
+            <a:off x="813816" y="1271016"/>
+            <a:ext cx="1828800" cy="201168"/>
           </a:xfrm>
           <a:prstGeom prst="rect">
             <a:avLst/>
@@ -4740,8 +4831,8 @@
         </p:nvSpPr>
         <p:spPr>
           <a:xfrm>
-            <a:off x="877824" y="1499616"/>
-            <a:ext cx="1737360" cy="182880"/>
+            <a:off x="813816" y="1453896"/>
+            <a:ext cx="1828800" cy="164592"/>
           </a:xfrm>
           <a:prstGeom prst="rect">
             <a:avLst/>
@@ -4776,8 +4867,8 @@
         </p:nvSpPr>
         <p:spPr>
           <a:xfrm>
-            <a:off x="374904" y="1728216"/>
-            <a:ext cx="2331720" cy="10972"/>
+            <a:off x="338328" y="1655064"/>
+            <a:ext cx="2395728" cy="9144"/>
           </a:xfrm>
           <a:prstGeom prst="rect">
             <a:avLst/>
@@ -4819,8 +4910,8 @@
         </p:nvSpPr>
         <p:spPr>
           <a:xfrm>
-            <a:off x="466344" y="1792224"/>
-            <a:ext cx="2148840" cy="164592"/>
+            <a:off x="411480" y="1709928"/>
+            <a:ext cx="2249424" cy="146304"/>
           </a:xfrm>
           <a:prstGeom prst="rect">
             <a:avLst/>
@@ -4835,7 +4926,7 @@
           <a:p>
             <a:pPr algn="l"/>
             <a:r>
-              <a:rPr sz="800" b="1">
+              <a:rPr sz="700" b="1">
                 <a:solidFill>
                   <a:srgbClr val="64748B"/>
                 </a:solidFill>
@@ -4855,8 +4946,8 @@
         </p:nvSpPr>
         <p:spPr>
           <a:xfrm>
-            <a:off x="466344" y="1956816"/>
-            <a:ext cx="2148840" cy="219456"/>
+            <a:off x="411480" y="1856232"/>
+            <a:ext cx="2249424" cy="256032"/>
           </a:xfrm>
           <a:prstGeom prst="roundRect">
             <a:avLst>
@@ -4864,7 +4955,7 @@
             </a:avLst>
           </a:prstGeom>
           <a:solidFill>
-            <a:srgbClr val="E8EEF6"/>
+            <a:srgbClr val="0F2F63"/>
           </a:solidFill>
           <a:ln>
             <a:noFill/>
@@ -4894,57 +4985,14 @@
       </p:sp>
       <p:sp>
         <p:nvSpPr>
-          <p:cNvPr id="16" name="Rectangle 15"/>
-          <p:cNvSpPr/>
-          <p:nvPr/>
-        </p:nvSpPr>
-        <p:spPr>
-          <a:xfrm>
-            <a:off x="466344" y="1956816"/>
-            <a:ext cx="45720" cy="219456"/>
-          </a:xfrm>
-          <a:prstGeom prst="rect">
-            <a:avLst/>
-          </a:prstGeom>
-          <a:solidFill>
-            <a:srgbClr val="EA580C"/>
-          </a:solidFill>
-          <a:ln>
-            <a:noFill/>
-          </a:ln>
-        </p:spPr>
-        <p:style>
-          <a:lnRef idx="1">
-            <a:schemeClr val="accent1"/>
-          </a:lnRef>
-          <a:fillRef idx="3">
-            <a:schemeClr val="accent1"/>
-          </a:fillRef>
-          <a:effectRef idx="2">
-            <a:schemeClr val="accent1"/>
-          </a:effectRef>
-          <a:fontRef idx="minor">
-            <a:schemeClr val="lt1"/>
-          </a:fontRef>
-        </p:style>
-        <p:txBody>
-          <a:bodyPr rtlCol="0" anchor="ctr"/>
-          <a:lstStyle/>
-          <a:p>
-            <a:pPr algn="ctr"/>
-          </a:p>
-        </p:txBody>
-      </p:sp>
-      <p:sp>
-        <p:nvSpPr>
-          <p:cNvPr id="17" name="TextBox 16"/>
+          <p:cNvPr id="16" name="TextBox 15"/>
           <p:cNvSpPr txBox="1"/>
           <p:nvPr/>
         </p:nvSpPr>
         <p:spPr>
           <a:xfrm>
-            <a:off x="594360" y="1965960"/>
-            <a:ext cx="1984248" cy="201168"/>
+            <a:off x="521208" y="1874520"/>
+            <a:ext cx="2103120" cy="219456"/>
           </a:xfrm>
           <a:prstGeom prst="rect">
             <a:avLst/>
@@ -4959,9 +5007,9 @@
           <a:p>
             <a:pPr algn="l"/>
             <a:r>
-              <a:rPr sz="900" b="1">
-                <a:solidFill>
-                  <a:srgbClr val="0F2F63"/>
+              <a:rPr sz="1000" b="1">
+                <a:solidFill>
+                  <a:srgbClr val="FFFFFF"/>
                 </a:solidFill>
                 <a:latin typeface="Calibri"/>
                 <a:ea typeface="Calibri"/>
@@ -4973,14 +5021,14 @@
       </p:sp>
       <p:sp>
         <p:nvSpPr>
-          <p:cNvPr id="18" name="TextBox 17"/>
+          <p:cNvPr id="17" name="TextBox 16"/>
           <p:cNvSpPr txBox="1"/>
           <p:nvPr/>
         </p:nvSpPr>
         <p:spPr>
           <a:xfrm>
-            <a:off x="466344" y="2212848"/>
-            <a:ext cx="2148840" cy="164592"/>
+            <a:off x="411480" y="2148840"/>
+            <a:ext cx="2249424" cy="146304"/>
           </a:xfrm>
           <a:prstGeom prst="rect">
             <a:avLst/>
@@ -4995,7 +5043,7 @@
           <a:p>
             <a:pPr algn="l"/>
             <a:r>
-              <a:rPr sz="800" b="1">
+              <a:rPr sz="700" b="1">
                 <a:solidFill>
                   <a:srgbClr val="64748B"/>
                 </a:solidFill>
@@ -5009,14 +5057,14 @@
       </p:sp>
       <p:sp>
         <p:nvSpPr>
-          <p:cNvPr id="19" name="Rounded Rectangle 18"/>
+          <p:cNvPr id="18" name="Rounded Rectangle 17"/>
           <p:cNvSpPr/>
           <p:nvPr/>
         </p:nvSpPr>
         <p:spPr>
           <a:xfrm>
-            <a:off x="466344" y="2377440"/>
-            <a:ext cx="2148840" cy="219456"/>
+            <a:off x="411480" y="2295144"/>
+            <a:ext cx="2249424" cy="256032"/>
           </a:xfrm>
           <a:prstGeom prst="roundRect">
             <a:avLst>
@@ -5054,14 +5102,14 @@
       </p:sp>
       <p:sp>
         <p:nvSpPr>
-          <p:cNvPr id="20" name="TextBox 19"/>
+          <p:cNvPr id="19" name="TextBox 18"/>
           <p:cNvSpPr txBox="1"/>
           <p:nvPr/>
         </p:nvSpPr>
         <p:spPr>
           <a:xfrm>
-            <a:off x="594360" y="2386584"/>
-            <a:ext cx="1984248" cy="201168"/>
+            <a:off x="521208" y="2313432"/>
+            <a:ext cx="2103120" cy="219456"/>
           </a:xfrm>
           <a:prstGeom prst="rect">
             <a:avLst/>
@@ -5076,7 +5124,7 @@
           <a:p>
             <a:pPr algn="l"/>
             <a:r>
-              <a:rPr sz="900" b="0">
+              <a:rPr sz="1000" b="0">
                 <a:solidFill>
                   <a:srgbClr val="0F172A"/>
                 </a:solidFill>
@@ -5090,50 +5138,14 @@
       </p:sp>
       <p:sp>
         <p:nvSpPr>
-          <p:cNvPr id="21" name="TextBox 20"/>
-          <p:cNvSpPr txBox="1"/>
-          <p:nvPr/>
-        </p:nvSpPr>
-        <p:spPr>
-          <a:xfrm>
-            <a:off x="466344" y="2633472"/>
-            <a:ext cx="2148840" cy="164592"/>
-          </a:xfrm>
-          <a:prstGeom prst="rect">
-            <a:avLst/>
-          </a:prstGeom>
-          <a:noFill/>
-        </p:spPr>
-        <p:txBody>
-          <a:bodyPr wrap="square">
-            <a:spAutoFit/>
-          </a:bodyPr>
-          <a:lstStyle/>
-          <a:p>
-            <a:pPr algn="l"/>
-            <a:r>
-              <a:rPr sz="800" b="1">
-                <a:solidFill>
-                  <a:srgbClr val="64748B"/>
-                </a:solidFill>
-                <a:latin typeface="Calibri"/>
-                <a:ea typeface="Calibri"/>
-              </a:rPr>
-              <a:t>АЖЛЫН УДИРДЛАГА</a:t>
-            </a:r>
-          </a:p>
-        </p:txBody>
-      </p:sp>
-      <p:sp>
-        <p:nvSpPr>
-          <p:cNvPr id="22" name="Rounded Rectangle 21"/>
+          <p:cNvPr id="20" name="Rounded Rectangle 19"/>
           <p:cNvSpPr/>
           <p:nvPr/>
         </p:nvSpPr>
         <p:spPr>
           <a:xfrm>
-            <a:off x="466344" y="2798064"/>
-            <a:ext cx="2148840" cy="219456"/>
+            <a:off x="411480" y="2569464"/>
+            <a:ext cx="2249424" cy="256032"/>
           </a:xfrm>
           <a:prstGeom prst="roundRect">
             <a:avLst>
@@ -5171,14 +5183,14 @@
       </p:sp>
       <p:sp>
         <p:nvSpPr>
-          <p:cNvPr id="23" name="TextBox 22"/>
+          <p:cNvPr id="21" name="TextBox 20"/>
           <p:cNvSpPr txBox="1"/>
           <p:nvPr/>
         </p:nvSpPr>
         <p:spPr>
           <a:xfrm>
-            <a:off x="594360" y="2807208"/>
-            <a:ext cx="1984248" cy="201168"/>
+            <a:off x="521208" y="2587752"/>
+            <a:ext cx="2103120" cy="219456"/>
           </a:xfrm>
           <a:prstGeom prst="rect">
             <a:avLst/>
@@ -5193,28 +5205,64 @@
           <a:p>
             <a:pPr algn="l"/>
             <a:r>
-              <a:rPr sz="900" b="0">
+              <a:rPr sz="1000" b="0">
                 <a:solidFill>
                   <a:srgbClr val="0F172A"/>
                 </a:solidFill>
                 <a:latin typeface="Calibri"/>
                 <a:ea typeface="Calibri"/>
               </a:rPr>
-              <a:t>Үүрэг даалгавар</a:t>
-            </a:r>
-          </a:p>
-        </p:txBody>
-      </p:sp>
-      <p:sp>
-        <p:nvSpPr>
-          <p:cNvPr id="24" name="Rounded Rectangle 23"/>
+              <a:t>Шилэн данс</a:t>
+            </a:r>
+          </a:p>
+        </p:txBody>
+      </p:sp>
+      <p:sp>
+        <p:nvSpPr>
+          <p:cNvPr id="22" name="TextBox 21"/>
+          <p:cNvSpPr txBox="1"/>
+          <p:nvPr/>
+        </p:nvSpPr>
+        <p:spPr>
+          <a:xfrm>
+            <a:off x="411480" y="2862072"/>
+            <a:ext cx="2249424" cy="146304"/>
+          </a:xfrm>
+          <a:prstGeom prst="rect">
+            <a:avLst/>
+          </a:prstGeom>
+          <a:noFill/>
+        </p:spPr>
+        <p:txBody>
+          <a:bodyPr wrap="square">
+            <a:spAutoFit/>
+          </a:bodyPr>
+          <a:lstStyle/>
+          <a:p>
+            <a:pPr algn="l"/>
+            <a:r>
+              <a:rPr sz="700" b="1">
+                <a:solidFill>
+                  <a:srgbClr val="64748B"/>
+                </a:solidFill>
+                <a:latin typeface="Calibri"/>
+                <a:ea typeface="Calibri"/>
+              </a:rPr>
+              <a:t>АЖЛЫН УДИРДЛАГА</a:t>
+            </a:r>
+          </a:p>
+        </p:txBody>
+      </p:sp>
+      <p:sp>
+        <p:nvSpPr>
+          <p:cNvPr id="23" name="Rounded Rectangle 22"/>
           <p:cNvSpPr/>
           <p:nvPr/>
         </p:nvSpPr>
         <p:spPr>
           <a:xfrm>
-            <a:off x="466344" y="3035808"/>
-            <a:ext cx="2148840" cy="219456"/>
+            <a:off x="411480" y="3008376"/>
+            <a:ext cx="2249424" cy="256032"/>
           </a:xfrm>
           <a:prstGeom prst="roundRect">
             <a:avLst>
@@ -5252,14 +5300,14 @@
       </p:sp>
       <p:sp>
         <p:nvSpPr>
-          <p:cNvPr id="25" name="TextBox 24"/>
+          <p:cNvPr id="24" name="TextBox 23"/>
           <p:cNvSpPr txBox="1"/>
           <p:nvPr/>
         </p:nvSpPr>
         <p:spPr>
           <a:xfrm>
-            <a:off x="594360" y="3044952"/>
-            <a:ext cx="1984248" cy="201168"/>
+            <a:off x="521208" y="3026664"/>
+            <a:ext cx="2103120" cy="219456"/>
           </a:xfrm>
           <a:prstGeom prst="rect">
             <a:avLst/>
@@ -5274,28 +5322,28 @@
           <a:p>
             <a:pPr algn="l"/>
             <a:r>
-              <a:rPr sz="900" b="0">
+              <a:rPr sz="1000" b="0">
                 <a:solidFill>
                   <a:srgbClr val="0F172A"/>
                 </a:solidFill>
                 <a:latin typeface="Calibri"/>
                 <a:ea typeface="Calibri"/>
               </a:rPr>
-              <a:t>Ажлын хэсэг</a:t>
-            </a:r>
-          </a:p>
-        </p:txBody>
-      </p:sp>
-      <p:sp>
-        <p:nvSpPr>
-          <p:cNvPr id="26" name="Rounded Rectangle 25"/>
+              <a:t>Үүрэг даалгавар</a:t>
+            </a:r>
+          </a:p>
+        </p:txBody>
+      </p:sp>
+      <p:sp>
+        <p:nvSpPr>
+          <p:cNvPr id="25" name="Rounded Rectangle 24"/>
           <p:cNvSpPr/>
           <p:nvPr/>
         </p:nvSpPr>
         <p:spPr>
           <a:xfrm>
-            <a:off x="466344" y="3273552"/>
-            <a:ext cx="2148840" cy="219456"/>
+            <a:off x="411480" y="3282696"/>
+            <a:ext cx="2249424" cy="256032"/>
           </a:xfrm>
           <a:prstGeom prst="roundRect">
             <a:avLst>
@@ -5333,14 +5381,14 @@
       </p:sp>
       <p:sp>
         <p:nvSpPr>
-          <p:cNvPr id="27" name="TextBox 26"/>
+          <p:cNvPr id="26" name="TextBox 25"/>
           <p:cNvSpPr txBox="1"/>
           <p:nvPr/>
         </p:nvSpPr>
         <p:spPr>
           <a:xfrm>
-            <a:off x="594360" y="3282696"/>
-            <a:ext cx="1984248" cy="201168"/>
+            <a:off x="521208" y="3300984"/>
+            <a:ext cx="2103120" cy="219456"/>
           </a:xfrm>
           <a:prstGeom prst="rect">
             <a:avLst/>
@@ -5355,64 +5403,28 @@
           <a:p>
             <a:pPr algn="l"/>
             <a:r>
-              <a:rPr sz="900" b="0">
+              <a:rPr sz="1000" b="0">
                 <a:solidFill>
                   <a:srgbClr val="0F172A"/>
                 </a:solidFill>
                 <a:latin typeface="Calibri"/>
                 <a:ea typeface="Calibri"/>
               </a:rPr>
-              <a:t>Төлөвлөгөө</a:t>
-            </a:r>
-          </a:p>
-        </p:txBody>
-      </p:sp>
-      <p:sp>
-        <p:nvSpPr>
-          <p:cNvPr id="28" name="TextBox 27"/>
-          <p:cNvSpPr txBox="1"/>
-          <p:nvPr/>
-        </p:nvSpPr>
-        <p:spPr>
-          <a:xfrm>
-            <a:off x="466344" y="3529584"/>
-            <a:ext cx="2148840" cy="164592"/>
-          </a:xfrm>
-          <a:prstGeom prst="rect">
-            <a:avLst/>
-          </a:prstGeom>
-          <a:noFill/>
-        </p:spPr>
-        <p:txBody>
-          <a:bodyPr wrap="square">
-            <a:spAutoFit/>
-          </a:bodyPr>
-          <a:lstStyle/>
-          <a:p>
-            <a:pPr algn="l"/>
-            <a:r>
-              <a:rPr sz="800" b="1">
-                <a:solidFill>
-                  <a:srgbClr val="64748B"/>
-                </a:solidFill>
-                <a:latin typeface="Calibri"/>
-                <a:ea typeface="Calibri"/>
-              </a:rPr>
-              <a:t>БИЧИГ ХЭРЭГ</a:t>
-            </a:r>
-          </a:p>
-        </p:txBody>
-      </p:sp>
-      <p:sp>
-        <p:nvSpPr>
-          <p:cNvPr id="29" name="Rounded Rectangle 28"/>
+              <a:t>Ажлын хэсэг</a:t>
+            </a:r>
+          </a:p>
+        </p:txBody>
+      </p:sp>
+      <p:sp>
+        <p:nvSpPr>
+          <p:cNvPr id="27" name="Rounded Rectangle 26"/>
           <p:cNvSpPr/>
           <p:nvPr/>
         </p:nvSpPr>
         <p:spPr>
           <a:xfrm>
-            <a:off x="466344" y="3694176"/>
-            <a:ext cx="2148840" cy="219456"/>
+            <a:off x="411480" y="3557016"/>
+            <a:ext cx="2249424" cy="256032"/>
           </a:xfrm>
           <a:prstGeom prst="roundRect">
             <a:avLst>
@@ -5450,14 +5462,14 @@
       </p:sp>
       <p:sp>
         <p:nvSpPr>
-          <p:cNvPr id="30" name="TextBox 29"/>
+          <p:cNvPr id="28" name="TextBox 27"/>
           <p:cNvSpPr txBox="1"/>
           <p:nvPr/>
         </p:nvSpPr>
         <p:spPr>
           <a:xfrm>
-            <a:off x="594360" y="3703320"/>
-            <a:ext cx="1984248" cy="201168"/>
+            <a:off x="521208" y="3575304"/>
+            <a:ext cx="2103120" cy="219456"/>
           </a:xfrm>
           <a:prstGeom prst="rect">
             <a:avLst/>
@@ -5472,28 +5484,64 @@
           <a:p>
             <a:pPr algn="l"/>
             <a:r>
-              <a:rPr sz="900" b="0">
+              <a:rPr sz="1000" b="0">
                 <a:solidFill>
                   <a:srgbClr val="0F172A"/>
                 </a:solidFill>
                 <a:latin typeface="Calibri"/>
                 <a:ea typeface="Calibri"/>
               </a:rPr>
-              <a:t>Захирамж, тушаал</a:t>
-            </a:r>
-          </a:p>
-        </p:txBody>
-      </p:sp>
-      <p:sp>
-        <p:nvSpPr>
-          <p:cNvPr id="31" name="Rounded Rectangle 30"/>
+              <a:t>Төлөвлөгөө</a:t>
+            </a:r>
+          </a:p>
+        </p:txBody>
+      </p:sp>
+      <p:sp>
+        <p:nvSpPr>
+          <p:cNvPr id="29" name="TextBox 28"/>
+          <p:cNvSpPr txBox="1"/>
+          <p:nvPr/>
+        </p:nvSpPr>
+        <p:spPr>
+          <a:xfrm>
+            <a:off x="411480" y="3849624"/>
+            <a:ext cx="2249424" cy="146304"/>
+          </a:xfrm>
+          <a:prstGeom prst="rect">
+            <a:avLst/>
+          </a:prstGeom>
+          <a:noFill/>
+        </p:spPr>
+        <p:txBody>
+          <a:bodyPr wrap="square">
+            <a:spAutoFit/>
+          </a:bodyPr>
+          <a:lstStyle/>
+          <a:p>
+            <a:pPr algn="l"/>
+            <a:r>
+              <a:rPr sz="700" b="1">
+                <a:solidFill>
+                  <a:srgbClr val="64748B"/>
+                </a:solidFill>
+                <a:latin typeface="Calibri"/>
+                <a:ea typeface="Calibri"/>
+              </a:rPr>
+              <a:t>БИЧИГ ХЭРЭГ</a:t>
+            </a:r>
+          </a:p>
+        </p:txBody>
+      </p:sp>
+      <p:sp>
+        <p:nvSpPr>
+          <p:cNvPr id="30" name="Rounded Rectangle 29"/>
           <p:cNvSpPr/>
           <p:nvPr/>
         </p:nvSpPr>
         <p:spPr>
           <a:xfrm>
-            <a:off x="466344" y="3931920"/>
-            <a:ext cx="2148840" cy="219456"/>
+            <a:off x="411480" y="3995928"/>
+            <a:ext cx="2249424" cy="256032"/>
           </a:xfrm>
           <a:prstGeom prst="roundRect">
             <a:avLst>
@@ -5531,14 +5579,14 @@
       </p:sp>
       <p:sp>
         <p:nvSpPr>
-          <p:cNvPr id="32" name="TextBox 31"/>
+          <p:cNvPr id="31" name="TextBox 30"/>
           <p:cNvSpPr txBox="1"/>
           <p:nvPr/>
         </p:nvSpPr>
         <p:spPr>
           <a:xfrm>
-            <a:off x="594360" y="3941064"/>
-            <a:ext cx="1984248" cy="201168"/>
+            <a:off x="521208" y="4014216"/>
+            <a:ext cx="2103120" cy="219456"/>
           </a:xfrm>
           <a:prstGeom prst="rect">
             <a:avLst/>
@@ -5553,28 +5601,28 @@
           <a:p>
             <a:pPr algn="l"/>
             <a:r>
-              <a:rPr sz="900" b="0">
+              <a:rPr sz="1000" b="0">
                 <a:solidFill>
                   <a:srgbClr val="0F172A"/>
                 </a:solidFill>
                 <a:latin typeface="Calibri"/>
                 <a:ea typeface="Calibri"/>
               </a:rPr>
-              <a:t>Архив</a:t>
-            </a:r>
-          </a:p>
-        </p:txBody>
-      </p:sp>
-      <p:sp>
-        <p:nvSpPr>
-          <p:cNvPr id="33" name="TextBox 32"/>
+              <a:t>Захирамж, тушаал</a:t>
+            </a:r>
+          </a:p>
+        </p:txBody>
+      </p:sp>
+      <p:sp>
+        <p:nvSpPr>
+          <p:cNvPr id="32" name="TextBox 31"/>
           <p:cNvSpPr txBox="1"/>
           <p:nvPr/>
         </p:nvSpPr>
         <p:spPr>
           <a:xfrm>
-            <a:off x="466344" y="4187952"/>
-            <a:ext cx="2148840" cy="164592"/>
+            <a:off x="411480" y="4288536"/>
+            <a:ext cx="2249424" cy="146304"/>
           </a:xfrm>
           <a:prstGeom prst="rect">
             <a:avLst/>
@@ -5589,7 +5637,7 @@
           <a:p>
             <a:pPr algn="l"/>
             <a:r>
-              <a:rPr sz="800" b="1">
+              <a:rPr sz="700" b="1">
                 <a:solidFill>
                   <a:srgbClr val="64748B"/>
                 </a:solidFill>
@@ -5603,14 +5651,14 @@
       </p:sp>
       <p:sp>
         <p:nvSpPr>
-          <p:cNvPr id="34" name="Rounded Rectangle 33"/>
+          <p:cNvPr id="33" name="Rounded Rectangle 32"/>
           <p:cNvSpPr/>
           <p:nvPr/>
         </p:nvSpPr>
         <p:spPr>
           <a:xfrm>
-            <a:off x="466344" y="4352544"/>
-            <a:ext cx="2148840" cy="219456"/>
+            <a:off x="411480" y="4434840"/>
+            <a:ext cx="2249424" cy="256032"/>
           </a:xfrm>
           <a:prstGeom prst="roundRect">
             <a:avLst>
@@ -5648,14 +5696,14 @@
       </p:sp>
       <p:sp>
         <p:nvSpPr>
-          <p:cNvPr id="35" name="TextBox 34"/>
+          <p:cNvPr id="34" name="TextBox 33"/>
           <p:cNvSpPr txBox="1"/>
           <p:nvPr/>
         </p:nvSpPr>
         <p:spPr>
           <a:xfrm>
-            <a:off x="594360" y="4361688"/>
-            <a:ext cx="1984248" cy="201168"/>
+            <a:off x="521208" y="4453128"/>
+            <a:ext cx="2103120" cy="219456"/>
           </a:xfrm>
           <a:prstGeom prst="rect">
             <a:avLst/>
@@ -5670,7 +5718,7 @@
           <a:p>
             <a:pPr algn="l"/>
             <a:r>
-              <a:rPr sz="900" b="0">
+              <a:rPr sz="1000" b="0">
                 <a:solidFill>
                   <a:srgbClr val="0F172A"/>
                 </a:solidFill>
@@ -5684,14 +5732,14 @@
       </p:sp>
       <p:sp>
         <p:nvSpPr>
-          <p:cNvPr id="36" name="Rounded Rectangle 35"/>
+          <p:cNvPr id="35" name="Rounded Rectangle 34"/>
           <p:cNvSpPr/>
           <p:nvPr/>
         </p:nvSpPr>
         <p:spPr>
           <a:xfrm>
-            <a:off x="466344" y="4590288"/>
-            <a:ext cx="2148840" cy="219456"/>
+            <a:off x="411480" y="4709160"/>
+            <a:ext cx="2249424" cy="256032"/>
           </a:xfrm>
           <a:prstGeom prst="roundRect">
             <a:avLst>
@@ -5729,14 +5777,14 @@
       </p:sp>
       <p:sp>
         <p:nvSpPr>
-          <p:cNvPr id="37" name="TextBox 36"/>
+          <p:cNvPr id="36" name="TextBox 35"/>
           <p:cNvSpPr txBox="1"/>
           <p:nvPr/>
         </p:nvSpPr>
         <p:spPr>
           <a:xfrm>
-            <a:off x="594360" y="4599432"/>
-            <a:ext cx="1984248" cy="201168"/>
+            <a:off x="521208" y="4727448"/>
+            <a:ext cx="2103120" cy="219456"/>
           </a:xfrm>
           <a:prstGeom prst="rect">
             <a:avLst/>
@@ -5751,7 +5799,7 @@
           <a:p>
             <a:pPr algn="l"/>
             <a:r>
-              <a:rPr sz="900" b="0">
+              <a:rPr sz="1000" b="0">
                 <a:solidFill>
                   <a:srgbClr val="0F172A"/>
                 </a:solidFill>
@@ -5765,14 +5813,14 @@
       </p:sp>
       <p:sp>
         <p:nvSpPr>
-          <p:cNvPr id="38" name="TextBox 37"/>
+          <p:cNvPr id="37" name="TextBox 36"/>
           <p:cNvSpPr txBox="1"/>
           <p:nvPr/>
         </p:nvSpPr>
         <p:spPr>
           <a:xfrm>
-            <a:off x="466344" y="4846320"/>
-            <a:ext cx="2148840" cy="164592"/>
+            <a:off x="411480" y="5001768"/>
+            <a:ext cx="2249424" cy="146304"/>
           </a:xfrm>
           <a:prstGeom prst="rect">
             <a:avLst/>
@@ -5787,7 +5835,7 @@
           <a:p>
             <a:pPr algn="l"/>
             <a:r>
-              <a:rPr sz="800" b="1">
+              <a:rPr sz="700" b="1">
                 <a:solidFill>
                   <a:srgbClr val="64748B"/>
                 </a:solidFill>
@@ -5801,14 +5849,14 @@
       </p:sp>
       <p:sp>
         <p:nvSpPr>
-          <p:cNvPr id="39" name="Rounded Rectangle 38"/>
+          <p:cNvPr id="38" name="Rounded Rectangle 37"/>
           <p:cNvSpPr/>
           <p:nvPr/>
         </p:nvSpPr>
         <p:spPr>
           <a:xfrm>
-            <a:off x="466344" y="5010912"/>
-            <a:ext cx="2148840" cy="219456"/>
+            <a:off x="411480" y="5148072"/>
+            <a:ext cx="2249424" cy="256032"/>
           </a:xfrm>
           <a:prstGeom prst="roundRect">
             <a:avLst>
@@ -5846,14 +5894,14 @@
       </p:sp>
       <p:sp>
         <p:nvSpPr>
-          <p:cNvPr id="40" name="TextBox 39"/>
+          <p:cNvPr id="39" name="TextBox 38"/>
           <p:cNvSpPr txBox="1"/>
           <p:nvPr/>
         </p:nvSpPr>
         <p:spPr>
           <a:xfrm>
-            <a:off x="594360" y="5020056"/>
-            <a:ext cx="1984248" cy="201168"/>
+            <a:off x="521208" y="5166360"/>
+            <a:ext cx="2103120" cy="219456"/>
           </a:xfrm>
           <a:prstGeom prst="rect">
             <a:avLst/>
@@ -5868,7 +5916,7 @@
           <a:p>
             <a:pPr algn="l"/>
             <a:r>
-              <a:rPr sz="900" b="0">
+              <a:rPr sz="1000" b="0">
                 <a:solidFill>
                   <a:srgbClr val="0F172A"/>
                 </a:solidFill>
@@ -5882,14 +5930,14 @@
       </p:sp>
       <p:sp>
         <p:nvSpPr>
-          <p:cNvPr id="41" name="Rectangle 40"/>
+          <p:cNvPr id="40" name="Rectangle 39"/>
           <p:cNvSpPr/>
           <p:nvPr/>
         </p:nvSpPr>
         <p:spPr>
           <a:xfrm>
-            <a:off x="374904" y="5705856"/>
-            <a:ext cx="2331720" cy="10972"/>
+            <a:off x="338328" y="5806440"/>
+            <a:ext cx="2395728" cy="9144"/>
           </a:xfrm>
           <a:prstGeom prst="rect">
             <a:avLst/>
@@ -5925,14 +5973,14 @@
       </p:sp>
       <p:sp>
         <p:nvSpPr>
-          <p:cNvPr id="42" name="TextBox 41"/>
+          <p:cNvPr id="41" name="TextBox 40"/>
           <p:cNvSpPr txBox="1"/>
           <p:nvPr/>
         </p:nvSpPr>
         <p:spPr>
           <a:xfrm>
-            <a:off x="466344" y="5779008"/>
-            <a:ext cx="2148840" cy="201168"/>
+            <a:off x="411480" y="5861304"/>
+            <a:ext cx="2249424" cy="182880"/>
           </a:xfrm>
           <a:prstGeom prst="rect">
             <a:avLst/>
@@ -5961,14 +6009,14 @@
       </p:sp>
       <p:sp>
         <p:nvSpPr>
-          <p:cNvPr id="43" name="TextBox 42"/>
+          <p:cNvPr id="42" name="TextBox 41"/>
           <p:cNvSpPr txBox="1"/>
           <p:nvPr/>
         </p:nvSpPr>
         <p:spPr>
           <a:xfrm>
-            <a:off x="466344" y="5980176"/>
-            <a:ext cx="2148840" cy="201168"/>
+            <a:off x="411480" y="6044184"/>
+            <a:ext cx="2249424" cy="182880"/>
           </a:xfrm>
           <a:prstGeom prst="rect">
             <a:avLst/>
@@ -5997,14 +6045,14 @@
       </p:sp>
       <p:sp>
         <p:nvSpPr>
-          <p:cNvPr id="44" name="TextBox 43"/>
+          <p:cNvPr id="43" name="TextBox 42"/>
           <p:cNvSpPr txBox="1"/>
           <p:nvPr/>
         </p:nvSpPr>
         <p:spPr>
           <a:xfrm>
-            <a:off x="466344" y="6163056"/>
-            <a:ext cx="2148840" cy="164592"/>
+            <a:off x="411480" y="6208776"/>
+            <a:ext cx="2249424" cy="146304"/>
           </a:xfrm>
           <a:prstGeom prst="rect">
             <a:avLst/>
@@ -6033,14 +6081,14 @@
       </p:sp>
       <p:sp>
         <p:nvSpPr>
-          <p:cNvPr id="45" name="Rectangle 44"/>
+          <p:cNvPr id="44" name="Rectangle 43"/>
           <p:cNvSpPr/>
           <p:nvPr/>
         </p:nvSpPr>
         <p:spPr>
           <a:xfrm>
-            <a:off x="2706624" y="1225296"/>
-            <a:ext cx="5742431" cy="475488"/>
+            <a:off x="2734056" y="1197864"/>
+            <a:ext cx="5788152" cy="457200"/>
           </a:xfrm>
           <a:prstGeom prst="rect">
             <a:avLst/>
@@ -6076,14 +6124,14 @@
       </p:sp>
       <p:sp>
         <p:nvSpPr>
-          <p:cNvPr id="46" name="Rectangle 45"/>
+          <p:cNvPr id="45" name="Rectangle 44"/>
           <p:cNvSpPr/>
           <p:nvPr/>
         </p:nvSpPr>
         <p:spPr>
           <a:xfrm>
-            <a:off x="2706624" y="1700784"/>
-            <a:ext cx="5742431" cy="10972"/>
+            <a:off x="2734056" y="1655064"/>
+            <a:ext cx="5788152" cy="9144"/>
           </a:xfrm>
           <a:prstGeom prst="rect">
             <a:avLst/>
@@ -6119,14 +6167,14 @@
       </p:sp>
       <p:sp>
         <p:nvSpPr>
-          <p:cNvPr id="47" name="TextBox 46"/>
+          <p:cNvPr id="46" name="TextBox 45"/>
           <p:cNvSpPr txBox="1"/>
           <p:nvPr/>
         </p:nvSpPr>
         <p:spPr>
           <a:xfrm>
-            <a:off x="2871216" y="1335024"/>
-            <a:ext cx="3291840" cy="292608"/>
+            <a:off x="2880360" y="1289304"/>
+            <a:ext cx="3657600" cy="274320"/>
           </a:xfrm>
           <a:prstGeom prst="rect">
             <a:avLst/>
@@ -6155,14 +6203,14 @@
       </p:sp>
       <p:sp>
         <p:nvSpPr>
-          <p:cNvPr id="48" name="Rounded Rectangle 47"/>
+          <p:cNvPr id="47" name="Rounded Rectangle 46"/>
           <p:cNvSpPr/>
           <p:nvPr/>
         </p:nvSpPr>
         <p:spPr>
           <a:xfrm>
-            <a:off x="6757415" y="1316736"/>
-            <a:ext cx="1554480" cy="292608"/>
+            <a:off x="6894576" y="1280160"/>
+            <a:ext cx="1481328" cy="292608"/>
           </a:xfrm>
           <a:prstGeom prst="roundRect">
             <a:avLst>
@@ -6202,13 +6250,13 @@
       </p:sp>
       <p:sp>
         <p:nvSpPr>
-          <p:cNvPr id="49" name="Rounded Rectangle 48"/>
+          <p:cNvPr id="48" name="Rounded Rectangle 47"/>
           <p:cNvSpPr/>
           <p:nvPr/>
         </p:nvSpPr>
         <p:spPr>
           <a:xfrm>
-            <a:off x="6812279" y="1353312"/>
+            <a:off x="6949440" y="1316736"/>
             <a:ext cx="219456" cy="219456"/>
           </a:xfrm>
           <a:prstGeom prst="roundRect">
@@ -6247,14 +6295,14 @@
       </p:sp>
       <p:sp>
         <p:nvSpPr>
-          <p:cNvPr id="50" name="TextBox 49"/>
+          <p:cNvPr id="49" name="TextBox 48"/>
           <p:cNvSpPr txBox="1"/>
           <p:nvPr/>
         </p:nvSpPr>
         <p:spPr>
           <a:xfrm>
-            <a:off x="7068311" y="1335024"/>
-            <a:ext cx="1188720" cy="237744"/>
+            <a:off x="7205472" y="1298448"/>
+            <a:ext cx="1115568" cy="237744"/>
           </a:xfrm>
           <a:prstGeom prst="rect">
             <a:avLst/>
@@ -6283,14 +6331,14 @@
       </p:sp>
       <p:sp>
         <p:nvSpPr>
-          <p:cNvPr id="51" name="Rectangle 50"/>
+          <p:cNvPr id="50" name="Rectangle 49"/>
           <p:cNvSpPr/>
           <p:nvPr/>
         </p:nvSpPr>
         <p:spPr>
           <a:xfrm>
-            <a:off x="2706624" y="1711756"/>
-            <a:ext cx="5742431" cy="4634180"/>
+            <a:off x="2734056" y="1664208"/>
+            <a:ext cx="5788152" cy="4709160"/>
           </a:xfrm>
           <a:prstGeom prst="rect">
             <a:avLst/>
@@ -6326,14 +6374,14 @@
       </p:sp>
       <p:sp>
         <p:nvSpPr>
-          <p:cNvPr id="52" name="TextBox 51"/>
+          <p:cNvPr id="51" name="TextBox 50"/>
           <p:cNvSpPr txBox="1"/>
           <p:nvPr/>
         </p:nvSpPr>
         <p:spPr>
           <a:xfrm>
-            <a:off x="2889504" y="1810512"/>
-            <a:ext cx="5303520" cy="256032"/>
+            <a:off x="2898648" y="1746504"/>
+            <a:ext cx="5394960" cy="237744"/>
           </a:xfrm>
           <a:prstGeom prst="rect">
             <a:avLst/>
@@ -6348,6 +6396,42 @@
           <a:p>
             <a:pPr algn="l"/>
             <a:r>
+              <a:rPr sz="1300" b="1">
+                <a:solidFill>
+                  <a:srgbClr val="0F2F63"/>
+                </a:solidFill>
+                <a:latin typeface="Calibri"/>
+                <a:ea typeface="Calibri"/>
+              </a:rPr>
+              <a:t>Засаг даргын Тамгын газар</a:t>
+            </a:r>
+          </a:p>
+        </p:txBody>
+      </p:sp>
+      <p:sp>
+        <p:nvSpPr>
+          <p:cNvPr id="52" name="TextBox 51"/>
+          <p:cNvSpPr txBox="1"/>
+          <p:nvPr/>
+        </p:nvSpPr>
+        <p:spPr>
+          <a:xfrm>
+            <a:off x="2898648" y="1984248"/>
+            <a:ext cx="5394960" cy="201168"/>
+          </a:xfrm>
+          <a:prstGeom prst="rect">
+            <a:avLst/>
+          </a:prstGeom>
+          <a:noFill/>
+        </p:spPr>
+        <p:txBody>
+          <a:bodyPr wrap="square">
+            <a:spAutoFit/>
+          </a:bodyPr>
+          <a:lstStyle/>
+          <a:p>
+            <a:pPr algn="l"/>
+            <a:r>
               <a:rPr sz="1100" b="0">
                 <a:solidFill>
                   <a:srgbClr val="64748B"/>
@@ -6355,7 +6439,7 @@
                 <a:latin typeface="Calibri"/>
                 <a:ea typeface="Calibri"/>
               </a:rPr>
-              <a:t>Хэлтэс  ·  Албан хаагчийн товч үзүүлэлт, явц.</a:t>
+              <a:t>Албан хаагчийн товч үзүүлэлт, явц.</a:t>
             </a:r>
           </a:p>
         </p:txBody>
@@ -6368,8 +6452,8 @@
         </p:nvSpPr>
         <p:spPr>
           <a:xfrm>
-            <a:off x="2871216" y="2185416"/>
-            <a:ext cx="1024128" cy="868680"/>
+            <a:off x="2880360" y="2276856"/>
+            <a:ext cx="1042415" cy="841248"/>
           </a:xfrm>
           <a:prstGeom prst="roundRect">
             <a:avLst>
@@ -6415,7 +6499,7 @@
         </p:nvSpPr>
         <p:spPr>
           <a:xfrm>
-            <a:off x="3730752" y="2276856"/>
+            <a:off x="3758183" y="2368296"/>
             <a:ext cx="91440" cy="91440"/>
           </a:xfrm>
           <a:prstGeom prst="roundRect">
@@ -6460,8 +6544,8 @@
         </p:nvSpPr>
         <p:spPr>
           <a:xfrm>
-            <a:off x="2944368" y="2295144"/>
-            <a:ext cx="877824" cy="256032"/>
+            <a:off x="2953512" y="2368296"/>
+            <a:ext cx="896111" cy="219456"/>
           </a:xfrm>
           <a:prstGeom prst="rect">
             <a:avLst/>
@@ -6496,8 +6580,8 @@
         </p:nvSpPr>
         <p:spPr>
           <a:xfrm>
-            <a:off x="2944368" y="2569464"/>
-            <a:ext cx="877824" cy="365760"/>
+            <a:off x="2953512" y="2642616"/>
+            <a:ext cx="896111" cy="365760"/>
           </a:xfrm>
           <a:prstGeom prst="rect">
             <a:avLst/>
@@ -6532,8 +6616,8 @@
         </p:nvSpPr>
         <p:spPr>
           <a:xfrm>
-            <a:off x="3986784" y="2185416"/>
-            <a:ext cx="1024128" cy="868680"/>
+            <a:off x="3995928" y="2276856"/>
+            <a:ext cx="1042415" cy="841248"/>
           </a:xfrm>
           <a:prstGeom prst="roundRect">
             <a:avLst>
@@ -6579,7 +6663,7 @@
         </p:nvSpPr>
         <p:spPr>
           <a:xfrm>
-            <a:off x="4846320" y="2276856"/>
+            <a:off x="4873751" y="2368296"/>
             <a:ext cx="91440" cy="91440"/>
           </a:xfrm>
           <a:prstGeom prst="roundRect">
@@ -6624,8 +6708,8 @@
         </p:nvSpPr>
         <p:spPr>
           <a:xfrm>
-            <a:off x="4059936" y="2295144"/>
-            <a:ext cx="877824" cy="256032"/>
+            <a:off x="4069080" y="2368296"/>
+            <a:ext cx="896111" cy="219456"/>
           </a:xfrm>
           <a:prstGeom prst="rect">
             <a:avLst/>
@@ -6660,8 +6744,8 @@
         </p:nvSpPr>
         <p:spPr>
           <a:xfrm>
-            <a:off x="4059936" y="2569464"/>
-            <a:ext cx="877824" cy="365760"/>
+            <a:off x="4069080" y="2642616"/>
+            <a:ext cx="896111" cy="365760"/>
           </a:xfrm>
           <a:prstGeom prst="rect">
             <a:avLst/>
@@ -6696,8 +6780,8 @@
         </p:nvSpPr>
         <p:spPr>
           <a:xfrm>
-            <a:off x="5102352" y="2185416"/>
-            <a:ext cx="1024128" cy="868680"/>
+            <a:off x="5111496" y="2276856"/>
+            <a:ext cx="1042415" cy="841248"/>
           </a:xfrm>
           <a:prstGeom prst="roundRect">
             <a:avLst>
@@ -6743,7 +6827,7 @@
         </p:nvSpPr>
         <p:spPr>
           <a:xfrm>
-            <a:off x="5961888" y="2276856"/>
+            <a:off x="5989319" y="2368296"/>
             <a:ext cx="91440" cy="91440"/>
           </a:xfrm>
           <a:prstGeom prst="roundRect">
@@ -6788,8 +6872,8 @@
         </p:nvSpPr>
         <p:spPr>
           <a:xfrm>
-            <a:off x="5175504" y="2295144"/>
-            <a:ext cx="877824" cy="256032"/>
+            <a:off x="5184648" y="2368296"/>
+            <a:ext cx="896111" cy="219456"/>
           </a:xfrm>
           <a:prstGeom prst="rect">
             <a:avLst/>
@@ -6824,8 +6908,8 @@
         </p:nvSpPr>
         <p:spPr>
           <a:xfrm>
-            <a:off x="5175504" y="2569464"/>
-            <a:ext cx="877824" cy="365760"/>
+            <a:off x="5184648" y="2642616"/>
+            <a:ext cx="896111" cy="365760"/>
           </a:xfrm>
           <a:prstGeom prst="rect">
             <a:avLst/>
@@ -6860,8 +6944,8 @@
         </p:nvSpPr>
         <p:spPr>
           <a:xfrm>
-            <a:off x="6217920" y="2185416"/>
-            <a:ext cx="1024128" cy="868680"/>
+            <a:off x="6227064" y="2276856"/>
+            <a:ext cx="1042415" cy="841248"/>
           </a:xfrm>
           <a:prstGeom prst="roundRect">
             <a:avLst>
@@ -6907,7 +6991,7 @@
         </p:nvSpPr>
         <p:spPr>
           <a:xfrm>
-            <a:off x="7077456" y="2276856"/>
+            <a:off x="7104887" y="2368296"/>
             <a:ext cx="91440" cy="91440"/>
           </a:xfrm>
           <a:prstGeom prst="roundRect">
@@ -6952,8 +7036,8 @@
         </p:nvSpPr>
         <p:spPr>
           <a:xfrm>
-            <a:off x="6291072" y="2295144"/>
-            <a:ext cx="877824" cy="256032"/>
+            <a:off x="6300216" y="2368296"/>
+            <a:ext cx="896111" cy="219456"/>
           </a:xfrm>
           <a:prstGeom prst="rect">
             <a:avLst/>
@@ -6988,8 +7072,8 @@
         </p:nvSpPr>
         <p:spPr>
           <a:xfrm>
-            <a:off x="6291072" y="2569464"/>
-            <a:ext cx="877824" cy="365760"/>
+            <a:off x="6300216" y="2642616"/>
+            <a:ext cx="896111" cy="365760"/>
           </a:xfrm>
           <a:prstGeom prst="rect">
             <a:avLst/>
@@ -7024,8 +7108,8 @@
         </p:nvSpPr>
         <p:spPr>
           <a:xfrm>
-            <a:off x="7333488" y="2185416"/>
-            <a:ext cx="1024128" cy="868680"/>
+            <a:off x="7342632" y="2276856"/>
+            <a:ext cx="1042415" cy="841248"/>
           </a:xfrm>
           <a:prstGeom prst="roundRect">
             <a:avLst>
@@ -7071,7 +7155,7 @@
         </p:nvSpPr>
         <p:spPr>
           <a:xfrm>
-            <a:off x="8193024" y="2276856"/>
+            <a:off x="8220455" y="2368296"/>
             <a:ext cx="91440" cy="91440"/>
           </a:xfrm>
           <a:prstGeom prst="roundRect">
@@ -7116,8 +7200,8 @@
         </p:nvSpPr>
         <p:spPr>
           <a:xfrm>
-            <a:off x="7406640" y="2295144"/>
-            <a:ext cx="877824" cy="256032"/>
+            <a:off x="7415784" y="2368296"/>
+            <a:ext cx="896111" cy="219456"/>
           </a:xfrm>
           <a:prstGeom prst="rect">
             <a:avLst/>
@@ -7152,8 +7236,8 @@
         </p:nvSpPr>
         <p:spPr>
           <a:xfrm>
-            <a:off x="7406640" y="2569464"/>
-            <a:ext cx="877824" cy="365760"/>
+            <a:off x="7415784" y="2642616"/>
+            <a:ext cx="896111" cy="365760"/>
           </a:xfrm>
           <a:prstGeom prst="rect">
             <a:avLst/>
@@ -7188,8 +7272,8 @@
         </p:nvSpPr>
         <p:spPr>
           <a:xfrm>
-            <a:off x="2871216" y="3236976"/>
-            <a:ext cx="5413247" cy="2606040"/>
+            <a:off x="2880360" y="3264407"/>
+            <a:ext cx="5495544" cy="2834640"/>
           </a:xfrm>
           <a:prstGeom prst="roundRect">
             <a:avLst>
@@ -7235,8 +7319,8 @@
         </p:nvSpPr>
         <p:spPr>
           <a:xfrm>
-            <a:off x="2999232" y="3346704"/>
-            <a:ext cx="5193791" cy="2331720"/>
+            <a:off x="3026664" y="3392424"/>
+            <a:ext cx="5239512" cy="256032"/>
           </a:xfrm>
           <a:prstGeom prst="rect">
             <a:avLst/>
@@ -7251,6 +7335,46 @@
           <a:p>
             <a:pPr algn="l"/>
             <a:r>
+              <a:rPr sz="1300" b="1">
+                <a:solidFill>
+                  <a:srgbClr val="0F2F63"/>
+                </a:solidFill>
+                <a:latin typeface="Calibri"/>
+                <a:ea typeface="Calibri"/>
+              </a:rPr>
+              <a:t>Зүүн цэсээр бүх хуудас руу орно</a:t>
+            </a:r>
+          </a:p>
+        </p:txBody>
+      </p:sp>
+      <p:sp>
+        <p:nvSpPr>
+          <p:cNvPr id="75" name="TextBox 74"/>
+          <p:cNvSpPr txBox="1"/>
+          <p:nvPr/>
+        </p:nvSpPr>
+        <p:spPr>
+          <a:xfrm>
+            <a:off x="3026664" y="3703320"/>
+            <a:ext cx="5239512" cy="2194560"/>
+          </a:xfrm>
+          <a:prstGeom prst="rect">
+            <a:avLst/>
+          </a:prstGeom>
+          <a:noFill/>
+        </p:spPr>
+        <p:txBody>
+          <a:bodyPr wrap="square">
+            <a:spAutoFit/>
+          </a:bodyPr>
+          <a:lstStyle/>
+          <a:p>
+            <a:pPr>
+              <a:spcAft>
+                <a:spcPts val="600"/>
+              </a:spcAft>
+            </a:pPr>
+            <a:r>
               <a:rPr sz="1200" b="0">
                 <a:solidFill>
                   <a:srgbClr val="475569"/>
@@ -7258,23 +7382,89 @@
                 <a:latin typeface="Calibri"/>
                 <a:ea typeface="Calibri"/>
               </a:rPr>
-              <a:t>Ажлын хэсэг — энд хуудасны агуулга орно.
-Зүүн цэсээр бүх модуль руу орно. Цэс эрхээс хамаарна.
-Толгой: хуудасны нэр · QR уншигч · мэдэгдэл · апп суулгах · хэрэглэгч.</a:t>
-            </a:r>
-          </a:p>
-        </p:txBody>
-      </p:sp>
-      <p:sp>
-        <p:nvSpPr>
-          <p:cNvPr id="75" name="Rounded Rectangle 74"/>
+              <a:t>Цэс эрхээс хамаарна — хаасан цэс харагдахгүй.</a:t>
+            </a:r>
+          </a:p>
+          <a:p>
+            <a:pPr>
+              <a:spcAft>
+                <a:spcPts val="600"/>
+              </a:spcAft>
+            </a:pPr>
+            <a:r>
+              <a:rPr sz="1200" b="0">
+                <a:solidFill>
+                  <a:srgbClr val="475569"/>
+                </a:solidFill>
+                <a:latin typeface="Calibri"/>
+                <a:ea typeface="Calibri"/>
+              </a:rPr>
+              <a:t>Толгой: хуудасны нэр · QR уншигч · мэдэгдэл · апп суулгах · хэрэглэгч.</a:t>
+            </a:r>
+          </a:p>
+          <a:p>
+            <a:pPr>
+              <a:spcAft>
+                <a:spcPts val="600"/>
+              </a:spcAft>
+            </a:pPr>
+            <a:r>
+              <a:rPr sz="1200" b="0">
+                <a:solidFill>
+                  <a:srgbClr val="475569"/>
+                </a:solidFill>
+                <a:latin typeface="Calibri"/>
+                <a:ea typeface="Calibri"/>
+              </a:rPr>
+              <a:t>Цэсийг компьютераар хурааж болно.</a:t>
+            </a:r>
+          </a:p>
+          <a:p>
+            <a:pPr>
+              <a:spcAft>
+                <a:spcPts val="600"/>
+              </a:spcAft>
+            </a:pPr>
+            <a:r>
+              <a:rPr sz="1200" b="0">
+                <a:solidFill>
+                  <a:srgbClr val="475569"/>
+                </a:solidFill>
+                <a:latin typeface="Calibri"/>
+                <a:ea typeface="Calibri"/>
+              </a:rPr>
+              <a:t>«Үүрэг даалгавар» — Ажлын удирдлага бүлэгт.</a:t>
+            </a:r>
+          </a:p>
+          <a:p>
+            <a:pPr>
+              <a:spcAft>
+                <a:spcPts val="600"/>
+              </a:spcAft>
+            </a:pPr>
+            <a:r>
+              <a:rPr sz="1200" b="0">
+                <a:solidFill>
+                  <a:srgbClr val="475569"/>
+                </a:solidFill>
+                <a:latin typeface="Calibri"/>
+                <a:ea typeface="Calibri"/>
+              </a:rPr>
+              <a:t>Эхний хуудас — Албан хаагчийн самбар.</a:t>
+            </a:r>
+          </a:p>
+        </p:txBody>
+      </p:sp>
+      <p:sp>
+        <p:nvSpPr>
+          <p:cNvPr id="76" name="Rounded Rectangle 75"/>
           <p:cNvSpPr/>
           <p:nvPr/>
         </p:nvSpPr>
         <p:spPr>
           <a:xfrm>
-            <a:off x="8686800" y="1170432"/>
-            <a:ext cx="3182112" cy="2331720"/>
+            <a:off x="8732520" y="1152144"/>
+            <a:ext cx="3127248" cy="2468880"/>
           </a:xfrm>
           <a:prstGeom prst="roundRect">
             <a:avLst>
@@ -7314,14 +7504,14 @@
       </p:sp>
       <p:sp>
         <p:nvSpPr>
-          <p:cNvPr id="76" name="Rectangle 75"/>
+          <p:cNvPr id="77" name="Rectangle 76"/>
           <p:cNvSpPr/>
           <p:nvPr/>
         </p:nvSpPr>
         <p:spPr>
           <a:xfrm>
-            <a:off x="8686800" y="1170432"/>
-            <a:ext cx="91440" cy="2331720"/>
+            <a:off x="8732520" y="1152144"/>
+            <a:ext cx="91440" cy="2468880"/>
           </a:xfrm>
           <a:prstGeom prst="rect">
             <a:avLst/>
@@ -7357,14 +7547,14 @@
       </p:sp>
       <p:sp>
         <p:nvSpPr>
-          <p:cNvPr id="77" name="TextBox 76"/>
+          <p:cNvPr id="78" name="TextBox 77"/>
           <p:cNvSpPr txBox="1"/>
           <p:nvPr/>
         </p:nvSpPr>
         <p:spPr>
           <a:xfrm>
-            <a:off x="8915400" y="1280160"/>
-            <a:ext cx="2834640" cy="292608"/>
+            <a:off x="8961120" y="1261872"/>
+            <a:ext cx="2743200" cy="274320"/>
           </a:xfrm>
           <a:prstGeom prst="rect">
             <a:avLst/>
@@ -7393,14 +7583,14 @@
       </p:sp>
       <p:sp>
         <p:nvSpPr>
-          <p:cNvPr id="78" name="TextBox 77"/>
+          <p:cNvPr id="79" name="TextBox 78"/>
           <p:cNvSpPr txBox="1"/>
           <p:nvPr/>
         </p:nvSpPr>
         <p:spPr>
           <a:xfrm>
-            <a:off x="8915400" y="1600200"/>
-            <a:ext cx="2834640" cy="1737360"/>
+            <a:off x="8961120" y="1591056"/>
+            <a:ext cx="2743200" cy="1874519"/>
           </a:xfrm>
           <a:prstGeom prst="rect">
             <a:avLst/>
@@ -7419,14 +7609,14 @@
               </a:spcAft>
             </a:pPr>
             <a:r>
-              <a:rPr sz="1100" b="0">
+              <a:rPr sz="1200" b="0">
                 <a:solidFill>
                   <a:srgbClr val="475569"/>
                 </a:solidFill>
                 <a:latin typeface="Calibri"/>
                 <a:ea typeface="Calibri"/>
               </a:rPr>
-              <a:t>Зүүн цэс байнга харагдана (хурааж болно).</a:t>
+              <a:t>Зүүн цэс байнга харагдана.</a:t>
             </a:r>
           </a:p>
           <a:p>
@@ -7436,14 +7626,14 @@
               </a:spcAft>
             </a:pPr>
             <a:r>
-              <a:rPr sz="1100" b="0">
+              <a:rPr sz="1200" b="0">
                 <a:solidFill>
                   <a:srgbClr val="475569"/>
                 </a:solidFill>
                 <a:latin typeface="Calibri"/>
                 <a:ea typeface="Calibri"/>
               </a:rPr>
-              <a:t>Бүлэг: Самбар → Холбосон системүүд → Ажлын удирдлага → Бичиг хэрэг → Хүний нөөц.</a:t>
+              <a:t>Дараалал: Самбар → Холбосон системүүд → Ажлын удирдлага → Бичиг хэрэг → Хүний нөөц.</a:t>
             </a:r>
           </a:p>
           <a:p>
@@ -7453,7 +7643,7 @@
               </a:spcAft>
             </a:pPr>
             <a:r>
-              <a:rPr sz="1100" b="0">
+              <a:rPr sz="1200" b="0">
                 <a:solidFill>
                   <a:srgbClr val="475569"/>
                 </a:solidFill>
@@ -7467,14 +7657,14 @@
       </p:sp>
       <p:sp>
         <p:nvSpPr>
-          <p:cNvPr id="79" name="Rounded Rectangle 78"/>
+          <p:cNvPr id="80" name="Rounded Rectangle 79"/>
           <p:cNvSpPr/>
           <p:nvPr/>
         </p:nvSpPr>
         <p:spPr>
           <a:xfrm>
-            <a:off x="8686800" y="3657600"/>
-            <a:ext cx="3182112" cy="2743200"/>
+            <a:off x="8732520" y="3767328"/>
+            <a:ext cx="3127248" cy="2651760"/>
           </a:xfrm>
           <a:prstGeom prst="roundRect">
             <a:avLst>
@@ -7514,14 +7704,14 @@
       </p:sp>
       <p:sp>
         <p:nvSpPr>
-          <p:cNvPr id="80" name="Rectangle 79"/>
+          <p:cNvPr id="81" name="Rectangle 80"/>
           <p:cNvSpPr/>
           <p:nvPr/>
         </p:nvSpPr>
         <p:spPr>
           <a:xfrm>
-            <a:off x="8686800" y="3657600"/>
-            <a:ext cx="91440" cy="2743200"/>
+            <a:off x="8732520" y="3767328"/>
+            <a:ext cx="91440" cy="2651760"/>
           </a:xfrm>
           <a:prstGeom prst="rect">
             <a:avLst/>
@@ -7557,14 +7747,14 @@
       </p:sp>
       <p:sp>
         <p:nvSpPr>
-          <p:cNvPr id="81" name="TextBox 80"/>
+          <p:cNvPr id="82" name="TextBox 81"/>
           <p:cNvSpPr txBox="1"/>
           <p:nvPr/>
         </p:nvSpPr>
         <p:spPr>
           <a:xfrm>
-            <a:off x="8915400" y="3767328"/>
-            <a:ext cx="2834640" cy="292608"/>
+            <a:off x="8961120" y="3877056"/>
+            <a:ext cx="2743200" cy="274320"/>
           </a:xfrm>
           <a:prstGeom prst="rect">
             <a:avLst/>
@@ -7593,14 +7783,14 @@
       </p:sp>
       <p:sp>
         <p:nvSpPr>
-          <p:cNvPr id="82" name="TextBox 81"/>
+          <p:cNvPr id="83" name="TextBox 82"/>
           <p:cNvSpPr txBox="1"/>
           <p:nvPr/>
         </p:nvSpPr>
         <p:spPr>
           <a:xfrm>
-            <a:off x="8915400" y="4096512"/>
-            <a:ext cx="2834640" cy="2148840"/>
+            <a:off x="8961120" y="4187952"/>
+            <a:ext cx="2743200" cy="2057400"/>
           </a:xfrm>
           <a:prstGeom prst="rect">
             <a:avLst/>
@@ -7619,7 +7809,7 @@
               </a:spcAft>
             </a:pPr>
             <a:r>
-              <a:rPr sz="1100" b="0">
+              <a:rPr sz="1200" b="0">
                 <a:solidFill>
                   <a:srgbClr val="475569"/>
                 </a:solidFill>
@@ -7636,14 +7826,14 @@
               </a:spcAft>
             </a:pPr>
             <a:r>
-              <a:rPr sz="1100" b="0">
+              <a:rPr sz="1200" b="0">
                 <a:solidFill>
                   <a:srgbClr val="475569"/>
                 </a:solidFill>
                 <a:latin typeface="Calibri"/>
                 <a:ea typeface="Calibri"/>
               </a:rPr>
-              <a:t>Chrome/Android: апп болгон суулгана.</a:t>
+              <a:t>Android: Chrome → апп болгон суулгана.</a:t>
             </a:r>
           </a:p>
           <a:p>
@@ -7653,7 +7843,7 @@
               </a:spcAft>
             </a:pPr>
             <a:r>
-              <a:rPr sz="1100" b="0">
+              <a:rPr sz="1200" b="0">
                 <a:solidFill>
                   <a:srgbClr val="475569"/>
                 </a:solidFill>
@@ -7670,7 +7860,7 @@
               </a:spcAft>
             </a:pPr>
             <a:r>
-              <a:rPr sz="1100" b="0">
+              <a:rPr sz="1200" b="0">
                 <a:solidFill>
                   <a:srgbClr val="475569"/>
                 </a:solidFill>
@@ -7684,7 +7874,7 @@
       </p:sp>
       <p:sp>
         <p:nvSpPr>
-          <p:cNvPr id="83" name="Rectangle 82"/>
+          <p:cNvPr id="84" name="Rectangle 83"/>
           <p:cNvSpPr/>
           <p:nvPr/>
         </p:nvSpPr>
@@ -7727,7 +7917,7 @@
       </p:sp>
       <p:sp>
         <p:nvSpPr>
-          <p:cNvPr id="84" name="TextBox 83"/>
+          <p:cNvPr id="85" name="TextBox 84"/>
           <p:cNvSpPr txBox="1"/>
           <p:nvPr/>
         </p:nvSpPr>
@@ -7763,7 +7953,7 @@
       </p:sp>
       <p:sp>
         <p:nvSpPr>
-          <p:cNvPr id="85" name="TextBox 84"/>
+          <p:cNvPr id="86" name="TextBox 85"/>
           <p:cNvSpPr txBox="1"/>
           <p:nvPr/>
         </p:nvSpPr>
@@ -8011,7 +8201,7 @@
                 <a:latin typeface="Calibri"/>
                 <a:ea typeface="Calibri"/>
               </a:rPr>
-              <a:t>Нэвтэрсний дараах эхний хуудас  ·  хэлтсийн товч үзүүлэлт</a:t>
+              <a:t>Нэвтэрсний дараах эхний хуудас  ·  зүүн цэс: Самбар → Албан хаагчийн самбар</a:t>
             </a:r>
           </a:p>
         </p:txBody>
@@ -8024,8 +8214,8 @@
         </p:nvSpPr>
         <p:spPr>
           <a:xfrm>
-            <a:off x="365760" y="1207008"/>
-            <a:ext cx="2212848" cy="1261872"/>
+            <a:off x="365760" y="1170432"/>
+            <a:ext cx="2212848" cy="1207008"/>
           </a:xfrm>
           <a:prstGeom prst="roundRect">
             <a:avLst>
@@ -8071,7 +8261,7 @@
         </p:nvSpPr>
         <p:spPr>
           <a:xfrm>
-            <a:off x="2322576" y="1353312"/>
+            <a:off x="2322576" y="1298448"/>
             <a:ext cx="128016" cy="128016"/>
           </a:xfrm>
           <a:prstGeom prst="roundRect">
@@ -8116,8 +8306,8 @@
         </p:nvSpPr>
         <p:spPr>
           <a:xfrm>
-            <a:off x="493776" y="1316736"/>
-            <a:ext cx="1828800" cy="384048"/>
+            <a:off x="475488" y="1261872"/>
+            <a:ext cx="1847088" cy="365760"/>
           </a:xfrm>
           <a:prstGeom prst="rect">
             <a:avLst/>
@@ -8152,8 +8342,8 @@
         </p:nvSpPr>
         <p:spPr>
           <a:xfrm>
-            <a:off x="493776" y="1682496"/>
-            <a:ext cx="1956816" cy="384048"/>
+            <a:off x="475488" y="1627632"/>
+            <a:ext cx="1993392" cy="365760"/>
           </a:xfrm>
           <a:prstGeom prst="rect">
             <a:avLst/>
@@ -8188,8 +8378,8 @@
         </p:nvSpPr>
         <p:spPr>
           <a:xfrm>
-            <a:off x="493776" y="2103120"/>
-            <a:ext cx="1956816" cy="256032"/>
+            <a:off x="475488" y="2048256"/>
+            <a:ext cx="1993392" cy="237744"/>
           </a:xfrm>
           <a:prstGeom prst="rect">
             <a:avLst/>
@@ -8224,8 +8414,8 @@
         </p:nvSpPr>
         <p:spPr>
           <a:xfrm>
-            <a:off x="2706624" y="1207008"/>
-            <a:ext cx="2212848" cy="1261872"/>
+            <a:off x="2706624" y="1170432"/>
+            <a:ext cx="2212848" cy="1207008"/>
           </a:xfrm>
           <a:prstGeom prst="roundRect">
             <a:avLst>
@@ -8271,7 +8461,7 @@
         </p:nvSpPr>
         <p:spPr>
           <a:xfrm>
-            <a:off x="4663440" y="1353312"/>
+            <a:off x="4663440" y="1298448"/>
             <a:ext cx="128016" cy="128016"/>
           </a:xfrm>
           <a:prstGeom prst="roundRect">
@@ -8316,8 +8506,8 @@
         </p:nvSpPr>
         <p:spPr>
           <a:xfrm>
-            <a:off x="2834640" y="1316736"/>
-            <a:ext cx="1828800" cy="384048"/>
+            <a:off x="2816352" y="1261872"/>
+            <a:ext cx="1847088" cy="365760"/>
           </a:xfrm>
           <a:prstGeom prst="rect">
             <a:avLst/>
@@ -8352,8 +8542,8 @@
         </p:nvSpPr>
         <p:spPr>
           <a:xfrm>
-            <a:off x="2834640" y="1682496"/>
-            <a:ext cx="1956816" cy="384048"/>
+            <a:off x="2816352" y="1627632"/>
+            <a:ext cx="1993392" cy="365760"/>
           </a:xfrm>
           <a:prstGeom prst="rect">
             <a:avLst/>
@@ -8388,8 +8578,8 @@
         </p:nvSpPr>
         <p:spPr>
           <a:xfrm>
-            <a:off x="2834640" y="2103120"/>
-            <a:ext cx="1956816" cy="256032"/>
+            <a:off x="2816352" y="2048256"/>
+            <a:ext cx="1993392" cy="237744"/>
           </a:xfrm>
           <a:prstGeom prst="rect">
             <a:avLst/>
@@ -8424,8 +8614,8 @@
         </p:nvSpPr>
         <p:spPr>
           <a:xfrm>
-            <a:off x="5047488" y="1207008"/>
-            <a:ext cx="2212848" cy="1261872"/>
+            <a:off x="5047488" y="1170432"/>
+            <a:ext cx="2212848" cy="1207008"/>
           </a:xfrm>
           <a:prstGeom prst="roundRect">
             <a:avLst>
@@ -8471,7 +8661,7 @@
         </p:nvSpPr>
         <p:spPr>
           <a:xfrm>
-            <a:off x="7004304" y="1353312"/>
+            <a:off x="7004304" y="1298448"/>
             <a:ext cx="128016" cy="128016"/>
           </a:xfrm>
           <a:prstGeom prst="roundRect">
@@ -8516,8 +8706,8 @@
         </p:nvSpPr>
         <p:spPr>
           <a:xfrm>
-            <a:off x="5175504" y="1316736"/>
-            <a:ext cx="1828800" cy="384048"/>
+            <a:off x="5157216" y="1261872"/>
+            <a:ext cx="1847088" cy="365760"/>
           </a:xfrm>
           <a:prstGeom prst="rect">
             <a:avLst/>
@@ -8552,8 +8742,8 @@
         </p:nvSpPr>
         <p:spPr>
           <a:xfrm>
-            <a:off x="5175504" y="1682496"/>
-            <a:ext cx="1956816" cy="384048"/>
+            <a:off x="5157216" y="1627632"/>
+            <a:ext cx="1993392" cy="365760"/>
           </a:xfrm>
           <a:prstGeom prst="rect">
             <a:avLst/>
@@ -8588,8 +8778,8 @@
         </p:nvSpPr>
         <p:spPr>
           <a:xfrm>
-            <a:off x="5175504" y="2103120"/>
-            <a:ext cx="1956816" cy="256032"/>
+            <a:off x="5157216" y="2048256"/>
+            <a:ext cx="1993392" cy="237744"/>
           </a:xfrm>
           <a:prstGeom prst="rect">
             <a:avLst/>
@@ -8624,8 +8814,8 @@
         </p:nvSpPr>
         <p:spPr>
           <a:xfrm>
-            <a:off x="7388352" y="1207008"/>
-            <a:ext cx="2212848" cy="1261872"/>
+            <a:off x="7388352" y="1170432"/>
+            <a:ext cx="2212848" cy="1207008"/>
           </a:xfrm>
           <a:prstGeom prst="roundRect">
             <a:avLst>
@@ -8671,7 +8861,7 @@
         </p:nvSpPr>
         <p:spPr>
           <a:xfrm>
-            <a:off x="9345168" y="1353312"/>
+            <a:off x="9345168" y="1298448"/>
             <a:ext cx="128016" cy="128016"/>
           </a:xfrm>
           <a:prstGeom prst="roundRect">
@@ -8716,8 +8906,8 @@
         </p:nvSpPr>
         <p:spPr>
           <a:xfrm>
-            <a:off x="7516368" y="1316736"/>
-            <a:ext cx="1828800" cy="384048"/>
+            <a:off x="7498080" y="1261872"/>
+            <a:ext cx="1847088" cy="365760"/>
           </a:xfrm>
           <a:prstGeom prst="rect">
             <a:avLst/>
@@ -8752,8 +8942,8 @@
         </p:nvSpPr>
         <p:spPr>
           <a:xfrm>
-            <a:off x="7516368" y="1682496"/>
-            <a:ext cx="1956816" cy="384048"/>
+            <a:off x="7498080" y="1627632"/>
+            <a:ext cx="1993392" cy="365760"/>
           </a:xfrm>
           <a:prstGeom prst="rect">
             <a:avLst/>
@@ -8788,8 +8978,8 @@
         </p:nvSpPr>
         <p:spPr>
           <a:xfrm>
-            <a:off x="7516368" y="2103120"/>
-            <a:ext cx="1956816" cy="256032"/>
+            <a:off x="7498080" y="2048256"/>
+            <a:ext cx="1993392" cy="237744"/>
           </a:xfrm>
           <a:prstGeom prst="rect">
             <a:avLst/>
@@ -8824,8 +9014,8 @@
         </p:nvSpPr>
         <p:spPr>
           <a:xfrm>
-            <a:off x="9729216" y="1207008"/>
-            <a:ext cx="2212848" cy="1261872"/>
+            <a:off x="9729216" y="1170432"/>
+            <a:ext cx="2212848" cy="1207008"/>
           </a:xfrm>
           <a:prstGeom prst="roundRect">
             <a:avLst>
@@ -8871,7 +9061,7 @@
         </p:nvSpPr>
         <p:spPr>
           <a:xfrm>
-            <a:off x="11686032" y="1353312"/>
+            <a:off x="11686032" y="1298448"/>
             <a:ext cx="128016" cy="128016"/>
           </a:xfrm>
           <a:prstGeom prst="roundRect">
@@ -8916,8 +9106,8 @@
         </p:nvSpPr>
         <p:spPr>
           <a:xfrm>
-            <a:off x="9857232" y="1316736"/>
-            <a:ext cx="1828800" cy="384048"/>
+            <a:off x="9838944" y="1261872"/>
+            <a:ext cx="1847088" cy="365760"/>
           </a:xfrm>
           <a:prstGeom prst="rect">
             <a:avLst/>
@@ -8952,8 +9142,8 @@
         </p:nvSpPr>
         <p:spPr>
           <a:xfrm>
-            <a:off x="9857232" y="1682496"/>
-            <a:ext cx="1956816" cy="384048"/>
+            <a:off x="9838944" y="1627632"/>
+            <a:ext cx="1993392" cy="365760"/>
           </a:xfrm>
           <a:prstGeom prst="rect">
             <a:avLst/>
@@ -8982,50 +9172,14 @@
       </p:sp>
       <p:sp>
         <p:nvSpPr>
-          <p:cNvPr id="31" name="TextBox 30"/>
-          <p:cNvSpPr txBox="1"/>
-          <p:nvPr/>
-        </p:nvSpPr>
-        <p:spPr>
-          <a:xfrm>
-            <a:off x="9857232" y="2103120"/>
-            <a:ext cx="1956816" cy="256032"/>
-          </a:xfrm>
-          <a:prstGeom prst="rect">
-            <a:avLst/>
-          </a:prstGeom>
-          <a:noFill/>
-        </p:spPr>
-        <p:txBody>
-          <a:bodyPr wrap="square">
-            <a:spAutoFit/>
-          </a:bodyPr>
-          <a:lstStyle/>
-          <a:p>
-            <a:pPr algn="l"/>
-            <a:r>
-              <a:rPr sz="1000" b="0">
-                <a:solidFill>
-                  <a:srgbClr val="334155"/>
-                </a:solidFill>
-                <a:latin typeface="Calibri"/>
-                <a:ea typeface="Calibri"/>
-              </a:rPr>
-              <a:t>Зөвхөн харуулна</a:t>
-            </a:r>
-          </a:p>
-        </p:txBody>
-      </p:sp>
-      <p:sp>
-        <p:nvSpPr>
-          <p:cNvPr id="32" name="Rounded Rectangle 31"/>
+          <p:cNvPr id="31" name="Rounded Rectangle 30"/>
           <p:cNvSpPr/>
           <p:nvPr/>
         </p:nvSpPr>
         <p:spPr>
           <a:xfrm>
-            <a:off x="365760" y="2633472"/>
-            <a:ext cx="7635240" cy="3767328"/>
+            <a:off x="365760" y="2542032"/>
+            <a:ext cx="7680960" cy="3858768"/>
           </a:xfrm>
           <a:prstGeom prst="roundRect">
             <a:avLst>
@@ -9065,14 +9219,14 @@
       </p:sp>
       <p:sp>
         <p:nvSpPr>
-          <p:cNvPr id="33" name="TextBox 32"/>
+          <p:cNvPr id="32" name="TextBox 31"/>
           <p:cNvSpPr txBox="1"/>
           <p:nvPr/>
         </p:nvSpPr>
         <p:spPr>
           <a:xfrm>
-            <a:off x="548640" y="2761488"/>
-            <a:ext cx="5303520" cy="292608"/>
+            <a:off x="530352" y="2651760"/>
+            <a:ext cx="5669280" cy="292608"/>
           </a:xfrm>
           <a:prstGeom prst="rect">
             <a:avLst/>
@@ -9101,14 +9255,14 @@
       </p:sp>
       <p:sp>
         <p:nvSpPr>
-          <p:cNvPr id="34" name="TextBox 33"/>
+          <p:cNvPr id="33" name="TextBox 32"/>
           <p:cNvSpPr txBox="1"/>
           <p:nvPr/>
         </p:nvSpPr>
         <p:spPr>
           <a:xfrm>
-            <a:off x="6720840" y="2779776"/>
-            <a:ext cx="1051560" cy="274320"/>
+            <a:off x="6537960" y="2670048"/>
+            <a:ext cx="1280160" cy="274320"/>
           </a:xfrm>
           <a:prstGeom prst="rect">
             <a:avLst/>
@@ -9130,21 +9284,21 @@
                 <a:latin typeface="Calibri"/>
                 <a:ea typeface="Calibri"/>
               </a:rPr>
-              <a:t>Бүгд →</a:t>
-            </a:r>
-          </a:p>
-        </p:txBody>
-      </p:sp>
-      <p:sp>
-        <p:nvSpPr>
-          <p:cNvPr id="35" name="Rectangle 34"/>
+              <a:t>Бүгд</a:t>
+            </a:r>
+          </a:p>
+        </p:txBody>
+      </p:sp>
+      <p:sp>
+        <p:nvSpPr>
+          <p:cNvPr id="34" name="Rectangle 33"/>
           <p:cNvSpPr/>
           <p:nvPr/>
         </p:nvSpPr>
         <p:spPr>
           <a:xfrm>
-            <a:off x="548640" y="3657600"/>
-            <a:ext cx="7269480" cy="10972"/>
+            <a:off x="530352" y="3529584"/>
+            <a:ext cx="7351775" cy="9144"/>
           </a:xfrm>
           <a:prstGeom prst="rect">
             <a:avLst/>
@@ -9180,14 +9334,14 @@
       </p:sp>
       <p:sp>
         <p:nvSpPr>
-          <p:cNvPr id="36" name="TextBox 35"/>
+          <p:cNvPr id="35" name="TextBox 34"/>
           <p:cNvSpPr txBox="1"/>
           <p:nvPr/>
         </p:nvSpPr>
         <p:spPr>
           <a:xfrm>
-            <a:off x="548640" y="3182112"/>
-            <a:ext cx="4937760" cy="292608"/>
+            <a:off x="530352" y="3072384"/>
+            <a:ext cx="5029200" cy="274320"/>
           </a:xfrm>
           <a:prstGeom prst="rect">
             <a:avLst/>
@@ -9216,14 +9370,14 @@
       </p:sp>
       <p:sp>
         <p:nvSpPr>
-          <p:cNvPr id="37" name="TextBox 36"/>
+          <p:cNvPr id="36" name="TextBox 35"/>
           <p:cNvSpPr txBox="1"/>
           <p:nvPr/>
         </p:nvSpPr>
         <p:spPr>
           <a:xfrm>
-            <a:off x="5577840" y="3182112"/>
-            <a:ext cx="2194560" cy="292608"/>
+            <a:off x="5669280" y="3072384"/>
+            <a:ext cx="2194560" cy="274320"/>
           </a:xfrm>
           <a:prstGeom prst="rect">
             <a:avLst/>
@@ -9252,14 +9406,14 @@
       </p:sp>
       <p:sp>
         <p:nvSpPr>
-          <p:cNvPr id="38" name="Rectangle 37"/>
+          <p:cNvPr id="37" name="Rectangle 36"/>
           <p:cNvSpPr/>
           <p:nvPr/>
         </p:nvSpPr>
         <p:spPr>
           <a:xfrm>
-            <a:off x="548640" y="4187952"/>
-            <a:ext cx="7269480" cy="10972"/>
+            <a:off x="530352" y="4041648"/>
+            <a:ext cx="7351775" cy="9144"/>
           </a:xfrm>
           <a:prstGeom prst="rect">
             <a:avLst/>
@@ -9295,14 +9449,14 @@
       </p:sp>
       <p:sp>
         <p:nvSpPr>
-          <p:cNvPr id="39" name="TextBox 38"/>
+          <p:cNvPr id="38" name="TextBox 37"/>
           <p:cNvSpPr txBox="1"/>
           <p:nvPr/>
         </p:nvSpPr>
         <p:spPr>
           <a:xfrm>
-            <a:off x="548640" y="3712464"/>
-            <a:ext cx="4937760" cy="292608"/>
+            <a:off x="530352" y="3584448"/>
+            <a:ext cx="5029200" cy="274320"/>
           </a:xfrm>
           <a:prstGeom prst="rect">
             <a:avLst/>
@@ -9331,14 +9485,14 @@
       </p:sp>
       <p:sp>
         <p:nvSpPr>
-          <p:cNvPr id="40" name="TextBox 39"/>
+          <p:cNvPr id="39" name="TextBox 38"/>
           <p:cNvSpPr txBox="1"/>
           <p:nvPr/>
         </p:nvSpPr>
         <p:spPr>
           <a:xfrm>
-            <a:off x="5577840" y="3712464"/>
-            <a:ext cx="2194560" cy="292608"/>
+            <a:off x="5669280" y="3584448"/>
+            <a:ext cx="2194560" cy="274320"/>
           </a:xfrm>
           <a:prstGeom prst="rect">
             <a:avLst/>
@@ -9367,14 +9521,14 @@
       </p:sp>
       <p:sp>
         <p:nvSpPr>
-          <p:cNvPr id="41" name="Rectangle 40"/>
+          <p:cNvPr id="40" name="Rectangle 39"/>
           <p:cNvSpPr/>
           <p:nvPr/>
         </p:nvSpPr>
         <p:spPr>
           <a:xfrm>
-            <a:off x="548640" y="4718304"/>
-            <a:ext cx="7269480" cy="10972"/>
+            <a:off x="530352" y="4553712"/>
+            <a:ext cx="7351775" cy="9144"/>
           </a:xfrm>
           <a:prstGeom prst="rect">
             <a:avLst/>
@@ -9410,14 +9564,14 @@
       </p:sp>
       <p:sp>
         <p:nvSpPr>
-          <p:cNvPr id="42" name="TextBox 41"/>
+          <p:cNvPr id="41" name="TextBox 40"/>
           <p:cNvSpPr txBox="1"/>
           <p:nvPr/>
         </p:nvSpPr>
         <p:spPr>
           <a:xfrm>
-            <a:off x="548640" y="4242816"/>
-            <a:ext cx="4937760" cy="292608"/>
+            <a:off x="530352" y="4096512"/>
+            <a:ext cx="5029200" cy="274320"/>
           </a:xfrm>
           <a:prstGeom prst="rect">
             <a:avLst/>
@@ -9446,14 +9600,14 @@
       </p:sp>
       <p:sp>
         <p:nvSpPr>
-          <p:cNvPr id="43" name="TextBox 42"/>
+          <p:cNvPr id="42" name="TextBox 41"/>
           <p:cNvSpPr txBox="1"/>
           <p:nvPr/>
         </p:nvSpPr>
         <p:spPr>
           <a:xfrm>
-            <a:off x="5577840" y="4242816"/>
-            <a:ext cx="2194560" cy="292608"/>
+            <a:off x="5669280" y="4096512"/>
+            <a:ext cx="2194560" cy="274320"/>
           </a:xfrm>
           <a:prstGeom prst="rect">
             <a:avLst/>
@@ -9482,14 +9636,61 @@
       </p:sp>
       <p:sp>
         <p:nvSpPr>
+          <p:cNvPr id="43" name="Rounded Rectangle 42"/>
+          <p:cNvSpPr/>
+          <p:nvPr/>
+        </p:nvSpPr>
+        <p:spPr>
+          <a:xfrm>
+            <a:off x="530352" y="4754880"/>
+            <a:ext cx="7351775" cy="1444752"/>
+          </a:xfrm>
+          <a:prstGeom prst="roundRect">
+            <a:avLst>
+              <a:gd name="adj" fmla="val 6000"/>
+            </a:avLst>
+          </a:prstGeom>
+          <a:solidFill>
+            <a:srgbClr val="F8FAFC"/>
+          </a:solidFill>
+          <a:ln w="11430">
+            <a:solidFill>
+              <a:srgbClr val="E2E8F0"/>
+            </a:solidFill>
+          </a:ln>
+        </p:spPr>
+        <p:style>
+          <a:lnRef idx="1">
+            <a:schemeClr val="accent1"/>
+          </a:lnRef>
+          <a:fillRef idx="3">
+            <a:schemeClr val="accent1"/>
+          </a:fillRef>
+          <a:effectRef idx="2">
+            <a:schemeClr val="accent1"/>
+          </a:effectRef>
+          <a:fontRef idx="minor">
+            <a:schemeClr val="lt1"/>
+          </a:fontRef>
+        </p:style>
+        <p:txBody>
+          <a:bodyPr rtlCol="0" anchor="ctr"/>
+          <a:lstStyle/>
+          <a:p>
+            <a:pPr algn="ctr"/>
+          </a:p>
+        </p:txBody>
+      </p:sp>
+      <p:sp>
+        <p:nvSpPr>
           <p:cNvPr id="44" name="TextBox 43"/>
           <p:cNvSpPr txBox="1"/>
           <p:nvPr/>
         </p:nvSpPr>
         <p:spPr>
           <a:xfrm>
-            <a:off x="548640" y="5029200"/>
-            <a:ext cx="7269480" cy="1097280"/>
+            <a:off x="676656" y="4864608"/>
+            <a:ext cx="7059168" cy="1243584"/>
           </a:xfrm>
           <a:prstGeom prst="rect">
             <a:avLst/>
@@ -9502,7 +9703,11 @@
           </a:bodyPr>
           <a:lstStyle/>
           <a:p>
-            <a:pPr algn="l"/>
+            <a:pPr>
+              <a:spcAft>
+                <a:spcPts val="400"/>
+              </a:spcAft>
+            </a:pPr>
             <a:r>
               <a:rPr sz="1300" b="0">
                 <a:solidFill>
@@ -9511,8 +9716,58 @@
                 <a:latin typeface="Calibri"/>
                 <a:ea typeface="Calibri"/>
               </a:rPr>
-              <a:t>Карт дээр дарахад доор сүүлийн бүртгэл нээгдэнэ. «Бүгд» дарвал тухайн бүртгэлийн хуудас руу орно.
-Дахин дарахад хаагдана. Үүргийн дундаж карт нээгдэхгүй — зөвхөн хувь харуулна.</a:t>
+              <a:t>1.  Карт дээр дарна → доор сүүлийн бүртгэл нээгдэнэ.</a:t>
+            </a:r>
+          </a:p>
+          <a:p>
+            <a:pPr>
+              <a:spcAft>
+                <a:spcPts val="400"/>
+              </a:spcAft>
+            </a:pPr>
+            <a:r>
+              <a:rPr sz="1300" b="0">
+                <a:solidFill>
+                  <a:srgbClr val="475569"/>
+                </a:solidFill>
+                <a:latin typeface="Calibri"/>
+                <a:ea typeface="Calibri"/>
+              </a:rPr>
+              <a:t>2.  «Бүгд» → тухайн бүртгэлийн хуудас руу орно.</a:t>
+            </a:r>
+          </a:p>
+          <a:p>
+            <a:pPr>
+              <a:spcAft>
+                <a:spcPts val="400"/>
+              </a:spcAft>
+            </a:pPr>
+            <a:r>
+              <a:rPr sz="1300" b="0">
+                <a:solidFill>
+                  <a:srgbClr val="475569"/>
+                </a:solidFill>
+                <a:latin typeface="Calibri"/>
+                <a:ea typeface="Calibri"/>
+              </a:rPr>
+              <a:t>3.  Дахин дарахад самбар хаагдана.</a:t>
+            </a:r>
+          </a:p>
+          <a:p>
+            <a:pPr>
+              <a:spcAft>
+                <a:spcPts val="400"/>
+              </a:spcAft>
+            </a:pPr>
+            <a:r>
+              <a:rPr sz="1300" b="0">
+                <a:solidFill>
+                  <a:srgbClr val="475569"/>
+                </a:solidFill>
+                <a:latin typeface="Calibri"/>
+                <a:ea typeface="Calibri"/>
+              </a:rPr>
+              <a:t>4.  Үүргийн дундаж нээгдэхгүй — зөвхөн хувь харуулна.</a:t>
             </a:r>
           </a:p>
         </p:txBody>
@@ -9525,8 +9780,8 @@
         </p:nvSpPr>
         <p:spPr>
           <a:xfrm>
-            <a:off x="8183879" y="2633472"/>
-            <a:ext cx="3639312" cy="3767328"/>
+            <a:off x="8211312" y="2542032"/>
+            <a:ext cx="3611880" cy="3858768"/>
           </a:xfrm>
           <a:prstGeom prst="roundRect">
             <a:avLst>
@@ -9572,8 +9827,8 @@
         </p:nvSpPr>
         <p:spPr>
           <a:xfrm>
-            <a:off x="8183879" y="2633472"/>
-            <a:ext cx="91440" cy="3767328"/>
+            <a:off x="8211312" y="2542032"/>
+            <a:ext cx="91440" cy="3858768"/>
           </a:xfrm>
           <a:prstGeom prst="rect">
             <a:avLst/>
@@ -9615,7 +9870,7 @@
         </p:nvSpPr>
         <p:spPr>
           <a:xfrm>
-            <a:off x="8430768" y="2779776"/>
+            <a:off x="8449056" y="2688336"/>
             <a:ext cx="3200400" cy="292608"/>
           </a:xfrm>
           <a:prstGeom prst="rect">
@@ -9638,7 +9893,7 @@
                 <a:latin typeface="Calibri"/>
                 <a:ea typeface="Calibri"/>
               </a:rPr>
-              <a:t>Юу харна вэ</a:t>
+              <a:t>Таван карт</a:t>
             </a:r>
           </a:p>
         </p:txBody>
@@ -9651,8 +9906,8 @@
         </p:nvSpPr>
         <p:spPr>
           <a:xfrm>
-            <a:off x="8430768" y="3127248"/>
-            <a:ext cx="3200400" cy="3063240"/>
+            <a:off x="8449056" y="3072384"/>
+            <a:ext cx="3200400" cy="3108960"/>
           </a:xfrm>
           <a:prstGeom prst="rect">
             <a:avLst/>
@@ -9671,14 +9926,14 @@
               </a:spcAft>
             </a:pPr>
             <a:r>
-              <a:rPr sz="1200" b="0">
+              <a:rPr sz="1300" b="0">
                 <a:solidFill>
                   <a:srgbClr val="475569"/>
                 </a:solidFill>
                 <a:latin typeface="Calibri"/>
                 <a:ea typeface="Calibri"/>
               </a:rPr>
-              <a:t>1.  Чөлөө — хүлээгдэж буй тоо.</a:t>
+              <a:t>Чөлөө — хүлээгдэж буй тоо.</a:t>
             </a:r>
           </a:p>
           <a:p>
@@ -9688,14 +9943,14 @@
               </a:spcAft>
             </a:pPr>
             <a:r>
-              <a:rPr sz="1200" b="0">
+              <a:rPr sz="1300" b="0">
                 <a:solidFill>
                   <a:srgbClr val="475569"/>
                 </a:solidFill>
                 <a:latin typeface="Calibri"/>
                 <a:ea typeface="Calibri"/>
               </a:rPr>
-              <a:t>2.  Томилолт — идэвхтэй явц.</a:t>
+              <a:t>Томилолт — идэвхтэй явц.</a:t>
             </a:r>
           </a:p>
           <a:p>
@@ -9705,14 +9960,14 @@
               </a:spcAft>
             </a:pPr>
             <a:r>
-              <a:rPr sz="1200" b="0">
+              <a:rPr sz="1300" b="0">
                 <a:solidFill>
                   <a:srgbClr val="475569"/>
                 </a:solidFill>
                 <a:latin typeface="Calibri"/>
                 <a:ea typeface="Calibri"/>
               </a:rPr>
-              <a:t>3.  Төлөвлөгөө — нээлттэй төлөвлөгөө.</a:t>
+              <a:t>Төлөвлөгөө — нээлттэй төлөвлөгөө.</a:t>
             </a:r>
           </a:p>
           <a:p>
@@ -9722,14 +9977,14 @@
               </a:spcAft>
             </a:pPr>
             <a:r>
-              <a:rPr sz="1200" b="0">
+              <a:rPr sz="1300" b="0">
                 <a:solidFill>
                   <a:srgbClr val="475569"/>
                 </a:solidFill>
                 <a:latin typeface="Calibri"/>
                 <a:ea typeface="Calibri"/>
               </a:rPr>
-              <a:t>4.  Ажлын хэсэг — багийн тоо, явц %.</a:t>
+              <a:t>Ажлын хэсэг — багийн тоо.</a:t>
             </a:r>
           </a:p>
           <a:p>
@@ -9739,14 +9994,14 @@
               </a:spcAft>
             </a:pPr>
             <a:r>
-              <a:rPr sz="1200" b="0">
+              <a:rPr sz="1300" b="0">
                 <a:solidFill>
                   <a:srgbClr val="475569"/>
                 </a:solidFill>
                 <a:latin typeface="Calibri"/>
                 <a:ea typeface="Calibri"/>
               </a:rPr>
-              <a:t>5.  Үүргийн дундаж — бүх үүргийн %.</a:t>
+              <a:t>Үүргийн дундаж — бүх үүргийн %.</a:t>
             </a:r>
           </a:p>
           <a:p>
@@ -9756,7 +10011,7 @@
               </a:spcAft>
             </a:pPr>
             <a:r>
-              <a:rPr sz="1200" b="0">
+              <a:rPr sz="1300" b="0">
                 <a:solidFill>
                   <a:srgbClr val="475569"/>
                 </a:solidFill>
@@ -9773,14 +10028,14 @@
               </a:spcAft>
             </a:pPr>
             <a:r>
-              <a:rPr sz="1200" b="0">
+              <a:rPr sz="1300" b="0">
                 <a:solidFill>
                   <a:srgbClr val="475569"/>
                 </a:solidFill>
                 <a:latin typeface="Calibri"/>
                 <a:ea typeface="Calibri"/>
               </a:rPr>
-              <a:t>Өдөр тутмын тоймоо эндээс авна. Цэс хайх шаардлагагүй.</a:t>
+              <a:t>Өдөр тутмын тоймоо эндээс авна.</a:t>
             </a:r>
           </a:p>
         </p:txBody>
@@ -10114,7 +10369,7 @@
                 <a:latin typeface="Calibri"/>
                 <a:ea typeface="Calibri"/>
               </a:rPr>
-              <a:t>Хүснэгтээр шууд засна  ·  Word оруулах / татах  ·  хэрэгжилтийн %</a:t>
+              <a:t>Зүүн цэс: Ажлын удирдлага → Үүрэг даалгавар   ·   нүд дээр дарж шууд засна</a:t>
             </a:r>
           </a:p>
         </p:txBody>
@@ -10127,8 +10382,8 @@
         </p:nvSpPr>
         <p:spPr>
           <a:xfrm>
-            <a:off x="365760" y="1152144"/>
-            <a:ext cx="1600200" cy="347472"/>
+            <a:off x="365760" y="1133856"/>
+            <a:ext cx="1691640" cy="329184"/>
           </a:xfrm>
           <a:prstGeom prst="roundRect">
             <a:avLst>
@@ -10172,8 +10427,8 @@
         </p:nvSpPr>
         <p:spPr>
           <a:xfrm>
-            <a:off x="365760" y="1188720"/>
-            <a:ext cx="1600200" cy="292608"/>
+            <a:off x="365760" y="1161288"/>
+            <a:ext cx="1691640" cy="274320"/>
           </a:xfrm>
           <a:prstGeom prst="rect">
             <a:avLst/>
@@ -10208,8 +10463,8 @@
         </p:nvSpPr>
         <p:spPr>
           <a:xfrm>
-            <a:off x="2075688" y="1152144"/>
-            <a:ext cx="1600200" cy="347472"/>
+            <a:off x="2148840" y="1133856"/>
+            <a:ext cx="1325880" cy="329184"/>
           </a:xfrm>
           <a:prstGeom prst="roundRect">
             <a:avLst>
@@ -10255,8 +10510,8 @@
         </p:nvSpPr>
         <p:spPr>
           <a:xfrm>
-            <a:off x="2075688" y="1188720"/>
-            <a:ext cx="1600200" cy="292608"/>
+            <a:off x="2148840" y="1161288"/>
+            <a:ext cx="1325880" cy="274320"/>
           </a:xfrm>
           <a:prstGeom prst="rect">
             <a:avLst/>
@@ -10291,8 +10546,8 @@
         </p:nvSpPr>
         <p:spPr>
           <a:xfrm>
-            <a:off x="3785616" y="1152144"/>
-            <a:ext cx="1874519" cy="347472"/>
+            <a:off x="3566160" y="1133856"/>
+            <a:ext cx="2011680" cy="329184"/>
           </a:xfrm>
           <a:prstGeom prst="roundRect">
             <a:avLst>
@@ -10336,8 +10591,8 @@
         </p:nvSpPr>
         <p:spPr>
           <a:xfrm>
-            <a:off x="3785616" y="1188720"/>
-            <a:ext cx="1874519" cy="292608"/>
+            <a:off x="3566160" y="1161288"/>
+            <a:ext cx="2011680" cy="274320"/>
           </a:xfrm>
           <a:prstGeom prst="rect">
             <a:avLst/>
@@ -10372,8 +10627,8 @@
         </p:nvSpPr>
         <p:spPr>
           <a:xfrm>
-            <a:off x="7818120" y="1170432"/>
-            <a:ext cx="4023360" cy="329184"/>
+            <a:off x="7680960" y="1152144"/>
+            <a:ext cx="4114800" cy="292608"/>
           </a:xfrm>
           <a:prstGeom prst="rect">
             <a:avLst/>
@@ -10408,8 +10663,8 @@
         </p:nvSpPr>
         <p:spPr>
           <a:xfrm>
-            <a:off x="365760" y="1627632"/>
-            <a:ext cx="11475720" cy="457200"/>
+            <a:off x="365760" y="1554480"/>
+            <a:ext cx="11475720" cy="420624"/>
           </a:xfrm>
           <a:prstGeom prst="roundRect">
             <a:avLst>
@@ -10455,8 +10710,8 @@
         </p:nvSpPr>
         <p:spPr>
           <a:xfrm>
-            <a:off x="438912" y="1682496"/>
-            <a:ext cx="2148840" cy="347472"/>
+            <a:off x="438912" y="1609344"/>
+            <a:ext cx="2011680" cy="310896"/>
           </a:xfrm>
           <a:prstGeom prst="roundRect">
             <a:avLst>
@@ -10500,8 +10755,8 @@
         </p:nvSpPr>
         <p:spPr>
           <a:xfrm>
-            <a:off x="438912" y="1719072"/>
-            <a:ext cx="2148840" cy="274320"/>
+            <a:off x="438912" y="1645920"/>
+            <a:ext cx="2011680" cy="256032"/>
           </a:xfrm>
           <a:prstGeom prst="rect">
             <a:avLst/>
@@ -10536,8 +10791,8 @@
         </p:nvSpPr>
         <p:spPr>
           <a:xfrm>
-            <a:off x="2697480" y="1719072"/>
-            <a:ext cx="4206240" cy="274320"/>
+            <a:off x="2578608" y="1645920"/>
+            <a:ext cx="4297680" cy="256032"/>
           </a:xfrm>
           <a:prstGeom prst="rect">
             <a:avLst/>
@@ -10572,8 +10827,8 @@
         </p:nvSpPr>
         <p:spPr>
           <a:xfrm>
-            <a:off x="7040880" y="1719072"/>
-            <a:ext cx="2194560" cy="274320"/>
+            <a:off x="7040880" y="1645920"/>
+            <a:ext cx="2194560" cy="256032"/>
           </a:xfrm>
           <a:prstGeom prst="rect">
             <a:avLst/>
@@ -10608,8 +10863,8 @@
         </p:nvSpPr>
         <p:spPr>
           <a:xfrm>
-            <a:off x="365760" y="2194560"/>
-            <a:ext cx="11475720" cy="658368"/>
+            <a:off x="365760" y="2084831"/>
+            <a:ext cx="11475720" cy="640080"/>
           </a:xfrm>
           <a:prstGeom prst="roundRect">
             <a:avLst>
@@ -10649,14 +10904,59 @@
       </p:sp>
       <p:sp>
         <p:nvSpPr>
-          <p:cNvPr id="20" name="TextBox 19"/>
+          <p:cNvPr id="20" name="Rounded Rectangle 19"/>
+          <p:cNvSpPr/>
+          <p:nvPr/>
+        </p:nvSpPr>
+        <p:spPr>
+          <a:xfrm>
+            <a:off x="502920" y="2194560"/>
+            <a:ext cx="402336" cy="402336"/>
+          </a:xfrm>
+          <a:prstGeom prst="roundRect">
+            <a:avLst>
+              <a:gd name="adj" fmla="val 15000"/>
+            </a:avLst>
+          </a:prstGeom>
+          <a:solidFill>
+            <a:srgbClr val="E8EEF6"/>
+          </a:solidFill>
+          <a:ln>
+            <a:noFill/>
+          </a:ln>
+        </p:spPr>
+        <p:style>
+          <a:lnRef idx="1">
+            <a:schemeClr val="accent1"/>
+          </a:lnRef>
+          <a:fillRef idx="3">
+            <a:schemeClr val="accent1"/>
+          </a:fillRef>
+          <a:effectRef idx="2">
+            <a:schemeClr val="accent1"/>
+          </a:effectRef>
+          <a:fontRef idx="minor">
+            <a:schemeClr val="lt1"/>
+          </a:fontRef>
+        </p:style>
+        <p:txBody>
+          <a:bodyPr rtlCol="0" anchor="ctr"/>
+          <a:lstStyle/>
+          <a:p>
+            <a:pPr algn="ctr"/>
+          </a:p>
+        </p:txBody>
+      </p:sp>
+      <p:sp>
+        <p:nvSpPr>
+          <p:cNvPr id="21" name="TextBox 20"/>
           <p:cNvSpPr txBox="1"/>
           <p:nvPr/>
         </p:nvSpPr>
         <p:spPr>
           <a:xfrm>
-            <a:off x="530352" y="2249424"/>
-            <a:ext cx="3291840" cy="237744"/>
+            <a:off x="1005840" y="2139696"/>
+            <a:ext cx="4023360" cy="237744"/>
           </a:xfrm>
           <a:prstGeom prst="rect">
             <a:avLst/>
@@ -10671,7 +10971,7 @@
           <a:p>
             <a:pPr algn="l"/>
             <a:r>
-              <a:rPr sz="1200" b="1">
+              <a:rPr sz="1300" b="1">
                 <a:solidFill>
                   <a:srgbClr val="0F2F63"/>
                 </a:solidFill>
@@ -10685,14 +10985,14 @@
       </p:sp>
       <p:sp>
         <p:nvSpPr>
-          <p:cNvPr id="21" name="TextBox 20"/>
+          <p:cNvPr id="22" name="TextBox 21"/>
           <p:cNvSpPr txBox="1"/>
           <p:nvPr/>
         </p:nvSpPr>
         <p:spPr>
           <a:xfrm>
-            <a:off x="530352" y="2468880"/>
-            <a:ext cx="3291840" cy="256032"/>
+            <a:off x="1005840" y="2359152"/>
+            <a:ext cx="4023360" cy="256032"/>
           </a:xfrm>
           <a:prstGeom prst="rect">
             <a:avLst/>
@@ -10714,21 +11014,21 @@
                 <a:latin typeface="Calibri"/>
                 <a:ea typeface="Calibri"/>
               </a:rPr>
-              <a:t>Нийт  12    Дууссан  5    Эхлээгүй  3</a:t>
-            </a:r>
-          </a:p>
-        </p:txBody>
-      </p:sp>
-      <p:sp>
-        <p:nvSpPr>
-          <p:cNvPr id="22" name="TextBox 21"/>
+              <a:t>Дарж дэлгэрэнгүй графикаар харна    Нийт 12   Дууссан 5   Эхлээгүй 3</a:t>
+            </a:r>
+          </a:p>
+        </p:txBody>
+      </p:sp>
+      <p:sp>
+        <p:nvSpPr>
+          <p:cNvPr id="23" name="TextBox 22"/>
           <p:cNvSpPr txBox="1"/>
           <p:nvPr/>
         </p:nvSpPr>
         <p:spPr>
           <a:xfrm>
-            <a:off x="10378440" y="2286000"/>
-            <a:ext cx="1280160" cy="384048"/>
+            <a:off x="10241280" y="2176272"/>
+            <a:ext cx="1417320" cy="384048"/>
           </a:xfrm>
           <a:prstGeom prst="rect">
             <a:avLst/>
@@ -10757,14 +11057,14 @@
       </p:sp>
       <p:sp>
         <p:nvSpPr>
-          <p:cNvPr id="23" name="Rounded Rectangle 22"/>
+          <p:cNvPr id="24" name="Rounded Rectangle 23"/>
           <p:cNvSpPr/>
           <p:nvPr/>
         </p:nvSpPr>
         <p:spPr>
           <a:xfrm>
-            <a:off x="3977639" y="2450592"/>
-            <a:ext cx="6263640" cy="146304"/>
+            <a:off x="5212080" y="2340864"/>
+            <a:ext cx="4892040" cy="128016"/>
           </a:xfrm>
           <a:prstGeom prst="roundRect">
             <a:avLst>
@@ -10802,14 +11102,14 @@
       </p:sp>
       <p:sp>
         <p:nvSpPr>
-          <p:cNvPr id="24" name="Rounded Rectangle 23"/>
+          <p:cNvPr id="25" name="Rounded Rectangle 24"/>
           <p:cNvSpPr/>
           <p:nvPr/>
         </p:nvSpPr>
         <p:spPr>
           <a:xfrm>
-            <a:off x="3977639" y="2450592"/>
-            <a:ext cx="3886200" cy="146304"/>
+            <a:off x="5212080" y="2340864"/>
+            <a:ext cx="3017520" cy="128016"/>
           </a:xfrm>
           <a:prstGeom prst="roundRect">
             <a:avLst>
@@ -10847,23 +11147,25 @@
       </p:sp>
       <p:sp>
         <p:nvSpPr>
-          <p:cNvPr id="25" name="Rectangle 24"/>
+          <p:cNvPr id="26" name="Rectangle 25"/>
           <p:cNvSpPr/>
           <p:nvPr/>
         </p:nvSpPr>
         <p:spPr>
           <a:xfrm>
-            <a:off x="365760" y="2980944"/>
-            <a:ext cx="411480" cy="329184"/>
+            <a:off x="365760" y="2852928"/>
+            <a:ext cx="457200" cy="310896"/>
           </a:xfrm>
           <a:prstGeom prst="rect">
             <a:avLst/>
           </a:prstGeom>
           <a:solidFill>
-            <a:srgbClr val="0F2F63"/>
+            <a:srgbClr val="E8EEF6"/>
           </a:solidFill>
-          <a:ln>
-            <a:noFill/>
+          <a:ln w="9525">
+            <a:solidFill>
+              <a:srgbClr val="E2E8F0"/>
+            </a:solidFill>
           </a:ln>
         </p:spPr>
         <p:style>
@@ -10890,14 +11192,14 @@
       </p:sp>
       <p:sp>
         <p:nvSpPr>
-          <p:cNvPr id="26" name="TextBox 25"/>
+          <p:cNvPr id="27" name="TextBox 26"/>
           <p:cNvSpPr txBox="1"/>
           <p:nvPr/>
         </p:nvSpPr>
         <p:spPr>
           <a:xfrm>
-            <a:off x="420624" y="3026664"/>
-            <a:ext cx="320040" cy="256032"/>
+            <a:off x="411480" y="2889504"/>
+            <a:ext cx="384048" cy="237744"/>
           </a:xfrm>
           <a:prstGeom prst="rect">
             <a:avLst/>
@@ -10912,9 +11214,9 @@
           <a:p>
             <a:pPr algn="l"/>
             <a:r>
-              <a:rPr sz="1000" b="1">
-                <a:solidFill>
-                  <a:srgbClr val="FFFFFF"/>
+              <a:rPr sz="900" b="1">
+                <a:solidFill>
+                  <a:srgbClr val="1E406B"/>
                 </a:solidFill>
                 <a:latin typeface="Calibri"/>
                 <a:ea typeface="Calibri"/>
@@ -10926,23 +11228,25 @@
       </p:sp>
       <p:sp>
         <p:nvSpPr>
-          <p:cNvPr id="27" name="Rectangle 26"/>
+          <p:cNvPr id="28" name="Rectangle 27"/>
           <p:cNvSpPr/>
           <p:nvPr/>
         </p:nvSpPr>
         <p:spPr>
           <a:xfrm>
-            <a:off x="777240" y="2980944"/>
-            <a:ext cx="3246120" cy="329184"/>
+            <a:off x="822960" y="2852928"/>
+            <a:ext cx="3108960" cy="310896"/>
           </a:xfrm>
           <a:prstGeom prst="rect">
             <a:avLst/>
           </a:prstGeom>
           <a:solidFill>
-            <a:srgbClr val="0F2F63"/>
+            <a:srgbClr val="E8EEF6"/>
           </a:solidFill>
-          <a:ln>
-            <a:noFill/>
+          <a:ln w="9525">
+            <a:solidFill>
+              <a:srgbClr val="E2E8F0"/>
+            </a:solidFill>
           </a:ln>
         </p:spPr>
         <p:style>
@@ -10969,14 +11273,14 @@
       </p:sp>
       <p:sp>
         <p:nvSpPr>
-          <p:cNvPr id="28" name="TextBox 27"/>
+          <p:cNvPr id="29" name="TextBox 28"/>
           <p:cNvSpPr txBox="1"/>
           <p:nvPr/>
         </p:nvSpPr>
         <p:spPr>
           <a:xfrm>
-            <a:off x="832104" y="3026664"/>
-            <a:ext cx="3154680" cy="256032"/>
+            <a:off x="868680" y="2889504"/>
+            <a:ext cx="3035808" cy="237744"/>
           </a:xfrm>
           <a:prstGeom prst="rect">
             <a:avLst/>
@@ -10991,9 +11295,9 @@
           <a:p>
             <a:pPr algn="l"/>
             <a:r>
-              <a:rPr sz="1000" b="1">
-                <a:solidFill>
-                  <a:srgbClr val="FFFFFF"/>
+              <a:rPr sz="900" b="1">
+                <a:solidFill>
+                  <a:srgbClr val="1E406B"/>
                 </a:solidFill>
                 <a:latin typeface="Calibri"/>
                 <a:ea typeface="Calibri"/>
@@ -11005,23 +11309,25 @@
       </p:sp>
       <p:sp>
         <p:nvSpPr>
-          <p:cNvPr id="29" name="Rectangle 28"/>
+          <p:cNvPr id="30" name="Rectangle 29"/>
           <p:cNvSpPr/>
           <p:nvPr/>
         </p:nvSpPr>
         <p:spPr>
           <a:xfrm>
-            <a:off x="4023360" y="2980944"/>
-            <a:ext cx="2148840" cy="329184"/>
+            <a:off x="3931920" y="2852928"/>
+            <a:ext cx="2103120" cy="310896"/>
           </a:xfrm>
           <a:prstGeom prst="rect">
             <a:avLst/>
           </a:prstGeom>
           <a:solidFill>
-            <a:srgbClr val="0F2F63"/>
+            <a:srgbClr val="E8EEF6"/>
           </a:solidFill>
-          <a:ln>
-            <a:noFill/>
+          <a:ln w="9525">
+            <a:solidFill>
+              <a:srgbClr val="E2E8F0"/>
+            </a:solidFill>
           </a:ln>
         </p:spPr>
         <p:style>
@@ -11048,14 +11354,14 @@
       </p:sp>
       <p:sp>
         <p:nvSpPr>
-          <p:cNvPr id="30" name="TextBox 29"/>
+          <p:cNvPr id="31" name="TextBox 30"/>
           <p:cNvSpPr txBox="1"/>
           <p:nvPr/>
         </p:nvSpPr>
         <p:spPr>
           <a:xfrm>
-            <a:off x="4078224" y="3026664"/>
-            <a:ext cx="2057400" cy="256032"/>
+            <a:off x="3977640" y="2889504"/>
+            <a:ext cx="2029968" cy="237744"/>
           </a:xfrm>
           <a:prstGeom prst="rect">
             <a:avLst/>
@@ -11070,9 +11376,9 @@
           <a:p>
             <a:pPr algn="l"/>
             <a:r>
-              <a:rPr sz="1000" b="1">
-                <a:solidFill>
-                  <a:srgbClr val="FFFFFF"/>
+              <a:rPr sz="900" b="1">
+                <a:solidFill>
+                  <a:srgbClr val="1E406B"/>
                 </a:solidFill>
                 <a:latin typeface="Calibri"/>
                 <a:ea typeface="Calibri"/>
@@ -11084,23 +11390,25 @@
       </p:sp>
       <p:sp>
         <p:nvSpPr>
-          <p:cNvPr id="31" name="Rectangle 30"/>
+          <p:cNvPr id="32" name="Rectangle 31"/>
           <p:cNvSpPr/>
           <p:nvPr/>
         </p:nvSpPr>
         <p:spPr>
           <a:xfrm>
-            <a:off x="6172200" y="2980944"/>
-            <a:ext cx="2331720" cy="329184"/>
+            <a:off x="6035040" y="2852928"/>
+            <a:ext cx="2468880" cy="310896"/>
           </a:xfrm>
           <a:prstGeom prst="rect">
             <a:avLst/>
           </a:prstGeom>
           <a:solidFill>
-            <a:srgbClr val="0F2F63"/>
+            <a:srgbClr val="E8EEF6"/>
           </a:solidFill>
-          <a:ln>
-            <a:noFill/>
+          <a:ln w="9525">
+            <a:solidFill>
+              <a:srgbClr val="E2E8F0"/>
+            </a:solidFill>
           </a:ln>
         </p:spPr>
         <p:style>
@@ -11127,14 +11435,14 @@
       </p:sp>
       <p:sp>
         <p:nvSpPr>
-          <p:cNvPr id="32" name="TextBox 31"/>
+          <p:cNvPr id="33" name="TextBox 32"/>
           <p:cNvSpPr txBox="1"/>
           <p:nvPr/>
         </p:nvSpPr>
         <p:spPr>
           <a:xfrm>
-            <a:off x="6227064" y="3026664"/>
-            <a:ext cx="2240280" cy="256032"/>
+            <a:off x="6080760" y="2889504"/>
+            <a:ext cx="2395728" cy="237744"/>
           </a:xfrm>
           <a:prstGeom prst="rect">
             <a:avLst/>
@@ -11149,9 +11457,9 @@
           <a:p>
             <a:pPr algn="l"/>
             <a:r>
-              <a:rPr sz="1000" b="1">
-                <a:solidFill>
-                  <a:srgbClr val="FFFFFF"/>
+              <a:rPr sz="900" b="1">
+                <a:solidFill>
+                  <a:srgbClr val="1E406B"/>
                 </a:solidFill>
                 <a:latin typeface="Calibri"/>
                 <a:ea typeface="Calibri"/>
@@ -11163,23 +11471,25 @@
       </p:sp>
       <p:sp>
         <p:nvSpPr>
-          <p:cNvPr id="33" name="Rectangle 32"/>
+          <p:cNvPr id="34" name="Rectangle 33"/>
           <p:cNvSpPr/>
           <p:nvPr/>
         </p:nvSpPr>
         <p:spPr>
           <a:xfrm>
-            <a:off x="8503920" y="2980944"/>
-            <a:ext cx="1965960" cy="329184"/>
+            <a:off x="8503920" y="2852928"/>
+            <a:ext cx="1965960" cy="310896"/>
           </a:xfrm>
           <a:prstGeom prst="rect">
             <a:avLst/>
           </a:prstGeom>
           <a:solidFill>
-            <a:srgbClr val="0F2F63"/>
+            <a:srgbClr val="E8EEF6"/>
           </a:solidFill>
-          <a:ln>
-            <a:noFill/>
+          <a:ln w="9525">
+            <a:solidFill>
+              <a:srgbClr val="E2E8F0"/>
+            </a:solidFill>
           </a:ln>
         </p:spPr>
         <p:style>
@@ -11206,14 +11516,14 @@
       </p:sp>
       <p:sp>
         <p:nvSpPr>
-          <p:cNvPr id="34" name="TextBox 33"/>
+          <p:cNvPr id="35" name="TextBox 34"/>
           <p:cNvSpPr txBox="1"/>
           <p:nvPr/>
         </p:nvSpPr>
         <p:spPr>
           <a:xfrm>
-            <a:off x="8558784" y="3026664"/>
-            <a:ext cx="1874520" cy="256032"/>
+            <a:off x="8549640" y="2889504"/>
+            <a:ext cx="1892808" cy="237744"/>
           </a:xfrm>
           <a:prstGeom prst="rect">
             <a:avLst/>
@@ -11228,9 +11538,9 @@
           <a:p>
             <a:pPr algn="l"/>
             <a:r>
-              <a:rPr sz="1000" b="1">
-                <a:solidFill>
-                  <a:srgbClr val="FFFFFF"/>
+              <a:rPr sz="900" b="1">
+                <a:solidFill>
+                  <a:srgbClr val="1E406B"/>
                 </a:solidFill>
                 <a:latin typeface="Calibri"/>
                 <a:ea typeface="Calibri"/>
@@ -11242,23 +11552,25 @@
       </p:sp>
       <p:sp>
         <p:nvSpPr>
-          <p:cNvPr id="35" name="Rectangle 34"/>
+          <p:cNvPr id="36" name="Rectangle 35"/>
           <p:cNvSpPr/>
           <p:nvPr/>
         </p:nvSpPr>
         <p:spPr>
           <a:xfrm>
-            <a:off x="10469880" y="2980944"/>
-            <a:ext cx="1371600" cy="329184"/>
+            <a:off x="10469880" y="2852928"/>
+            <a:ext cx="1371600" cy="310896"/>
           </a:xfrm>
           <a:prstGeom prst="rect">
             <a:avLst/>
           </a:prstGeom>
           <a:solidFill>
-            <a:srgbClr val="0F2F63"/>
+            <a:srgbClr val="E8EEF6"/>
           </a:solidFill>
-          <a:ln>
-            <a:noFill/>
+          <a:ln w="9525">
+            <a:solidFill>
+              <a:srgbClr val="E2E8F0"/>
+            </a:solidFill>
           </a:ln>
         </p:spPr>
         <p:style>
@@ -11285,14 +11597,14 @@
       </p:sp>
       <p:sp>
         <p:nvSpPr>
-          <p:cNvPr id="36" name="TextBox 35"/>
+          <p:cNvPr id="37" name="TextBox 36"/>
           <p:cNvSpPr txBox="1"/>
           <p:nvPr/>
         </p:nvSpPr>
         <p:spPr>
           <a:xfrm>
-            <a:off x="10524744" y="3026664"/>
-            <a:ext cx="1280160" cy="256032"/>
+            <a:off x="10515600" y="2889504"/>
+            <a:ext cx="1298448" cy="237744"/>
           </a:xfrm>
           <a:prstGeom prst="rect">
             <a:avLst/>
@@ -11307,28 +11619,28 @@
           <a:p>
             <a:pPr algn="l"/>
             <a:r>
-              <a:rPr sz="1000" b="1">
-                <a:solidFill>
-                  <a:srgbClr val="FFFFFF"/>
-                </a:solidFill>
-                <a:latin typeface="Calibri"/>
-                <a:ea typeface="Calibri"/>
-              </a:rPr>
-              <a:t>Биелэлт</a:t>
-            </a:r>
-          </a:p>
-        </p:txBody>
-      </p:sp>
-      <p:sp>
-        <p:nvSpPr>
-          <p:cNvPr id="37" name="Rectangle 36"/>
+              <a:rPr sz="900" b="1">
+                <a:solidFill>
+                  <a:srgbClr val="1E406B"/>
+                </a:solidFill>
+                <a:latin typeface="Calibri"/>
+                <a:ea typeface="Calibri"/>
+              </a:rPr>
+              <a:t>Биелэлтийн хувь</a:t>
+            </a:r>
+          </a:p>
+        </p:txBody>
+      </p:sp>
+      <p:sp>
+        <p:nvSpPr>
+          <p:cNvPr id="38" name="Rectangle 37"/>
           <p:cNvSpPr/>
           <p:nvPr/>
         </p:nvSpPr>
         <p:spPr>
           <a:xfrm>
-            <a:off x="365760" y="3310128"/>
-            <a:ext cx="411480" cy="347472"/>
+            <a:off x="365760" y="3163824"/>
+            <a:ext cx="457200" cy="365760"/>
           </a:xfrm>
           <a:prstGeom prst="rect">
             <a:avLst/>
@@ -11366,14 +11678,14 @@
       </p:sp>
       <p:sp>
         <p:nvSpPr>
-          <p:cNvPr id="38" name="TextBox 37"/>
+          <p:cNvPr id="39" name="TextBox 38"/>
           <p:cNvSpPr txBox="1"/>
           <p:nvPr/>
         </p:nvSpPr>
         <p:spPr>
           <a:xfrm>
-            <a:off x="420624" y="3355848"/>
-            <a:ext cx="320040" cy="256032"/>
+            <a:off x="411480" y="3218688"/>
+            <a:ext cx="384048" cy="256032"/>
           </a:xfrm>
           <a:prstGeom prst="rect">
             <a:avLst/>
@@ -11402,14 +11714,14 @@
       </p:sp>
       <p:sp>
         <p:nvSpPr>
-          <p:cNvPr id="39" name="Rectangle 38"/>
+          <p:cNvPr id="40" name="Rectangle 39"/>
           <p:cNvSpPr/>
           <p:nvPr/>
         </p:nvSpPr>
         <p:spPr>
           <a:xfrm>
-            <a:off x="777240" y="3310128"/>
-            <a:ext cx="3246120" cy="347472"/>
+            <a:off x="822960" y="3163824"/>
+            <a:ext cx="3108960" cy="365760"/>
           </a:xfrm>
           <a:prstGeom prst="rect">
             <a:avLst/>
@@ -11447,14 +11759,14 @@
       </p:sp>
       <p:sp>
         <p:nvSpPr>
-          <p:cNvPr id="40" name="TextBox 39"/>
+          <p:cNvPr id="41" name="TextBox 40"/>
           <p:cNvSpPr txBox="1"/>
           <p:nvPr/>
         </p:nvSpPr>
         <p:spPr>
           <a:xfrm>
-            <a:off x="832104" y="3355848"/>
-            <a:ext cx="3154680" cy="256032"/>
+            <a:off x="868680" y="3218688"/>
+            <a:ext cx="3035808" cy="256032"/>
           </a:xfrm>
           <a:prstGeom prst="rect">
             <a:avLst/>
@@ -11483,14 +11795,14 @@
       </p:sp>
       <p:sp>
         <p:nvSpPr>
-          <p:cNvPr id="41" name="Rectangle 40"/>
+          <p:cNvPr id="42" name="Rectangle 41"/>
           <p:cNvSpPr/>
           <p:nvPr/>
         </p:nvSpPr>
         <p:spPr>
           <a:xfrm>
-            <a:off x="4023360" y="3310128"/>
-            <a:ext cx="2148840" cy="347472"/>
+            <a:off x="3931920" y="3163824"/>
+            <a:ext cx="2103120" cy="365760"/>
           </a:xfrm>
           <a:prstGeom prst="rect">
             <a:avLst/>
@@ -11528,14 +11840,14 @@
       </p:sp>
       <p:sp>
         <p:nvSpPr>
-          <p:cNvPr id="42" name="TextBox 41"/>
+          <p:cNvPr id="43" name="TextBox 42"/>
           <p:cNvSpPr txBox="1"/>
           <p:nvPr/>
         </p:nvSpPr>
         <p:spPr>
           <a:xfrm>
-            <a:off x="4078224" y="3355848"/>
-            <a:ext cx="2057400" cy="256032"/>
+            <a:off x="3977640" y="3218688"/>
+            <a:ext cx="2029968" cy="256032"/>
           </a:xfrm>
           <a:prstGeom prst="rect">
             <a:avLst/>
@@ -11564,14 +11876,14 @@
       </p:sp>
       <p:sp>
         <p:nvSpPr>
-          <p:cNvPr id="43" name="Rectangle 42"/>
+          <p:cNvPr id="44" name="Rectangle 43"/>
           <p:cNvSpPr/>
           <p:nvPr/>
         </p:nvSpPr>
         <p:spPr>
           <a:xfrm>
-            <a:off x="6172200" y="3310128"/>
-            <a:ext cx="2331720" cy="347472"/>
+            <a:off x="6035040" y="3163824"/>
+            <a:ext cx="2468880" cy="365760"/>
           </a:xfrm>
           <a:prstGeom prst="rect">
             <a:avLst/>
@@ -11609,14 +11921,14 @@
       </p:sp>
       <p:sp>
         <p:nvSpPr>
-          <p:cNvPr id="44" name="TextBox 43"/>
+          <p:cNvPr id="45" name="TextBox 44"/>
           <p:cNvSpPr txBox="1"/>
           <p:nvPr/>
         </p:nvSpPr>
         <p:spPr>
           <a:xfrm>
-            <a:off x="6227064" y="3355848"/>
-            <a:ext cx="2240280" cy="256032"/>
+            <a:off x="6080760" y="3218688"/>
+            <a:ext cx="2395728" cy="256032"/>
           </a:xfrm>
           <a:prstGeom prst="rect">
             <a:avLst/>
@@ -11645,14 +11957,14 @@
       </p:sp>
       <p:sp>
         <p:nvSpPr>
-          <p:cNvPr id="45" name="Rectangle 44"/>
+          <p:cNvPr id="46" name="Rectangle 45"/>
           <p:cNvSpPr/>
           <p:nvPr/>
         </p:nvSpPr>
         <p:spPr>
           <a:xfrm>
-            <a:off x="8503920" y="3310128"/>
-            <a:ext cx="1965960" cy="347472"/>
+            <a:off x="8503920" y="3163824"/>
+            <a:ext cx="1965960" cy="365760"/>
           </a:xfrm>
           <a:prstGeom prst="rect">
             <a:avLst/>
@@ -11690,14 +12002,14 @@
       </p:sp>
       <p:sp>
         <p:nvSpPr>
-          <p:cNvPr id="46" name="TextBox 45"/>
+          <p:cNvPr id="47" name="TextBox 46"/>
           <p:cNvSpPr txBox="1"/>
           <p:nvPr/>
         </p:nvSpPr>
         <p:spPr>
           <a:xfrm>
-            <a:off x="8558784" y="3355848"/>
-            <a:ext cx="1874520" cy="256032"/>
+            <a:off x="8549640" y="3218688"/>
+            <a:ext cx="1892808" cy="256032"/>
           </a:xfrm>
           <a:prstGeom prst="rect">
             <a:avLst/>
@@ -11726,14 +12038,14 @@
       </p:sp>
       <p:sp>
         <p:nvSpPr>
-          <p:cNvPr id="47" name="Rectangle 46"/>
+          <p:cNvPr id="48" name="Rectangle 47"/>
           <p:cNvSpPr/>
           <p:nvPr/>
         </p:nvSpPr>
         <p:spPr>
           <a:xfrm>
-            <a:off x="10469880" y="3310128"/>
-            <a:ext cx="1371600" cy="347472"/>
+            <a:off x="10469880" y="3163824"/>
+            <a:ext cx="1371600" cy="365760"/>
           </a:xfrm>
           <a:prstGeom prst="rect">
             <a:avLst/>
@@ -11771,14 +12083,14 @@
       </p:sp>
       <p:sp>
         <p:nvSpPr>
-          <p:cNvPr id="48" name="TextBox 47"/>
+          <p:cNvPr id="49" name="TextBox 48"/>
           <p:cNvSpPr txBox="1"/>
           <p:nvPr/>
         </p:nvSpPr>
         <p:spPr>
           <a:xfrm>
-            <a:off x="10524744" y="3355848"/>
-            <a:ext cx="1280160" cy="256032"/>
+            <a:off x="10515600" y="3218688"/>
+            <a:ext cx="1298448" cy="256032"/>
           </a:xfrm>
           <a:prstGeom prst="rect">
             <a:avLst/>
@@ -11807,14 +12119,14 @@
       </p:sp>
       <p:sp>
         <p:nvSpPr>
-          <p:cNvPr id="49" name="Rectangle 48"/>
+          <p:cNvPr id="50" name="Rectangle 49"/>
           <p:cNvSpPr/>
           <p:nvPr/>
         </p:nvSpPr>
         <p:spPr>
           <a:xfrm>
-            <a:off x="365760" y="3657600"/>
-            <a:ext cx="411480" cy="347472"/>
+            <a:off x="365760" y="3529584"/>
+            <a:ext cx="457200" cy="365760"/>
           </a:xfrm>
           <a:prstGeom prst="rect">
             <a:avLst/>
@@ -11852,14 +12164,14 @@
       </p:sp>
       <p:sp>
         <p:nvSpPr>
-          <p:cNvPr id="50" name="TextBox 49"/>
+          <p:cNvPr id="51" name="TextBox 50"/>
           <p:cNvSpPr txBox="1"/>
           <p:nvPr/>
         </p:nvSpPr>
         <p:spPr>
           <a:xfrm>
-            <a:off x="420624" y="3703320"/>
-            <a:ext cx="320040" cy="256032"/>
+            <a:off x="411480" y="3584448"/>
+            <a:ext cx="384048" cy="256032"/>
           </a:xfrm>
           <a:prstGeom prst="rect">
             <a:avLst/>
@@ -11888,14 +12200,14 @@
       </p:sp>
       <p:sp>
         <p:nvSpPr>
-          <p:cNvPr id="51" name="Rectangle 50"/>
+          <p:cNvPr id="52" name="Rectangle 51"/>
           <p:cNvSpPr/>
           <p:nvPr/>
         </p:nvSpPr>
         <p:spPr>
           <a:xfrm>
-            <a:off x="777240" y="3657600"/>
-            <a:ext cx="3246120" cy="347472"/>
+            <a:off x="822960" y="3529584"/>
+            <a:ext cx="3108960" cy="365760"/>
           </a:xfrm>
           <a:prstGeom prst="rect">
             <a:avLst/>
@@ -11933,14 +12245,14 @@
       </p:sp>
       <p:sp>
         <p:nvSpPr>
-          <p:cNvPr id="52" name="TextBox 51"/>
+          <p:cNvPr id="53" name="TextBox 52"/>
           <p:cNvSpPr txBox="1"/>
           <p:nvPr/>
         </p:nvSpPr>
         <p:spPr>
           <a:xfrm>
-            <a:off x="832104" y="3703320"/>
-            <a:ext cx="3154680" cy="256032"/>
+            <a:off x="868680" y="3584448"/>
+            <a:ext cx="3035808" cy="256032"/>
           </a:xfrm>
           <a:prstGeom prst="rect">
             <a:avLst/>
@@ -11969,14 +12281,14 @@
       </p:sp>
       <p:sp>
         <p:nvSpPr>
-          <p:cNvPr id="53" name="Rectangle 52"/>
+          <p:cNvPr id="54" name="Rectangle 53"/>
           <p:cNvSpPr/>
           <p:nvPr/>
         </p:nvSpPr>
         <p:spPr>
           <a:xfrm>
-            <a:off x="4023360" y="3657600"/>
-            <a:ext cx="2148840" cy="347472"/>
+            <a:off x="3931920" y="3529584"/>
+            <a:ext cx="2103120" cy="365760"/>
           </a:xfrm>
           <a:prstGeom prst="rect">
             <a:avLst/>
@@ -12014,14 +12326,14 @@
       </p:sp>
       <p:sp>
         <p:nvSpPr>
-          <p:cNvPr id="54" name="TextBox 53"/>
+          <p:cNvPr id="55" name="TextBox 54"/>
           <p:cNvSpPr txBox="1"/>
           <p:nvPr/>
         </p:nvSpPr>
         <p:spPr>
           <a:xfrm>
-            <a:off x="4078224" y="3703320"/>
-            <a:ext cx="2057400" cy="256032"/>
+            <a:off x="3977640" y="3584448"/>
+            <a:ext cx="2029968" cy="256032"/>
           </a:xfrm>
           <a:prstGeom prst="rect">
             <a:avLst/>
@@ -12050,14 +12362,14 @@
       </p:sp>
       <p:sp>
         <p:nvSpPr>
-          <p:cNvPr id="55" name="Rectangle 54"/>
+          <p:cNvPr id="56" name="Rectangle 55"/>
           <p:cNvSpPr/>
           <p:nvPr/>
         </p:nvSpPr>
         <p:spPr>
           <a:xfrm>
-            <a:off x="6172200" y="3657600"/>
-            <a:ext cx="2331720" cy="347472"/>
+            <a:off x="6035040" y="3529584"/>
+            <a:ext cx="2468880" cy="365760"/>
           </a:xfrm>
           <a:prstGeom prst="rect">
             <a:avLst/>
@@ -12095,14 +12407,14 @@
       </p:sp>
       <p:sp>
         <p:nvSpPr>
-          <p:cNvPr id="56" name="TextBox 55"/>
+          <p:cNvPr id="57" name="TextBox 56"/>
           <p:cNvSpPr txBox="1"/>
           <p:nvPr/>
         </p:nvSpPr>
         <p:spPr>
           <a:xfrm>
-            <a:off x="6227064" y="3703320"/>
-            <a:ext cx="2240280" cy="256032"/>
+            <a:off x="6080760" y="3584448"/>
+            <a:ext cx="2395728" cy="256032"/>
           </a:xfrm>
           <a:prstGeom prst="rect">
             <a:avLst/>
@@ -12131,14 +12443,14 @@
       </p:sp>
       <p:sp>
         <p:nvSpPr>
-          <p:cNvPr id="57" name="Rectangle 56"/>
+          <p:cNvPr id="58" name="Rectangle 57"/>
           <p:cNvSpPr/>
           <p:nvPr/>
         </p:nvSpPr>
         <p:spPr>
           <a:xfrm>
-            <a:off x="8503920" y="3657600"/>
-            <a:ext cx="1965960" cy="347472"/>
+            <a:off x="8503920" y="3529584"/>
+            <a:ext cx="1965960" cy="365760"/>
           </a:xfrm>
           <a:prstGeom prst="rect">
             <a:avLst/>
@@ -12176,14 +12488,14 @@
       </p:sp>
       <p:sp>
         <p:nvSpPr>
-          <p:cNvPr id="58" name="TextBox 57"/>
+          <p:cNvPr id="59" name="TextBox 58"/>
           <p:cNvSpPr txBox="1"/>
           <p:nvPr/>
         </p:nvSpPr>
         <p:spPr>
           <a:xfrm>
-            <a:off x="8558784" y="3703320"/>
-            <a:ext cx="1874520" cy="256032"/>
+            <a:off x="8549640" y="3584448"/>
+            <a:ext cx="1892808" cy="256032"/>
           </a:xfrm>
           <a:prstGeom prst="rect">
             <a:avLst/>
@@ -12212,14 +12524,14 @@
       </p:sp>
       <p:sp>
         <p:nvSpPr>
-          <p:cNvPr id="59" name="Rectangle 58"/>
+          <p:cNvPr id="60" name="Rectangle 59"/>
           <p:cNvSpPr/>
           <p:nvPr/>
         </p:nvSpPr>
         <p:spPr>
           <a:xfrm>
-            <a:off x="10469880" y="3657600"/>
-            <a:ext cx="1371600" cy="347472"/>
+            <a:off x="10469880" y="3529584"/>
+            <a:ext cx="1371600" cy="365760"/>
           </a:xfrm>
           <a:prstGeom prst="rect">
             <a:avLst/>
@@ -12257,14 +12569,14 @@
       </p:sp>
       <p:sp>
         <p:nvSpPr>
-          <p:cNvPr id="60" name="TextBox 59"/>
+          <p:cNvPr id="61" name="TextBox 60"/>
           <p:cNvSpPr txBox="1"/>
           <p:nvPr/>
         </p:nvSpPr>
         <p:spPr>
           <a:xfrm>
-            <a:off x="10524744" y="3703320"/>
-            <a:ext cx="1280160" cy="256032"/>
+            <a:off x="10515600" y="3584448"/>
+            <a:ext cx="1298448" cy="256032"/>
           </a:xfrm>
           <a:prstGeom prst="rect">
             <a:avLst/>
@@ -12293,14 +12605,14 @@
       </p:sp>
       <p:sp>
         <p:nvSpPr>
-          <p:cNvPr id="61" name="Rectangle 60"/>
+          <p:cNvPr id="62" name="Rectangle 61"/>
           <p:cNvSpPr/>
           <p:nvPr/>
         </p:nvSpPr>
         <p:spPr>
           <a:xfrm>
-            <a:off x="365760" y="4005072"/>
-            <a:ext cx="411480" cy="347472"/>
+            <a:off x="365760" y="3895344"/>
+            <a:ext cx="457200" cy="365760"/>
           </a:xfrm>
           <a:prstGeom prst="rect">
             <a:avLst/>
@@ -12338,14 +12650,14 @@
       </p:sp>
       <p:sp>
         <p:nvSpPr>
-          <p:cNvPr id="62" name="TextBox 61"/>
+          <p:cNvPr id="63" name="TextBox 62"/>
           <p:cNvSpPr txBox="1"/>
           <p:nvPr/>
         </p:nvSpPr>
         <p:spPr>
           <a:xfrm>
-            <a:off x="420624" y="4050792"/>
-            <a:ext cx="320040" cy="256032"/>
+            <a:off x="411480" y="3950208"/>
+            <a:ext cx="384048" cy="256032"/>
           </a:xfrm>
           <a:prstGeom prst="rect">
             <a:avLst/>
@@ -12374,14 +12686,14 @@
       </p:sp>
       <p:sp>
         <p:nvSpPr>
-          <p:cNvPr id="63" name="Rectangle 62"/>
+          <p:cNvPr id="64" name="Rectangle 63"/>
           <p:cNvSpPr/>
           <p:nvPr/>
         </p:nvSpPr>
         <p:spPr>
           <a:xfrm>
-            <a:off x="777240" y="4005072"/>
-            <a:ext cx="3246120" cy="347472"/>
+            <a:off x="822960" y="3895344"/>
+            <a:ext cx="3108960" cy="365760"/>
           </a:xfrm>
           <a:prstGeom prst="rect">
             <a:avLst/>
@@ -12419,14 +12731,14 @@
       </p:sp>
       <p:sp>
         <p:nvSpPr>
-          <p:cNvPr id="64" name="TextBox 63"/>
+          <p:cNvPr id="65" name="TextBox 64"/>
           <p:cNvSpPr txBox="1"/>
           <p:nvPr/>
         </p:nvSpPr>
         <p:spPr>
           <a:xfrm>
-            <a:off x="832104" y="4050792"/>
-            <a:ext cx="3154680" cy="256032"/>
+            <a:off x="868680" y="3950208"/>
+            <a:ext cx="3035808" cy="256032"/>
           </a:xfrm>
           <a:prstGeom prst="rect">
             <a:avLst/>
@@ -12455,14 +12767,14 @@
       </p:sp>
       <p:sp>
         <p:nvSpPr>
-          <p:cNvPr id="65" name="Rectangle 64"/>
+          <p:cNvPr id="66" name="Rectangle 65"/>
           <p:cNvSpPr/>
           <p:nvPr/>
         </p:nvSpPr>
         <p:spPr>
           <a:xfrm>
-            <a:off x="4023360" y="4005072"/>
-            <a:ext cx="2148840" cy="347472"/>
+            <a:off x="3931920" y="3895344"/>
+            <a:ext cx="2103120" cy="365760"/>
           </a:xfrm>
           <a:prstGeom prst="rect">
             <a:avLst/>
@@ -12500,14 +12812,14 @@
       </p:sp>
       <p:sp>
         <p:nvSpPr>
-          <p:cNvPr id="66" name="TextBox 65"/>
+          <p:cNvPr id="67" name="TextBox 66"/>
           <p:cNvSpPr txBox="1"/>
           <p:nvPr/>
         </p:nvSpPr>
         <p:spPr>
           <a:xfrm>
-            <a:off x="4078224" y="4050792"/>
-            <a:ext cx="2057400" cy="256032"/>
+            <a:off x="3977640" y="3950208"/>
+            <a:ext cx="2029968" cy="256032"/>
           </a:xfrm>
           <a:prstGeom prst="rect">
             <a:avLst/>
@@ -12536,14 +12848,14 @@
       </p:sp>
       <p:sp>
         <p:nvSpPr>
-          <p:cNvPr id="67" name="Rectangle 66"/>
+          <p:cNvPr id="68" name="Rectangle 67"/>
           <p:cNvSpPr/>
           <p:nvPr/>
         </p:nvSpPr>
         <p:spPr>
           <a:xfrm>
-            <a:off x="6172200" y="4005072"/>
-            <a:ext cx="2331720" cy="347472"/>
+            <a:off x="6035040" y="3895344"/>
+            <a:ext cx="2468880" cy="365760"/>
           </a:xfrm>
           <a:prstGeom prst="rect">
             <a:avLst/>
@@ -12581,14 +12893,14 @@
       </p:sp>
       <p:sp>
         <p:nvSpPr>
-          <p:cNvPr id="68" name="TextBox 67"/>
+          <p:cNvPr id="69" name="TextBox 68"/>
           <p:cNvSpPr txBox="1"/>
           <p:nvPr/>
         </p:nvSpPr>
         <p:spPr>
           <a:xfrm>
-            <a:off x="6227064" y="4050792"/>
-            <a:ext cx="2240280" cy="256032"/>
+            <a:off x="6080760" y="3950208"/>
+            <a:ext cx="2395728" cy="256032"/>
           </a:xfrm>
           <a:prstGeom prst="rect">
             <a:avLst/>
@@ -12617,14 +12929,14 @@
       </p:sp>
       <p:sp>
         <p:nvSpPr>
-          <p:cNvPr id="69" name="Rectangle 68"/>
+          <p:cNvPr id="70" name="Rectangle 69"/>
           <p:cNvSpPr/>
           <p:nvPr/>
         </p:nvSpPr>
         <p:spPr>
           <a:xfrm>
-            <a:off x="8503920" y="4005072"/>
-            <a:ext cx="1965960" cy="347472"/>
+            <a:off x="8503920" y="3895344"/>
+            <a:ext cx="1965960" cy="365760"/>
           </a:xfrm>
           <a:prstGeom prst="rect">
             <a:avLst/>
@@ -12662,14 +12974,14 @@
       </p:sp>
       <p:sp>
         <p:nvSpPr>
-          <p:cNvPr id="70" name="TextBox 69"/>
+          <p:cNvPr id="71" name="TextBox 70"/>
           <p:cNvSpPr txBox="1"/>
           <p:nvPr/>
         </p:nvSpPr>
         <p:spPr>
           <a:xfrm>
-            <a:off x="8558784" y="4050792"/>
-            <a:ext cx="1874520" cy="256032"/>
+            <a:off x="8549640" y="3950208"/>
+            <a:ext cx="1892808" cy="256032"/>
           </a:xfrm>
           <a:prstGeom prst="rect">
             <a:avLst/>
@@ -12698,14 +13010,14 @@
       </p:sp>
       <p:sp>
         <p:nvSpPr>
-          <p:cNvPr id="71" name="Rectangle 70"/>
+          <p:cNvPr id="72" name="Rectangle 71"/>
           <p:cNvSpPr/>
           <p:nvPr/>
         </p:nvSpPr>
         <p:spPr>
           <a:xfrm>
-            <a:off x="10469880" y="4005072"/>
-            <a:ext cx="1371600" cy="347472"/>
+            <a:off x="10469880" y="3895344"/>
+            <a:ext cx="1371600" cy="365760"/>
           </a:xfrm>
           <a:prstGeom prst="rect">
             <a:avLst/>
@@ -12743,14 +13055,14 @@
       </p:sp>
       <p:sp>
         <p:nvSpPr>
-          <p:cNvPr id="72" name="TextBox 71"/>
+          <p:cNvPr id="73" name="TextBox 72"/>
           <p:cNvSpPr txBox="1"/>
           <p:nvPr/>
         </p:nvSpPr>
         <p:spPr>
           <a:xfrm>
-            <a:off x="10524744" y="4050792"/>
-            <a:ext cx="1280160" cy="256032"/>
+            <a:off x="10515600" y="3950208"/>
+            <a:ext cx="1298448" cy="256032"/>
           </a:xfrm>
           <a:prstGeom prst="rect">
             <a:avLst/>
@@ -12779,22 +13091,24 @@
       </p:sp>
       <p:sp>
         <p:nvSpPr>
-          <p:cNvPr id="73" name="Rectangle 72"/>
+          <p:cNvPr id="74" name="Rounded Rectangle 73"/>
           <p:cNvSpPr/>
           <p:nvPr/>
         </p:nvSpPr>
         <p:spPr>
           <a:xfrm>
-            <a:off x="365760" y="4352544"/>
-            <a:ext cx="411480" cy="347472"/>
-          </a:xfrm>
-          <a:prstGeom prst="rect">
-            <a:avLst/>
+            <a:off x="365760" y="4736592"/>
+            <a:ext cx="3749039" cy="1664208"/>
+          </a:xfrm>
+          <a:prstGeom prst="roundRect">
+            <a:avLst>
+              <a:gd name="adj" fmla="val 6000"/>
+            </a:avLst>
           </a:prstGeom>
           <a:solidFill>
-            <a:srgbClr val="F1F5F9"/>
+            <a:srgbClr val="FFFFFF"/>
           </a:solidFill>
-          <a:ln w="9525">
+          <a:ln w="11430">
             <a:solidFill>
               <a:srgbClr val="E2E8F0"/>
             </a:solidFill>
@@ -12824,61 +13138,23 @@
       </p:sp>
       <p:sp>
         <p:nvSpPr>
-          <p:cNvPr id="74" name="TextBox 73"/>
-          <p:cNvSpPr txBox="1"/>
-          <p:nvPr/>
-        </p:nvSpPr>
-        <p:spPr>
-          <a:xfrm>
-            <a:off x="420624" y="4398264"/>
-            <a:ext cx="320040" cy="256032"/>
-          </a:xfrm>
-          <a:prstGeom prst="rect">
-            <a:avLst/>
-          </a:prstGeom>
-          <a:noFill/>
-        </p:spPr>
-        <p:txBody>
-          <a:bodyPr wrap="square">
-            <a:spAutoFit/>
-          </a:bodyPr>
-          <a:lstStyle/>
-          <a:p>
-            <a:pPr algn="l"/>
-            <a:r>
-              <a:rPr sz="1100" b="1">
-                <a:solidFill>
-                  <a:srgbClr val="0F172A"/>
-                </a:solidFill>
-                <a:latin typeface="Calibri"/>
-                <a:ea typeface="Calibri"/>
-              </a:rPr>
-              <a:t>4</a:t>
-            </a:r>
-          </a:p>
-        </p:txBody>
-      </p:sp>
-      <p:sp>
-        <p:nvSpPr>
           <p:cNvPr id="75" name="Rectangle 74"/>
           <p:cNvSpPr/>
           <p:nvPr/>
         </p:nvSpPr>
         <p:spPr>
           <a:xfrm>
-            <a:off x="777240" y="4352544"/>
-            <a:ext cx="3246120" cy="347472"/>
+            <a:off x="365760" y="4736592"/>
+            <a:ext cx="91440" cy="1664208"/>
           </a:xfrm>
           <a:prstGeom prst="rect">
             <a:avLst/>
           </a:prstGeom>
           <a:solidFill>
-            <a:srgbClr val="F1F5F9"/>
+            <a:srgbClr val="0F2F63"/>
           </a:solidFill>
-          <a:ln w="9525">
-            <a:solidFill>
-              <a:srgbClr val="E2E8F0"/>
-            </a:solidFill>
+          <a:ln>
+            <a:noFill/>
           </a:ln>
         </p:spPr>
         <p:style>
@@ -12911,8 +13187,8 @@
         </p:nvSpPr>
         <p:spPr>
           <a:xfrm>
-            <a:off x="832104" y="4398264"/>
-            <a:ext cx="3154680" cy="256032"/>
+            <a:off x="566928" y="4828032"/>
+            <a:ext cx="3456431" cy="292608"/>
           </a:xfrm>
           <a:prstGeom prst="rect">
             <a:avLst/>
@@ -12927,36 +13203,74 @@
           <a:p>
             <a:pPr algn="l"/>
             <a:r>
-              <a:rPr sz="1100" b="0">
-                <a:solidFill>
-                  <a:srgbClr val="0F172A"/>
-                </a:solidFill>
-                <a:latin typeface="Calibri"/>
-                <a:ea typeface="Calibri"/>
-              </a:rPr>
-              <a:t>Хэвлэлийн мэдээ бэлтгэх</a:t>
-            </a:r>
-          </a:p>
-        </p:txBody>
-      </p:sp>
-      <p:sp>
-        <p:nvSpPr>
-          <p:cNvPr id="77" name="Rectangle 76"/>
+              <a:rPr sz="1400" b="1">
+                <a:solidFill>
+                  <a:srgbClr val="0F2F63"/>
+                </a:solidFill>
+                <a:latin typeface="Calibri"/>
+                <a:ea typeface="Calibri"/>
+              </a:rPr>
+              <a:t>Нүд засах</a:t>
+            </a:r>
+          </a:p>
+        </p:txBody>
+      </p:sp>
+      <p:sp>
+        <p:nvSpPr>
+          <p:cNvPr id="77" name="TextBox 76"/>
+          <p:cNvSpPr txBox="1"/>
+          <p:nvPr/>
+        </p:nvSpPr>
+        <p:spPr>
+          <a:xfrm>
+            <a:off x="566928" y="5138928"/>
+            <a:ext cx="3456431" cy="1097280"/>
+          </a:xfrm>
+          <a:prstGeom prst="rect">
+            <a:avLst/>
+          </a:prstGeom>
+          <a:noFill/>
+        </p:spPr>
+        <p:txBody>
+          <a:bodyPr wrap="square">
+            <a:spAutoFit/>
+          </a:bodyPr>
+          <a:lstStyle/>
+          <a:p>
+            <a:pPr algn="l"/>
+            <a:r>
+              <a:rPr sz="1300" b="0">
+                <a:solidFill>
+                  <a:srgbClr val="475569"/>
+                </a:solidFill>
+                <a:latin typeface="Calibri"/>
+                <a:ea typeface="Calibri"/>
+              </a:rPr>
+              <a:t>Нүд дээр дарж шууд бичнэ. Тусдаа «Хадгалах» байхгүй.</a:t>
+            </a:r>
+          </a:p>
+        </p:txBody>
+      </p:sp>
+      <p:sp>
+        <p:nvSpPr>
+          <p:cNvPr id="78" name="Rounded Rectangle 77"/>
           <p:cNvSpPr/>
           <p:nvPr/>
         </p:nvSpPr>
         <p:spPr>
           <a:xfrm>
-            <a:off x="4023360" y="4352544"/>
-            <a:ext cx="2148840" cy="347472"/>
-          </a:xfrm>
-          <a:prstGeom prst="rect">
-            <a:avLst/>
+            <a:off x="4224527" y="4736592"/>
+            <a:ext cx="3749039" cy="1664208"/>
+          </a:xfrm>
+          <a:prstGeom prst="roundRect">
+            <a:avLst>
+              <a:gd name="adj" fmla="val 6000"/>
+            </a:avLst>
           </a:prstGeom>
           <a:solidFill>
-            <a:srgbClr val="F1F5F9"/>
+            <a:srgbClr val="FFFFFF"/>
           </a:solidFill>
-          <a:ln w="9525">
+          <a:ln w="11430">
             <a:solidFill>
               <a:srgbClr val="E2E8F0"/>
             </a:solidFill>
@@ -12986,61 +13300,23 @@
       </p:sp>
       <p:sp>
         <p:nvSpPr>
-          <p:cNvPr id="78" name="TextBox 77"/>
-          <p:cNvSpPr txBox="1"/>
-          <p:nvPr/>
-        </p:nvSpPr>
-        <p:spPr>
-          <a:xfrm>
-            <a:off x="4078224" y="4398264"/>
-            <a:ext cx="2057400" cy="256032"/>
-          </a:xfrm>
-          <a:prstGeom prst="rect">
-            <a:avLst/>
-          </a:prstGeom>
-          <a:noFill/>
-        </p:spPr>
-        <p:txBody>
-          <a:bodyPr wrap="square">
-            <a:spAutoFit/>
-          </a:bodyPr>
-          <a:lstStyle/>
-          <a:p>
-            <a:pPr algn="l"/>
-            <a:r>
-              <a:rPr sz="1100" b="0">
-                <a:solidFill>
-                  <a:srgbClr val="0F172A"/>
-                </a:solidFill>
-                <a:latin typeface="Calibri"/>
-                <a:ea typeface="Calibri"/>
-              </a:rPr>
-              <a:t>Д.Мөнх</a:t>
-            </a:r>
-          </a:p>
-        </p:txBody>
-      </p:sp>
-      <p:sp>
-        <p:nvSpPr>
           <p:cNvPr id="79" name="Rectangle 78"/>
           <p:cNvSpPr/>
           <p:nvPr/>
         </p:nvSpPr>
         <p:spPr>
           <a:xfrm>
-            <a:off x="6172200" y="4352544"/>
-            <a:ext cx="2331720" cy="347472"/>
+            <a:off x="4224527" y="4736592"/>
+            <a:ext cx="91440" cy="1664208"/>
           </a:xfrm>
           <a:prstGeom prst="rect">
             <a:avLst/>
           </a:prstGeom>
           <a:solidFill>
-            <a:srgbClr val="F1F5F9"/>
+            <a:srgbClr val="0F2F63"/>
           </a:solidFill>
-          <a:ln w="9525">
-            <a:solidFill>
-              <a:srgbClr val="E2E8F0"/>
-            </a:solidFill>
+          <a:ln>
+            <a:noFill/>
           </a:ln>
         </p:spPr>
         <p:style>
@@ -13073,8 +13349,8 @@
         </p:nvSpPr>
         <p:spPr>
           <a:xfrm>
-            <a:off x="6227064" y="4398264"/>
-            <a:ext cx="2240280" cy="256032"/>
+            <a:off x="4425695" y="4828032"/>
+            <a:ext cx="3456431" cy="292608"/>
           </a:xfrm>
           <a:prstGeom prst="rect">
             <a:avLst/>
@@ -13089,36 +13365,74 @@
           <a:p>
             <a:pPr algn="l"/>
             <a:r>
-              <a:rPr sz="1100" b="0">
-                <a:solidFill>
-                  <a:srgbClr val="0F172A"/>
-                </a:solidFill>
-                <a:latin typeface="Calibri"/>
-                <a:ea typeface="Calibri"/>
-              </a:rPr>
-              <a:t>Хэлтсийн дарга</a:t>
-            </a:r>
-          </a:p>
-        </p:txBody>
-      </p:sp>
-      <p:sp>
-        <p:nvSpPr>
-          <p:cNvPr id="81" name="Rectangle 80"/>
+              <a:rPr sz="1400" b="1">
+                <a:solidFill>
+                  <a:srgbClr val="0F2F63"/>
+                </a:solidFill>
+                <a:latin typeface="Calibri"/>
+                <a:ea typeface="Calibri"/>
+              </a:rPr>
+              <a:t>Хүн сонгох</a:t>
+            </a:r>
+          </a:p>
+        </p:txBody>
+      </p:sp>
+      <p:sp>
+        <p:nvSpPr>
+          <p:cNvPr id="81" name="TextBox 80"/>
+          <p:cNvSpPr txBox="1"/>
+          <p:nvPr/>
+        </p:nvSpPr>
+        <p:spPr>
+          <a:xfrm>
+            <a:off x="4425695" y="5138928"/>
+            <a:ext cx="3456431" cy="1097280"/>
+          </a:xfrm>
+          <a:prstGeom prst="rect">
+            <a:avLst/>
+          </a:prstGeom>
+          <a:noFill/>
+        </p:spPr>
+        <p:txBody>
+          <a:bodyPr wrap="square">
+            <a:spAutoFit/>
+          </a:bodyPr>
+          <a:lstStyle/>
+          <a:p>
+            <a:pPr algn="l"/>
+            <a:r>
+              <a:rPr sz="1300" b="0">
+                <a:solidFill>
+                  <a:srgbClr val="475569"/>
+                </a:solidFill>
+                <a:latin typeface="Calibri"/>
+                <a:ea typeface="Calibri"/>
+              </a:rPr>
+              <a:t>Хариуцагч / хяналтыг утасны жагсаалтаас нэрээр сонгоно.</a:t>
+            </a:r>
+          </a:p>
+        </p:txBody>
+      </p:sp>
+      <p:sp>
+        <p:nvSpPr>
+          <p:cNvPr id="82" name="Rounded Rectangle 81"/>
           <p:cNvSpPr/>
           <p:nvPr/>
         </p:nvSpPr>
         <p:spPr>
           <a:xfrm>
-            <a:off x="8503920" y="4352544"/>
-            <a:ext cx="1965960" cy="347472"/>
-          </a:xfrm>
-          <a:prstGeom prst="rect">
-            <a:avLst/>
+            <a:off x="8083294" y="4736592"/>
+            <a:ext cx="3749039" cy="1664208"/>
+          </a:xfrm>
+          <a:prstGeom prst="roundRect">
+            <a:avLst>
+              <a:gd name="adj" fmla="val 6000"/>
+            </a:avLst>
           </a:prstGeom>
           <a:solidFill>
-            <a:srgbClr val="F1F5F9"/>
+            <a:srgbClr val="FFFFFF"/>
           </a:solidFill>
-          <a:ln w="9525">
+          <a:ln w="11430">
             <a:solidFill>
               <a:srgbClr val="E2E8F0"/>
             </a:solidFill>
@@ -13148,61 +13462,23 @@
       </p:sp>
       <p:sp>
         <p:nvSpPr>
-          <p:cNvPr id="82" name="TextBox 81"/>
-          <p:cNvSpPr txBox="1"/>
-          <p:nvPr/>
-        </p:nvSpPr>
-        <p:spPr>
-          <a:xfrm>
-            <a:off x="8558784" y="4398264"/>
-            <a:ext cx="1874520" cy="256032"/>
-          </a:xfrm>
-          <a:prstGeom prst="rect">
-            <a:avLst/>
-          </a:prstGeom>
-          <a:noFill/>
-        </p:spPr>
-        <p:txBody>
-          <a:bodyPr wrap="square">
-            <a:spAutoFit/>
-          </a:bodyPr>
-          <a:lstStyle/>
-          <a:p>
-            <a:pPr algn="l"/>
-            <a:r>
-              <a:rPr sz="1100" b="0">
-                <a:solidFill>
-                  <a:srgbClr val="0F172A"/>
-                </a:solidFill>
-                <a:latin typeface="Calibri"/>
-                <a:ea typeface="Calibri"/>
-              </a:rPr>
-              <a:t>Ноорог бэлэн</a:t>
-            </a:r>
-          </a:p>
-        </p:txBody>
-      </p:sp>
-      <p:sp>
-        <p:nvSpPr>
           <p:cNvPr id="83" name="Rectangle 82"/>
           <p:cNvSpPr/>
           <p:nvPr/>
         </p:nvSpPr>
         <p:spPr>
           <a:xfrm>
-            <a:off x="10469880" y="4352544"/>
-            <a:ext cx="1371600" cy="347472"/>
+            <a:off x="8083294" y="4736592"/>
+            <a:ext cx="91440" cy="1664208"/>
           </a:xfrm>
           <a:prstGeom prst="rect">
             <a:avLst/>
           </a:prstGeom>
           <a:solidFill>
-            <a:srgbClr val="F1F5F9"/>
+            <a:srgbClr val="EA580C"/>
           </a:solidFill>
-          <a:ln w="9525">
-            <a:solidFill>
-              <a:srgbClr val="E2E8F0"/>
-            </a:solidFill>
+          <a:ln>
+            <a:noFill/>
           </a:ln>
         </p:spPr>
         <p:style>
@@ -13235,8 +13511,8 @@
         </p:nvSpPr>
         <p:spPr>
           <a:xfrm>
-            <a:off x="10524744" y="4398264"/>
-            <a:ext cx="1280160" cy="256032"/>
+            <a:off x="8284462" y="4828032"/>
+            <a:ext cx="3456431" cy="292608"/>
           </a:xfrm>
           <a:prstGeom prst="rect">
             <a:avLst/>
@@ -13251,14 +13527,14 @@
           <a:p>
             <a:pPr algn="l"/>
             <a:r>
-              <a:rPr sz="1100" b="1">
-                <a:solidFill>
-                  <a:srgbClr val="10B981"/>
-                </a:solidFill>
-                <a:latin typeface="Calibri"/>
-                <a:ea typeface="Calibri"/>
-              </a:rPr>
-              <a:t>70%</a:t>
+              <a:rPr sz="1400" b="1">
+                <a:solidFill>
+                  <a:srgbClr val="0F2F63"/>
+                </a:solidFill>
+                <a:latin typeface="Calibri"/>
+                <a:ea typeface="Calibri"/>
+              </a:rPr>
+              <a:t>Хэсэг нэмэх</a:t>
             </a:r>
           </a:p>
         </p:txBody>
@@ -13271,8 +13547,8 @@
         </p:nvSpPr>
         <p:spPr>
           <a:xfrm>
-            <a:off x="365760" y="5074920"/>
-            <a:ext cx="11475720" cy="1325880"/>
+            <a:off x="8284462" y="5138928"/>
+            <a:ext cx="3456431" cy="1097280"/>
           </a:xfrm>
           <a:prstGeom prst="rect">
             <a:avLst/>
@@ -13294,9 +13570,7 @@
                 <a:latin typeface="Calibri"/>
                 <a:ea typeface="Calibri"/>
               </a:rPr>
-              <a:t>Нүд дээр дарж шууд засна (SheetCell) — тусад нь «Хадгалах» дарахгүй. Хариуцагч / хяналтыг утасны жагсаалтаас нэрээр сонгоно (олон хүн « / »-аар).
-«+ Хэсэг нэмэх» — «Үүрэг чиглэл» эсвэл «Бэлтгэл ажил хангах төлөвлөгөө»-тэй ижил шинэ таб. Төлөвлөгөөний хүснэгт: ажлын чиглэл, арга хэмжээ, хугацаа, хамтран хэрэгжүүлэх.
-Хэрэгжилтийн дашбоард дээр дарвал нийт %, хэлтэс/хүнээр шүүсэн график нээгдэнэ.</a:t>
+              <a:t>«+ Хэсэг нэмэх» — шинэ таб. Загвар: Үүрэг чиглэл эсвэл Бэлтгэл ажил.</a:t>
             </a:r>
           </a:p>
         </p:txBody>

--- a/docs/manage-dotood-sistem-surgalt.pptx
+++ b/docs/manage-dotood-sistem-surgalt.pptx
@@ -7399,7 +7399,7 @@
                 <a:latin typeface="Calibri"/>
                 <a:ea typeface="Calibri"/>
               </a:rPr>
-              <a:t>Толгой: хуудасны нэр · QR уншигч · мэдэгдэл · апп суулгах · хэрэглэгч.</a:t>
+              <a:t>Толгой: хуудасны нэр · QR уншигч · мэдэгдэл · өргөтгөл · хэрэглэгч.</a:t>
             </a:r>
           </a:p>
           <a:p>
@@ -7776,7 +7776,7 @@
                 <a:latin typeface="Calibri"/>
                 <a:ea typeface="Calibri"/>
               </a:rPr>
-              <a:t>Утас / PWA</a:t>
+              <a:t>Утас / хөтөч</a:t>
             </a:r>
           </a:p>
         </p:txBody>
@@ -7816,7 +7816,7 @@
                 <a:latin typeface="Calibri"/>
                 <a:ea typeface="Calibri"/>
               </a:rPr>
-              <a:t>Цэс товчоор зүүн цэс нээгдэнэ.</a:t>
+              <a:t>Safari эсвэл Chrome хөтчөөр орно.</a:t>
             </a:r>
           </a:p>
           <a:p>
@@ -7833,7 +7833,7 @@
                 <a:latin typeface="Calibri"/>
                 <a:ea typeface="Calibri"/>
               </a:rPr>
-              <a:t>Android: Chrome → апп болгон суулгана.</a:t>
+              <a:t>Апп болгон суулгахгүй.</a:t>
             </a:r>
           </a:p>
           <a:p>
@@ -7850,7 +7850,7 @@
                 <a:latin typeface="Calibri"/>
                 <a:ea typeface="Calibri"/>
               </a:rPr>
-              <a:t>iPhone: Safari → «Нүүр дэлгэцэд нэмэх».</a:t>
+              <a:t>Цэс товчоор зүүн цэс нээгдэнэ.</a:t>
             </a:r>
           </a:p>
           <a:p>
@@ -7867,7 +7867,7 @@
                 <a:latin typeface="Calibri"/>
                 <a:ea typeface="Calibri"/>
               </a:rPr>
-              <a:t>Апп горимд хөтчийн хаяг харагдахгүй.</a:t>
+              <a:t>Хаяг: manage.dornogovi.gov.mn</a:t>
             </a:r>
           </a:p>
         </p:txBody>
